--- a/LG_부트캠프_13기_C반_포스터(4팀).pptx
+++ b/LG_부트캠프_13기_C반_포스터(4팀).pptx
@@ -7,30 +7,28 @@
   <p:sldIdLst>
     <p:sldId id="256" r:id="rId2"/>
     <p:sldId id="257" r:id="rId3"/>
-    <p:sldId id="258" r:id="rId4"/>
-    <p:sldId id="259" r:id="rId5"/>
   </p:sldIdLst>
   <p:sldSz cx="7559675" cy="10691813"/>
   <p:notesSz cx="6858000" cy="9144000"/>
   <p:embeddedFontLst>
     <p:embeddedFont>
       <p:font typeface="Malgun Gothic" panose="020B0503020000020004" pitchFamily="50" charset="-127"/>
-      <p:regular r:id="rId6"/>
-      <p:bold r:id="rId7"/>
+      <p:regular r:id="rId4"/>
+      <p:bold r:id="rId5"/>
     </p:embeddedFont>
     <p:embeddedFont>
       <p:font typeface="Calibri" panose="020F0502020204030204" pitchFamily="34" charset="0"/>
-      <p:regular r:id="rId8"/>
-      <p:bold r:id="rId9"/>
-      <p:italic r:id="rId10"/>
-      <p:boldItalic r:id="rId11"/>
+      <p:regular r:id="rId6"/>
+      <p:bold r:id="rId7"/>
+      <p:italic r:id="rId8"/>
+      <p:boldItalic r:id="rId9"/>
     </p:embeddedFont>
     <p:embeddedFont>
       <p:font typeface="Cambria" panose="02040503050406030204" pitchFamily="18" charset="0"/>
-      <p:regular r:id="rId12"/>
-      <p:bold r:id="rId13"/>
-      <p:italic r:id="rId14"/>
-      <p:boldItalic r:id="rId15"/>
+      <p:regular r:id="rId10"/>
+      <p:bold r:id="rId11"/>
+      <p:italic r:id="rId12"/>
+      <p:boldItalic r:id="rId13"/>
     </p:embeddedFont>
   </p:embeddedFontLst>
   <p:defaultTextStyle>
@@ -3175,7 +3173,7 @@
         </p:nvSpPr>
         <p:spPr>
           <a:xfrm>
-            <a:off x="457200" y="457200"/>
+            <a:off x="457200" y="338125"/>
             <a:ext cx="6645584" cy="274320"/>
           </a:xfrm>
           <a:prstGeom prst="rect">
@@ -3195,7 +3193,7 @@
               </a:spcAft>
             </a:pPr>
             <a:r>
-              <a:rPr sz="1100" b="1" i="0" spc="120">
+              <a:rPr sz="1100" b="1" i="0" spc="120" dirty="0">
                 <a:solidFill>
                   <a:srgbClr val="CADCFC"/>
                 </a:solidFill>
@@ -3203,8 +3201,93 @@
                 <a:ea typeface="Malgun Gothic"/>
                 <a:cs typeface="Malgun Gothic"/>
               </a:rPr>
-              <a:t>SW BOOTCAMP 13기   ·   C반 4팀   ·   프로젝트 요약 포스터</a:t>
-            </a:r>
+              <a:t>SW BOOTCAMP 13기   ·   </a:t>
+            </a:r>
+            <a:r>
+              <a:rPr sz="1100" b="1" i="0" spc="120" dirty="0" err="1">
+                <a:solidFill>
+                  <a:srgbClr val="CADCFC"/>
+                </a:solidFill>
+                <a:latin typeface="Malgun Gothic"/>
+                <a:ea typeface="Malgun Gothic"/>
+                <a:cs typeface="Malgun Gothic"/>
+              </a:rPr>
+              <a:t>C반</a:t>
+            </a:r>
+            <a:r>
+              <a:rPr sz="1100" b="1" i="0" spc="120" dirty="0">
+                <a:solidFill>
+                  <a:srgbClr val="CADCFC"/>
+                </a:solidFill>
+                <a:latin typeface="Malgun Gothic"/>
+                <a:ea typeface="Malgun Gothic"/>
+                <a:cs typeface="Malgun Gothic"/>
+              </a:rPr>
+              <a:t> 4팀   ·   </a:t>
+            </a:r>
+            <a:r>
+              <a:rPr sz="1100" b="1" i="0" spc="120" dirty="0" err="1">
+                <a:solidFill>
+                  <a:srgbClr val="CADCFC"/>
+                </a:solidFill>
+                <a:latin typeface="Malgun Gothic"/>
+                <a:ea typeface="Malgun Gothic"/>
+                <a:cs typeface="Malgun Gothic"/>
+              </a:rPr>
+              <a:t>프로젝트</a:t>
+            </a:r>
+            <a:r>
+              <a:rPr sz="1100" b="1" i="0" spc="120" dirty="0">
+                <a:solidFill>
+                  <a:srgbClr val="CADCFC"/>
+                </a:solidFill>
+                <a:latin typeface="Malgun Gothic"/>
+                <a:ea typeface="Malgun Gothic"/>
+                <a:cs typeface="Malgun Gothic"/>
+              </a:rPr>
+              <a:t> </a:t>
+            </a:r>
+            <a:r>
+              <a:rPr sz="1100" b="1" i="0" spc="120" dirty="0" err="1">
+                <a:solidFill>
+                  <a:srgbClr val="CADCFC"/>
+                </a:solidFill>
+                <a:latin typeface="Malgun Gothic"/>
+                <a:ea typeface="Malgun Gothic"/>
+                <a:cs typeface="Malgun Gothic"/>
+              </a:rPr>
+              <a:t>요약</a:t>
+            </a:r>
+            <a:r>
+              <a:rPr sz="1100" b="1" i="0" spc="120" dirty="0">
+                <a:solidFill>
+                  <a:srgbClr val="CADCFC"/>
+                </a:solidFill>
+                <a:latin typeface="Malgun Gothic"/>
+                <a:ea typeface="Malgun Gothic"/>
+                <a:cs typeface="Malgun Gothic"/>
+              </a:rPr>
+              <a:t> </a:t>
+            </a:r>
+            <a:r>
+              <a:rPr sz="1100" b="1" i="0" spc="120" dirty="0" err="1">
+                <a:solidFill>
+                  <a:srgbClr val="CADCFC"/>
+                </a:solidFill>
+                <a:latin typeface="Malgun Gothic"/>
+                <a:ea typeface="Malgun Gothic"/>
+                <a:cs typeface="Malgun Gothic"/>
+              </a:rPr>
+              <a:t>포스터</a:t>
+            </a:r>
+            <a:endParaRPr sz="1100" b="1" i="0" spc="120" dirty="0">
+              <a:solidFill>
+                <a:srgbClr val="CADCFC"/>
+              </a:solidFill>
+              <a:latin typeface="Malgun Gothic"/>
+              <a:ea typeface="Malgun Gothic"/>
+              <a:cs typeface="Malgun Gothic"/>
+            </a:endParaRPr>
           </a:p>
         </p:txBody>
       </p:sp>
@@ -3216,8 +3299,8 @@
         </p:nvSpPr>
         <p:spPr>
           <a:xfrm>
-            <a:off x="438912" y="768096"/>
-            <a:ext cx="6645584" cy="868680"/>
+            <a:off x="438912" y="822960"/>
+            <a:ext cx="6645584" cy="822960"/>
           </a:xfrm>
           <a:prstGeom prst="rect">
             <a:avLst/>
@@ -3236,7 +3319,7 @@
               </a:spcAft>
             </a:pPr>
             <a:r>
-              <a:rPr sz="4100" b="1" i="0">
+              <a:rPr sz="3600" b="1" i="0">
                 <a:solidFill>
                   <a:srgbClr val="FFFFFF"/>
                 </a:solidFill>
@@ -3247,7 +3330,7 @@
               <a:t>Copilot </a:t>
             </a:r>
             <a:r>
-              <a:rPr sz="4100" b="1" i="0">
+              <a:rPr sz="3600" b="1" i="0">
                 <a:solidFill>
                   <a:srgbClr val="E4002B"/>
                 </a:solidFill>
@@ -3263,6 +3346,223 @@
       <p:sp>
         <p:nvSpPr>
           <p:cNvPr id="5" name="TextBox 4"/>
+          <p:cNvSpPr txBox="1"/>
+          <p:nvPr/>
+        </p:nvSpPr>
+        <p:spPr>
+          <a:xfrm>
+            <a:off x="457672" y="656823"/>
+            <a:ext cx="3048000" cy="125804"/>
+          </a:xfrm>
+          <a:prstGeom prst="rect">
+            <a:avLst/>
+          </a:prstGeom>
+          <a:noFill/>
+        </p:spPr>
+        <p:txBody>
+          <a:bodyPr wrap="square" lIns="73152" tIns="0" rIns="73152" bIns="0" anchor="t">
+            <a:spAutoFit/>
+          </a:bodyPr>
+          <a:lstStyle/>
+          <a:p>
+            <a:pPr>
+              <a:lnSpc>
+                <a:spcPct val="112000"/>
+              </a:lnSpc>
+              <a:spcAft>
+                <a:spcPts val="0"/>
+              </a:spcAft>
+            </a:pPr>
+            <a:r>
+              <a:rPr sz="800" b="0" i="0" dirty="0" err="1">
+                <a:solidFill>
+                  <a:srgbClr val="CADCFC"/>
+                </a:solidFill>
+                <a:latin typeface="Malgun Gothic"/>
+                <a:ea typeface="Malgun Gothic"/>
+                <a:cs typeface="Malgun Gothic"/>
+              </a:rPr>
+              <a:t>김태용</a:t>
+            </a:r>
+            <a:r>
+              <a:rPr sz="800" b="0" i="0" dirty="0">
+                <a:solidFill>
+                  <a:srgbClr val="CADCFC"/>
+                </a:solidFill>
+                <a:latin typeface="Malgun Gothic"/>
+                <a:ea typeface="Malgun Gothic"/>
+                <a:cs typeface="Malgun Gothic"/>
+              </a:rPr>
+              <a:t> </a:t>
+            </a:r>
+            <a:r>
+              <a:rPr sz="800" b="0" i="0" dirty="0" err="1">
+                <a:solidFill>
+                  <a:srgbClr val="CADCFC"/>
+                </a:solidFill>
+                <a:latin typeface="Malgun Gothic"/>
+                <a:ea typeface="Malgun Gothic"/>
+                <a:cs typeface="Malgun Gothic"/>
+              </a:rPr>
+              <a:t>연구원</a:t>
+            </a:r>
+            <a:r>
+              <a:rPr lang="en-US" sz="800" b="0" i="0" dirty="0">
+                <a:solidFill>
+                  <a:srgbClr val="CADCFC"/>
+                </a:solidFill>
+                <a:latin typeface="Malgun Gothic"/>
+                <a:ea typeface="Malgun Gothic"/>
+                <a:cs typeface="Malgun Gothic"/>
+              </a:rPr>
+              <a:t>, </a:t>
+            </a:r>
+            <a:r>
+              <a:rPr sz="800" b="0" i="0" dirty="0" err="1">
+                <a:solidFill>
+                  <a:srgbClr val="CADCFC"/>
+                </a:solidFill>
+                <a:latin typeface="Malgun Gothic"/>
+                <a:ea typeface="Malgun Gothic"/>
+                <a:cs typeface="Malgun Gothic"/>
+              </a:rPr>
+              <a:t>김민정</a:t>
+            </a:r>
+            <a:r>
+              <a:rPr sz="800" b="0" i="0" dirty="0">
+                <a:solidFill>
+                  <a:srgbClr val="CADCFC"/>
+                </a:solidFill>
+                <a:latin typeface="Malgun Gothic"/>
+                <a:ea typeface="Malgun Gothic"/>
+                <a:cs typeface="Malgun Gothic"/>
+              </a:rPr>
+              <a:t> </a:t>
+            </a:r>
+            <a:r>
+              <a:rPr lang="ko-KR" altLang="en-US" sz="800" b="0" i="0" dirty="0">
+                <a:solidFill>
+                  <a:srgbClr val="CADCFC"/>
+                </a:solidFill>
+                <a:latin typeface="Malgun Gothic"/>
+                <a:ea typeface="Malgun Gothic"/>
+                <a:cs typeface="Malgun Gothic"/>
+              </a:rPr>
+              <a:t>연</a:t>
+            </a:r>
+            <a:r>
+              <a:rPr sz="800" b="0" i="0" dirty="0" err="1">
+                <a:solidFill>
+                  <a:srgbClr val="CADCFC"/>
+                </a:solidFill>
+                <a:latin typeface="Malgun Gothic"/>
+                <a:ea typeface="Malgun Gothic"/>
+                <a:cs typeface="Malgun Gothic"/>
+              </a:rPr>
+              <a:t>구원</a:t>
+            </a:r>
+            <a:r>
+              <a:rPr lang="en-US" sz="800" dirty="0">
+                <a:solidFill>
+                  <a:srgbClr val="CADCFC"/>
+                </a:solidFill>
+                <a:latin typeface="Malgun Gothic"/>
+                <a:ea typeface="Malgun Gothic"/>
+                <a:cs typeface="Malgun Gothic"/>
+              </a:rPr>
+              <a:t>, </a:t>
+            </a:r>
+            <a:r>
+              <a:rPr sz="800" b="0" i="0" dirty="0" err="1">
+                <a:solidFill>
+                  <a:srgbClr val="CADCFC"/>
+                </a:solidFill>
+                <a:latin typeface="Malgun Gothic"/>
+                <a:ea typeface="Malgun Gothic"/>
+                <a:cs typeface="Malgun Gothic"/>
+              </a:rPr>
+              <a:t>박혜림</a:t>
+            </a:r>
+            <a:r>
+              <a:rPr sz="800" b="0" i="0" dirty="0">
+                <a:solidFill>
+                  <a:srgbClr val="CADCFC"/>
+                </a:solidFill>
+                <a:latin typeface="Malgun Gothic"/>
+                <a:ea typeface="Malgun Gothic"/>
+                <a:cs typeface="Malgun Gothic"/>
+              </a:rPr>
+              <a:t> </a:t>
+            </a:r>
+            <a:r>
+              <a:rPr sz="800" b="0" i="0" dirty="0" err="1">
+                <a:solidFill>
+                  <a:srgbClr val="CADCFC"/>
+                </a:solidFill>
+                <a:latin typeface="Malgun Gothic"/>
+                <a:ea typeface="Malgun Gothic"/>
+                <a:cs typeface="Malgun Gothic"/>
+              </a:rPr>
+              <a:t>연구원</a:t>
+            </a:r>
+            <a:r>
+              <a:rPr lang="en-US" sz="800" b="0" i="0" dirty="0">
+                <a:solidFill>
+                  <a:srgbClr val="CADCFC"/>
+                </a:solidFill>
+                <a:latin typeface="Malgun Gothic"/>
+                <a:ea typeface="Malgun Gothic"/>
+                <a:cs typeface="Malgun Gothic"/>
+              </a:rPr>
+              <a:t>, </a:t>
+            </a:r>
+            <a:r>
+              <a:rPr sz="800" b="0" i="0" dirty="0" err="1">
+                <a:solidFill>
+                  <a:srgbClr val="CADCFC"/>
+                </a:solidFill>
+                <a:latin typeface="Malgun Gothic"/>
+                <a:ea typeface="Malgun Gothic"/>
+                <a:cs typeface="Malgun Gothic"/>
+              </a:rPr>
+              <a:t>홍창표</a:t>
+            </a:r>
+            <a:r>
+              <a:rPr sz="800" b="0" i="0" dirty="0">
+                <a:solidFill>
+                  <a:srgbClr val="CADCFC"/>
+                </a:solidFill>
+                <a:latin typeface="Malgun Gothic"/>
+                <a:ea typeface="Malgun Gothic"/>
+                <a:cs typeface="Malgun Gothic"/>
+              </a:rPr>
+              <a:t> </a:t>
+            </a:r>
+            <a:r>
+              <a:rPr sz="800" b="0" i="0" dirty="0" err="1">
+                <a:solidFill>
+                  <a:srgbClr val="CADCFC"/>
+                </a:solidFill>
+                <a:latin typeface="Malgun Gothic"/>
+                <a:ea typeface="Malgun Gothic"/>
+                <a:cs typeface="Malgun Gothic"/>
+              </a:rPr>
+              <a:t>연구원</a:t>
+            </a:r>
+            <a:endParaRPr sz="800" b="0" i="0" dirty="0">
+              <a:solidFill>
+                <a:srgbClr val="CADCFC"/>
+              </a:solidFill>
+              <a:latin typeface="Malgun Gothic"/>
+              <a:ea typeface="Malgun Gothic"/>
+              <a:cs typeface="Malgun Gothic"/>
+            </a:endParaRPr>
+          </a:p>
+        </p:txBody>
+      </p:sp>
+      <p:sp>
+        <p:nvSpPr>
+          <p:cNvPr id="6" name="TextBox 5"/>
           <p:cNvSpPr txBox="1"/>
           <p:nvPr/>
         </p:nvSpPr>
@@ -3296,14 +3596,14 @@
                 <a:ea typeface="Malgun Gothic"/>
                 <a:cs typeface="Malgun Gothic"/>
               </a:rPr>
-              <a:t>Copilot Chat 프롬프트를 가로채 자동 정제하는 메타프롬프팅 시스템</a:t>
-            </a:r>
-          </a:p>
-        </p:txBody>
-      </p:sp>
-      <p:sp>
-        <p:nvSpPr>
-          <p:cNvPr id="6" name="Rounded Rectangle 5"/>
+              <a:t>VSCode Copilot 확장에서 간편하게 사용하는 프롬프트 개선 서비스</a:t>
+            </a:r>
+          </a:p>
+        </p:txBody>
+      </p:sp>
+      <p:sp>
+        <p:nvSpPr>
+          <p:cNvPr id="7" name="Rounded Rectangle 6"/>
           <p:cNvSpPr/>
           <p:nvPr/>
         </p:nvSpPr>
@@ -3350,7 +3650,7 @@
       </p:sp>
       <p:sp>
         <p:nvSpPr>
-          <p:cNvPr id="7" name="TextBox 6"/>
+          <p:cNvPr id="8" name="TextBox 7"/>
           <p:cNvSpPr txBox="1"/>
           <p:nvPr/>
         </p:nvSpPr>
@@ -3376,7 +3676,7 @@
               </a:spcAft>
             </a:pPr>
             <a:r>
-              <a:rPr sz="1350" b="1" i="0">
+              <a:rPr sz="1350" b="1" i="0" dirty="0">
                 <a:solidFill>
                   <a:srgbClr val="E4002B"/>
                 </a:solidFill>
@@ -3387,7 +3687,7 @@
               <a:t>@refine</a:t>
             </a:r>
             <a:r>
-              <a:rPr sz="1250" b="0" i="0">
+              <a:rPr sz="1250" b="0" i="0" dirty="0">
                 <a:solidFill>
                   <a:srgbClr val="FFFFFF"/>
                 </a:solidFill>
@@ -3395,21 +3695,432 @@
                 <a:ea typeface="Malgun Gothic"/>
                 <a:cs typeface="Malgun Gothic"/>
               </a:rPr>
-              <a:t> — 거친 한 줄 질문을, 검증된 고품질 프롬프트로</a:t>
-            </a:r>
-          </a:p>
-        </p:txBody>
-      </p:sp>
-      <p:sp>
-        <p:nvSpPr>
-          <p:cNvPr id="8" name="Rounded Rectangle 7"/>
+              <a:t> — </a:t>
+            </a:r>
+            <a:r>
+              <a:rPr sz="1250" b="0" i="0" dirty="0" err="1">
+                <a:solidFill>
+                  <a:srgbClr val="FFFFFF"/>
+                </a:solidFill>
+                <a:latin typeface="Malgun Gothic"/>
+                <a:ea typeface="Malgun Gothic"/>
+                <a:cs typeface="Malgun Gothic"/>
+              </a:rPr>
+              <a:t>간단한</a:t>
+            </a:r>
+            <a:r>
+              <a:rPr sz="1250" b="0" i="0" dirty="0">
+                <a:solidFill>
+                  <a:srgbClr val="FFFFFF"/>
+                </a:solidFill>
+                <a:latin typeface="Malgun Gothic"/>
+                <a:ea typeface="Malgun Gothic"/>
+                <a:cs typeface="Malgun Gothic"/>
+              </a:rPr>
+              <a:t> </a:t>
+            </a:r>
+            <a:r>
+              <a:rPr sz="1250" b="0" i="0" dirty="0" err="1">
+                <a:solidFill>
+                  <a:srgbClr val="FFFFFF"/>
+                </a:solidFill>
+                <a:latin typeface="Malgun Gothic"/>
+                <a:ea typeface="Malgun Gothic"/>
+                <a:cs typeface="Malgun Gothic"/>
+              </a:rPr>
+              <a:t>프롬프트를</a:t>
+            </a:r>
+            <a:r>
+              <a:rPr sz="1250" b="0" i="0" dirty="0">
+                <a:solidFill>
+                  <a:srgbClr val="FFFFFF"/>
+                </a:solidFill>
+                <a:latin typeface="Malgun Gothic"/>
+                <a:ea typeface="Malgun Gothic"/>
+                <a:cs typeface="Malgun Gothic"/>
+              </a:rPr>
+              <a:t> </a:t>
+            </a:r>
+            <a:r>
+              <a:rPr sz="1250" b="0" i="0" dirty="0" err="1">
+                <a:solidFill>
+                  <a:srgbClr val="FFFFFF"/>
+                </a:solidFill>
+                <a:latin typeface="Malgun Gothic"/>
+                <a:ea typeface="Malgun Gothic"/>
+                <a:cs typeface="Malgun Gothic"/>
+              </a:rPr>
+              <a:t>구조화된</a:t>
+            </a:r>
+            <a:r>
+              <a:rPr sz="1250" b="0" i="0" dirty="0">
+                <a:solidFill>
+                  <a:srgbClr val="FFFFFF"/>
+                </a:solidFill>
+                <a:latin typeface="Malgun Gothic"/>
+                <a:ea typeface="Malgun Gothic"/>
+                <a:cs typeface="Malgun Gothic"/>
+              </a:rPr>
+              <a:t> </a:t>
+            </a:r>
+            <a:r>
+              <a:rPr sz="1250" b="0" i="0" dirty="0" err="1">
+                <a:solidFill>
+                  <a:srgbClr val="FFFFFF"/>
+                </a:solidFill>
+                <a:latin typeface="Malgun Gothic"/>
+                <a:ea typeface="Malgun Gothic"/>
+                <a:cs typeface="Malgun Gothic"/>
+              </a:rPr>
+              <a:t>프롬프트로</a:t>
+            </a:r>
+            <a:endParaRPr sz="1250" b="0" i="0" dirty="0">
+              <a:solidFill>
+                <a:srgbClr val="FFFFFF"/>
+              </a:solidFill>
+              <a:latin typeface="Malgun Gothic"/>
+              <a:ea typeface="Malgun Gothic"/>
+              <a:cs typeface="Malgun Gothic"/>
+            </a:endParaRPr>
+          </a:p>
+        </p:txBody>
+      </p:sp>
+      <p:sp>
+        <p:nvSpPr>
+          <p:cNvPr id="9" name="Rounded Rectangle 8"/>
           <p:cNvSpPr/>
           <p:nvPr/>
         </p:nvSpPr>
         <p:spPr>
           <a:xfrm>
-            <a:off x="457200" y="2798064"/>
-            <a:ext cx="1318496" cy="402336"/>
+            <a:off x="457200" y="2779776"/>
+            <a:ext cx="1371600" cy="493776"/>
+          </a:xfrm>
+          <a:prstGeom prst="roundRect">
+            <a:avLst>
+              <a:gd name="adj" fmla="val 50000"/>
+            </a:avLst>
+          </a:prstGeom>
+          <a:solidFill>
+            <a:srgbClr val="23304F"/>
+          </a:solidFill>
+          <a:ln>
+            <a:noFill/>
+          </a:ln>
+          <a:effectLst/>
+        </p:spPr>
+        <p:style>
+          <a:lnRef idx="1">
+            <a:schemeClr val="accent1"/>
+          </a:lnRef>
+          <a:fillRef idx="3">
+            <a:schemeClr val="accent1"/>
+          </a:fillRef>
+          <a:effectRef idx="2">
+            <a:schemeClr val="accent1"/>
+          </a:effectRef>
+          <a:fontRef idx="minor">
+            <a:schemeClr val="lt1"/>
+          </a:fontRef>
+        </p:style>
+        <p:txBody>
+          <a:bodyPr rtlCol="0" anchor="ctr"/>
+          <a:lstStyle/>
+          <a:p>
+            <a:pPr algn="ctr"/>
+            <a:endParaRPr/>
+          </a:p>
+        </p:txBody>
+      </p:sp>
+      <p:sp>
+        <p:nvSpPr>
+          <p:cNvPr id="10" name="TextBox 9"/>
+          <p:cNvSpPr txBox="1"/>
+          <p:nvPr/>
+        </p:nvSpPr>
+        <p:spPr>
+          <a:xfrm>
+            <a:off x="457200" y="2779776"/>
+            <a:ext cx="1371600" cy="493776"/>
+          </a:xfrm>
+          <a:prstGeom prst="rect">
+            <a:avLst/>
+          </a:prstGeom>
+          <a:noFill/>
+        </p:spPr>
+        <p:txBody>
+          <a:bodyPr wrap="square" lIns="0" tIns="0" rIns="0" bIns="0" anchor="ctr">
+            <a:spAutoFit/>
+          </a:bodyPr>
+          <a:lstStyle/>
+          <a:p>
+            <a:pPr algn="ctr">
+              <a:spcAft>
+                <a:spcPts val="0"/>
+              </a:spcAft>
+            </a:pPr>
+            <a:r>
+              <a:rPr sz="1050" b="1" i="0">
+                <a:solidFill>
+                  <a:srgbClr val="FFFFFF"/>
+                </a:solidFill>
+                <a:latin typeface="Malgun Gothic"/>
+                <a:ea typeface="Malgun Gothic"/>
+                <a:cs typeface="Malgun Gothic"/>
+              </a:rPr>
+              <a:t>사용자 입력</a:t>
+            </a:r>
+          </a:p>
+        </p:txBody>
+      </p:sp>
+      <p:sp>
+        <p:nvSpPr>
+          <p:cNvPr id="11" name="TextBox 10"/>
+          <p:cNvSpPr txBox="1"/>
+          <p:nvPr/>
+        </p:nvSpPr>
+        <p:spPr>
+          <a:xfrm>
+            <a:off x="1828800" y="2779776"/>
+            <a:ext cx="411480" cy="493776"/>
+          </a:xfrm>
+          <a:prstGeom prst="rect">
+            <a:avLst/>
+          </a:prstGeom>
+          <a:noFill/>
+        </p:spPr>
+        <p:txBody>
+          <a:bodyPr wrap="square" lIns="0" tIns="0" rIns="0" bIns="0" anchor="ctr">
+            <a:spAutoFit/>
+          </a:bodyPr>
+          <a:lstStyle/>
+          <a:p>
+            <a:pPr algn="ctr">
+              <a:spcAft>
+                <a:spcPts val="0"/>
+              </a:spcAft>
+            </a:pPr>
+            <a:r>
+              <a:rPr sz="1600" b="1" i="0">
+                <a:solidFill>
+                  <a:srgbClr val="E4002B"/>
+                </a:solidFill>
+                <a:latin typeface="Calibri"/>
+                <a:ea typeface="Malgun Gothic"/>
+                <a:cs typeface="Calibri"/>
+              </a:rPr>
+              <a:t>→</a:t>
+            </a:r>
+          </a:p>
+        </p:txBody>
+      </p:sp>
+      <p:sp>
+        <p:nvSpPr>
+          <p:cNvPr id="12" name="Rounded Rectangle 11"/>
+          <p:cNvSpPr/>
+          <p:nvPr/>
+        </p:nvSpPr>
+        <p:spPr>
+          <a:xfrm>
+            <a:off x="2240280" y="2779776"/>
+            <a:ext cx="3127248" cy="493776"/>
+          </a:xfrm>
+          <a:prstGeom prst="roundRect">
+            <a:avLst>
+              <a:gd name="adj" fmla="val 16000"/>
+            </a:avLst>
+          </a:prstGeom>
+          <a:solidFill>
+            <a:srgbClr val="1A253D"/>
+          </a:solidFill>
+          <a:ln w="12700">
+            <a:solidFill>
+              <a:srgbClr val="23304F"/>
+            </a:solidFill>
+          </a:ln>
+          <a:effectLst/>
+        </p:spPr>
+        <p:style>
+          <a:lnRef idx="1">
+            <a:schemeClr val="accent1"/>
+          </a:lnRef>
+          <a:fillRef idx="3">
+            <a:schemeClr val="accent1"/>
+          </a:fillRef>
+          <a:effectRef idx="2">
+            <a:schemeClr val="accent1"/>
+          </a:effectRef>
+          <a:fontRef idx="minor">
+            <a:schemeClr val="lt1"/>
+          </a:fontRef>
+        </p:style>
+        <p:txBody>
+          <a:bodyPr rtlCol="0" anchor="ctr"/>
+          <a:lstStyle/>
+          <a:p>
+            <a:pPr algn="ctr"/>
+            <a:endParaRPr/>
+          </a:p>
+        </p:txBody>
+      </p:sp>
+      <p:sp>
+        <p:nvSpPr>
+          <p:cNvPr id="13" name="TextBox 12"/>
+          <p:cNvSpPr txBox="1"/>
+          <p:nvPr/>
+        </p:nvSpPr>
+        <p:spPr>
+          <a:xfrm>
+            <a:off x="2240280" y="2779776"/>
+            <a:ext cx="3127248" cy="493776"/>
+          </a:xfrm>
+          <a:prstGeom prst="rect">
+            <a:avLst/>
+          </a:prstGeom>
+          <a:noFill/>
+        </p:spPr>
+        <p:txBody>
+          <a:bodyPr wrap="square" lIns="36576" tIns="0" rIns="36576" bIns="0" anchor="ctr">
+            <a:spAutoFit/>
+          </a:bodyPr>
+          <a:lstStyle/>
+          <a:p>
+            <a:pPr algn="ctr">
+              <a:spcAft>
+                <a:spcPts val="0"/>
+              </a:spcAft>
+            </a:pPr>
+            <a:r>
+              <a:rPr sz="1150" b="1" i="0">
+                <a:solidFill>
+                  <a:srgbClr val="FFFFFF"/>
+                </a:solidFill>
+                <a:latin typeface="Malgun Gothic"/>
+                <a:ea typeface="Malgun Gothic"/>
+                <a:cs typeface="Malgun Gothic"/>
+              </a:rPr>
+              <a:t>정제</a:t>
+            </a:r>
+            <a:r>
+              <a:rPr sz="1200" b="1" i="0">
+                <a:solidFill>
+                  <a:srgbClr val="E4002B"/>
+                </a:solidFill>
+                <a:latin typeface="Cambria"/>
+                <a:ea typeface="Malgun Gothic"/>
+                <a:cs typeface="Cambria"/>
+              </a:rPr>
+              <a:t>  ›  </a:t>
+            </a:r>
+            <a:r>
+              <a:rPr sz="1150" b="1" i="0">
+                <a:solidFill>
+                  <a:srgbClr val="FFFFFF"/>
+                </a:solidFill>
+                <a:latin typeface="Malgun Gothic"/>
+                <a:ea typeface="Malgun Gothic"/>
+                <a:cs typeface="Malgun Gothic"/>
+              </a:rPr>
+              <a:t>검색</a:t>
+            </a:r>
+            <a:r>
+              <a:rPr sz="1200" b="1" i="0">
+                <a:solidFill>
+                  <a:srgbClr val="E4002B"/>
+                </a:solidFill>
+                <a:latin typeface="Cambria"/>
+                <a:ea typeface="Malgun Gothic"/>
+                <a:cs typeface="Cambria"/>
+              </a:rPr>
+              <a:t>  ›  </a:t>
+            </a:r>
+            <a:r>
+              <a:rPr sz="1150" b="1" i="0">
+                <a:solidFill>
+                  <a:srgbClr val="FFFFFF"/>
+                </a:solidFill>
+                <a:latin typeface="Malgun Gothic"/>
+                <a:ea typeface="Malgun Gothic"/>
+                <a:cs typeface="Malgun Gothic"/>
+              </a:rPr>
+              <a:t>리랭킹</a:t>
+            </a:r>
+            <a:r>
+              <a:rPr sz="1200" b="1" i="0">
+                <a:solidFill>
+                  <a:srgbClr val="E4002B"/>
+                </a:solidFill>
+                <a:latin typeface="Cambria"/>
+                <a:ea typeface="Malgun Gothic"/>
+                <a:cs typeface="Cambria"/>
+              </a:rPr>
+              <a:t>  ›  </a:t>
+            </a:r>
+            <a:r>
+              <a:rPr sz="1150" b="1" i="0">
+                <a:solidFill>
+                  <a:srgbClr val="FFFFFF"/>
+                </a:solidFill>
+                <a:latin typeface="Malgun Gothic"/>
+                <a:ea typeface="Malgun Gothic"/>
+                <a:cs typeface="Malgun Gothic"/>
+              </a:rPr>
+              <a:t>생성</a:t>
+            </a:r>
+          </a:p>
+        </p:txBody>
+      </p:sp>
+      <p:sp>
+        <p:nvSpPr>
+          <p:cNvPr id="14" name="TextBox 13"/>
+          <p:cNvSpPr txBox="1"/>
+          <p:nvPr/>
+        </p:nvSpPr>
+        <p:spPr>
+          <a:xfrm>
+            <a:off x="5367528" y="2779776"/>
+            <a:ext cx="411480" cy="493776"/>
+          </a:xfrm>
+          <a:prstGeom prst="rect">
+            <a:avLst/>
+          </a:prstGeom>
+          <a:noFill/>
+        </p:spPr>
+        <p:txBody>
+          <a:bodyPr wrap="square" lIns="0" tIns="0" rIns="0" bIns="0" anchor="ctr">
+            <a:spAutoFit/>
+          </a:bodyPr>
+          <a:lstStyle/>
+          <a:p>
+            <a:pPr algn="ctr">
+              <a:spcAft>
+                <a:spcPts val="0"/>
+              </a:spcAft>
+            </a:pPr>
+            <a:r>
+              <a:rPr sz="1600" b="1" i="0">
+                <a:solidFill>
+                  <a:srgbClr val="E4002B"/>
+                </a:solidFill>
+                <a:latin typeface="Calibri"/>
+                <a:ea typeface="Malgun Gothic"/>
+                <a:cs typeface="Calibri"/>
+              </a:rPr>
+              <a:t>→</a:t>
+            </a:r>
+          </a:p>
+        </p:txBody>
+      </p:sp>
+      <p:sp>
+        <p:nvSpPr>
+          <p:cNvPr id="15" name="Rounded Rectangle 14"/>
+          <p:cNvSpPr/>
+          <p:nvPr/>
+        </p:nvSpPr>
+        <p:spPr>
+          <a:xfrm>
+            <a:off x="5779008" y="2779776"/>
+            <a:ext cx="1323776" cy="493776"/>
           </a:xfrm>
           <a:prstGeom prst="roundRect">
             <a:avLst>
@@ -3449,14 +4160,14 @@
       </p:sp>
       <p:sp>
         <p:nvSpPr>
-          <p:cNvPr id="9" name="TextBox 8"/>
+          <p:cNvPr id="16" name="TextBox 15"/>
           <p:cNvSpPr txBox="1"/>
           <p:nvPr/>
         </p:nvSpPr>
         <p:spPr>
           <a:xfrm>
-            <a:off x="457200" y="2798064"/>
-            <a:ext cx="1318496" cy="402336"/>
+            <a:off x="5779008" y="2779776"/>
+            <a:ext cx="1323776" cy="493776"/>
           </a:xfrm>
           <a:prstGeom prst="rect">
             <a:avLst/>
@@ -3475,7 +4186,7 @@
               </a:spcAft>
             </a:pPr>
             <a:r>
-              <a:rPr sz="1150" b="1" i="0">
+              <a:rPr sz="1050" b="1" i="0">
                 <a:solidFill>
                   <a:srgbClr val="FFFFFF"/>
                 </a:solidFill>
@@ -3483,401 +4194,14 @@
                 <a:ea typeface="Malgun Gothic"/>
                 <a:cs typeface="Malgun Gothic"/>
               </a:rPr>
-              <a:t>정제</a:t>
-            </a:r>
-          </a:p>
-        </p:txBody>
-      </p:sp>
-      <p:sp>
-        <p:nvSpPr>
-          <p:cNvPr id="10" name="TextBox 9"/>
-          <p:cNvSpPr txBox="1"/>
-          <p:nvPr/>
-        </p:nvSpPr>
-        <p:spPr>
-          <a:xfrm>
-            <a:off x="1775696" y="2798064"/>
-            <a:ext cx="457200" cy="402336"/>
-          </a:xfrm>
-          <a:prstGeom prst="rect">
-            <a:avLst/>
-          </a:prstGeom>
-          <a:noFill/>
-        </p:spPr>
-        <p:txBody>
-          <a:bodyPr wrap="square" lIns="0" tIns="0" rIns="0" bIns="0" anchor="ctr">
-            <a:spAutoFit/>
-          </a:bodyPr>
-          <a:lstStyle/>
-          <a:p>
-            <a:pPr algn="ctr">
-              <a:spcAft>
-                <a:spcPts val="0"/>
-              </a:spcAft>
-            </a:pPr>
-            <a:r>
-              <a:rPr sz="1400" b="1" i="0">
-                <a:solidFill>
-                  <a:srgbClr val="E4002B"/>
-                </a:solidFill>
-                <a:latin typeface="Cambria"/>
-                <a:ea typeface="Malgun Gothic"/>
-                <a:cs typeface="Cambria"/>
-              </a:rPr>
-              <a:t>›</a:t>
-            </a:r>
-          </a:p>
-        </p:txBody>
-      </p:sp>
-      <p:sp>
-        <p:nvSpPr>
-          <p:cNvPr id="11" name="Rounded Rectangle 10"/>
-          <p:cNvSpPr/>
-          <p:nvPr/>
-        </p:nvSpPr>
-        <p:spPr>
-          <a:xfrm>
-            <a:off x="2232896" y="2798064"/>
-            <a:ext cx="1318496" cy="402336"/>
-          </a:xfrm>
-          <a:prstGeom prst="roundRect">
-            <a:avLst>
-              <a:gd name="adj" fmla="val 50000"/>
-            </a:avLst>
-          </a:prstGeom>
-          <a:solidFill>
-            <a:srgbClr val="23304F"/>
-          </a:solidFill>
-          <a:ln>
-            <a:noFill/>
-          </a:ln>
-          <a:effectLst/>
-        </p:spPr>
-        <p:style>
-          <a:lnRef idx="1">
-            <a:schemeClr val="accent1"/>
-          </a:lnRef>
-          <a:fillRef idx="3">
-            <a:schemeClr val="accent1"/>
-          </a:fillRef>
-          <a:effectRef idx="2">
-            <a:schemeClr val="accent1"/>
-          </a:effectRef>
-          <a:fontRef idx="minor">
-            <a:schemeClr val="lt1"/>
-          </a:fontRef>
-        </p:style>
-        <p:txBody>
-          <a:bodyPr rtlCol="0" anchor="ctr"/>
-          <a:lstStyle/>
-          <a:p>
-            <a:pPr algn="ctr"/>
-            <a:endParaRPr/>
-          </a:p>
-        </p:txBody>
-      </p:sp>
-      <p:sp>
-        <p:nvSpPr>
-          <p:cNvPr id="12" name="TextBox 11"/>
-          <p:cNvSpPr txBox="1"/>
-          <p:nvPr/>
-        </p:nvSpPr>
-        <p:spPr>
-          <a:xfrm>
-            <a:off x="2232896" y="2798064"/>
-            <a:ext cx="1318496" cy="402336"/>
-          </a:xfrm>
-          <a:prstGeom prst="rect">
-            <a:avLst/>
-          </a:prstGeom>
-          <a:noFill/>
-        </p:spPr>
-        <p:txBody>
-          <a:bodyPr wrap="square" lIns="0" tIns="0" rIns="0" bIns="0" anchor="ctr">
-            <a:spAutoFit/>
-          </a:bodyPr>
-          <a:lstStyle/>
-          <a:p>
-            <a:pPr algn="ctr">
-              <a:spcAft>
-                <a:spcPts val="0"/>
-              </a:spcAft>
-            </a:pPr>
-            <a:r>
-              <a:rPr sz="1150" b="1" i="0">
-                <a:solidFill>
-                  <a:srgbClr val="FFFFFF"/>
-                </a:solidFill>
-                <a:latin typeface="Malgun Gothic"/>
-                <a:ea typeface="Malgun Gothic"/>
-                <a:cs typeface="Malgun Gothic"/>
-              </a:rPr>
-              <a:t>검색</a:t>
-            </a:r>
-          </a:p>
-        </p:txBody>
-      </p:sp>
-      <p:sp>
-        <p:nvSpPr>
-          <p:cNvPr id="13" name="TextBox 12"/>
-          <p:cNvSpPr txBox="1"/>
-          <p:nvPr/>
-        </p:nvSpPr>
-        <p:spPr>
-          <a:xfrm>
-            <a:off x="3551392" y="2798064"/>
-            <a:ext cx="457200" cy="402336"/>
-          </a:xfrm>
-          <a:prstGeom prst="rect">
-            <a:avLst/>
-          </a:prstGeom>
-          <a:noFill/>
-        </p:spPr>
-        <p:txBody>
-          <a:bodyPr wrap="square" lIns="0" tIns="0" rIns="0" bIns="0" anchor="ctr">
-            <a:spAutoFit/>
-          </a:bodyPr>
-          <a:lstStyle/>
-          <a:p>
-            <a:pPr algn="ctr">
-              <a:spcAft>
-                <a:spcPts val="0"/>
-              </a:spcAft>
-            </a:pPr>
-            <a:r>
-              <a:rPr sz="1400" b="1" i="0">
-                <a:solidFill>
-                  <a:srgbClr val="E4002B"/>
-                </a:solidFill>
-                <a:latin typeface="Cambria"/>
-                <a:ea typeface="Malgun Gothic"/>
-                <a:cs typeface="Cambria"/>
-              </a:rPr>
-              <a:t>›</a:t>
-            </a:r>
-          </a:p>
-        </p:txBody>
-      </p:sp>
-      <p:sp>
-        <p:nvSpPr>
-          <p:cNvPr id="14" name="Rounded Rectangle 13"/>
-          <p:cNvSpPr/>
-          <p:nvPr/>
-        </p:nvSpPr>
-        <p:spPr>
-          <a:xfrm>
-            <a:off x="4008592" y="2798064"/>
-            <a:ext cx="1318496" cy="402336"/>
-          </a:xfrm>
-          <a:prstGeom prst="roundRect">
-            <a:avLst>
-              <a:gd name="adj" fmla="val 50000"/>
-            </a:avLst>
-          </a:prstGeom>
-          <a:solidFill>
-            <a:srgbClr val="23304F"/>
-          </a:solidFill>
-          <a:ln>
-            <a:noFill/>
-          </a:ln>
-          <a:effectLst/>
-        </p:spPr>
-        <p:style>
-          <a:lnRef idx="1">
-            <a:schemeClr val="accent1"/>
-          </a:lnRef>
-          <a:fillRef idx="3">
-            <a:schemeClr val="accent1"/>
-          </a:fillRef>
-          <a:effectRef idx="2">
-            <a:schemeClr val="accent1"/>
-          </a:effectRef>
-          <a:fontRef idx="minor">
-            <a:schemeClr val="lt1"/>
-          </a:fontRef>
-        </p:style>
-        <p:txBody>
-          <a:bodyPr rtlCol="0" anchor="ctr"/>
-          <a:lstStyle/>
-          <a:p>
-            <a:pPr algn="ctr"/>
-            <a:endParaRPr/>
-          </a:p>
-        </p:txBody>
-      </p:sp>
-      <p:sp>
-        <p:nvSpPr>
-          <p:cNvPr id="15" name="TextBox 14"/>
-          <p:cNvSpPr txBox="1"/>
-          <p:nvPr/>
-        </p:nvSpPr>
-        <p:spPr>
-          <a:xfrm>
-            <a:off x="4008592" y="2798064"/>
-            <a:ext cx="1318496" cy="402336"/>
-          </a:xfrm>
-          <a:prstGeom prst="rect">
-            <a:avLst/>
-          </a:prstGeom>
-          <a:noFill/>
-        </p:spPr>
-        <p:txBody>
-          <a:bodyPr wrap="square" lIns="0" tIns="0" rIns="0" bIns="0" anchor="ctr">
-            <a:spAutoFit/>
-          </a:bodyPr>
-          <a:lstStyle/>
-          <a:p>
-            <a:pPr algn="ctr">
-              <a:spcAft>
-                <a:spcPts val="0"/>
-              </a:spcAft>
-            </a:pPr>
-            <a:r>
-              <a:rPr sz="1150" b="1" i="0">
-                <a:solidFill>
-                  <a:srgbClr val="FFFFFF"/>
-                </a:solidFill>
-                <a:latin typeface="Malgun Gothic"/>
-                <a:ea typeface="Malgun Gothic"/>
-                <a:cs typeface="Malgun Gothic"/>
-              </a:rPr>
-              <a:t>리랭킹</a:t>
-            </a:r>
-          </a:p>
-        </p:txBody>
-      </p:sp>
-      <p:sp>
-        <p:nvSpPr>
-          <p:cNvPr id="16" name="TextBox 15"/>
-          <p:cNvSpPr txBox="1"/>
-          <p:nvPr/>
-        </p:nvSpPr>
-        <p:spPr>
-          <a:xfrm>
-            <a:off x="5327088" y="2798064"/>
-            <a:ext cx="457200" cy="402336"/>
-          </a:xfrm>
-          <a:prstGeom prst="rect">
-            <a:avLst/>
-          </a:prstGeom>
-          <a:noFill/>
-        </p:spPr>
-        <p:txBody>
-          <a:bodyPr wrap="square" lIns="0" tIns="0" rIns="0" bIns="0" anchor="ctr">
-            <a:spAutoFit/>
-          </a:bodyPr>
-          <a:lstStyle/>
-          <a:p>
-            <a:pPr algn="ctr">
-              <a:spcAft>
-                <a:spcPts val="0"/>
-              </a:spcAft>
-            </a:pPr>
-            <a:r>
-              <a:rPr sz="1400" b="1" i="0">
-                <a:solidFill>
-                  <a:srgbClr val="E4002B"/>
-                </a:solidFill>
-                <a:latin typeface="Cambria"/>
-                <a:ea typeface="Malgun Gothic"/>
-                <a:cs typeface="Cambria"/>
-              </a:rPr>
-              <a:t>›</a:t>
-            </a:r>
-          </a:p>
-        </p:txBody>
-      </p:sp>
-      <p:sp>
-        <p:nvSpPr>
-          <p:cNvPr id="17" name="Rounded Rectangle 16"/>
-          <p:cNvSpPr/>
-          <p:nvPr/>
-        </p:nvSpPr>
-        <p:spPr>
-          <a:xfrm>
-            <a:off x="5784288" y="2798064"/>
-            <a:ext cx="1318496" cy="402336"/>
-          </a:xfrm>
-          <a:prstGeom prst="roundRect">
-            <a:avLst>
-              <a:gd name="adj" fmla="val 50000"/>
-            </a:avLst>
-          </a:prstGeom>
-          <a:solidFill>
-            <a:srgbClr val="23304F"/>
-          </a:solidFill>
-          <a:ln>
-            <a:noFill/>
-          </a:ln>
-          <a:effectLst/>
-        </p:spPr>
-        <p:style>
-          <a:lnRef idx="1">
-            <a:schemeClr val="accent1"/>
-          </a:lnRef>
-          <a:fillRef idx="3">
-            <a:schemeClr val="accent1"/>
-          </a:fillRef>
-          <a:effectRef idx="2">
-            <a:schemeClr val="accent1"/>
-          </a:effectRef>
-          <a:fontRef idx="minor">
-            <a:schemeClr val="lt1"/>
-          </a:fontRef>
-        </p:style>
-        <p:txBody>
-          <a:bodyPr rtlCol="0" anchor="ctr"/>
-          <a:lstStyle/>
-          <a:p>
-            <a:pPr algn="ctr"/>
-            <a:endParaRPr/>
-          </a:p>
-        </p:txBody>
-      </p:sp>
-      <p:sp>
-        <p:nvSpPr>
-          <p:cNvPr id="18" name="TextBox 17"/>
-          <p:cNvSpPr txBox="1"/>
-          <p:nvPr/>
-        </p:nvSpPr>
-        <p:spPr>
-          <a:xfrm>
-            <a:off x="5784288" y="2798064"/>
-            <a:ext cx="1318496" cy="402336"/>
-          </a:xfrm>
-          <a:prstGeom prst="rect">
-            <a:avLst/>
-          </a:prstGeom>
-          <a:noFill/>
-        </p:spPr>
-        <p:txBody>
-          <a:bodyPr wrap="square" lIns="0" tIns="0" rIns="0" bIns="0" anchor="ctr">
-            <a:spAutoFit/>
-          </a:bodyPr>
-          <a:lstStyle/>
-          <a:p>
-            <a:pPr algn="ctr">
-              <a:spcAft>
-                <a:spcPts val="0"/>
-              </a:spcAft>
-            </a:pPr>
-            <a:r>
-              <a:rPr sz="1150" b="1" i="0">
-                <a:solidFill>
-                  <a:srgbClr val="FFFFFF"/>
-                </a:solidFill>
-                <a:latin typeface="Malgun Gothic"/>
-                <a:ea typeface="Malgun Gothic"/>
-                <a:cs typeface="Malgun Gothic"/>
-              </a:rPr>
-              <a:t>생성</a:t>
-            </a:r>
-          </a:p>
-        </p:txBody>
-      </p:sp>
-      <p:sp>
-        <p:nvSpPr>
-          <p:cNvPr id="19" name="Oval 18"/>
+              <a:t>향상된 프롬프트</a:t>
+            </a:r>
+          </a:p>
+        </p:txBody>
+      </p:sp>
+      <p:sp>
+        <p:nvSpPr>
+          <p:cNvPr id="17" name="Oval 16"/>
           <p:cNvSpPr/>
           <p:nvPr/>
         </p:nvSpPr>
@@ -3932,7 +4256,7 @@
       </p:sp>
       <p:sp>
         <p:nvSpPr>
-          <p:cNvPr id="20" name="TextBox 19"/>
+          <p:cNvPr id="18" name="TextBox 17"/>
           <p:cNvSpPr txBox="1"/>
           <p:nvPr/>
         </p:nvSpPr>
@@ -3973,7 +4297,7 @@
       </p:sp>
       <p:sp>
         <p:nvSpPr>
-          <p:cNvPr id="21" name="TextBox 20"/>
+          <p:cNvPr id="19" name="TextBox 18"/>
           <p:cNvSpPr txBox="1"/>
           <p:nvPr/>
         </p:nvSpPr>
@@ -4014,18 +4338,756 @@
       </p:sp>
       <p:sp>
         <p:nvSpPr>
-          <p:cNvPr id="22" name="Rounded Rectangle 21"/>
+          <p:cNvPr id="20" name="TextBox 19"/>
+          <p:cNvSpPr txBox="1"/>
+          <p:nvPr/>
+        </p:nvSpPr>
+        <p:spPr>
+          <a:xfrm>
+            <a:off x="457200" y="4160520"/>
+            <a:ext cx="6645584" cy="411480"/>
+          </a:xfrm>
+          <a:prstGeom prst="rect">
+            <a:avLst/>
+          </a:prstGeom>
+          <a:noFill/>
+        </p:spPr>
+        <p:txBody>
+          <a:bodyPr wrap="square" lIns="73152" tIns="0" rIns="73152" bIns="0" anchor="ctr">
+            <a:spAutoFit/>
+          </a:bodyPr>
+          <a:lstStyle/>
+          <a:p>
+            <a:pPr algn="l">
+              <a:spcAft>
+                <a:spcPts val="0"/>
+              </a:spcAft>
+            </a:pPr>
+            <a:r>
+              <a:rPr sz="1200" b="1" i="0">
+                <a:solidFill>
+                  <a:srgbClr val="E4002B"/>
+                </a:solidFill>
+                <a:latin typeface="Malgun Gothic"/>
+                <a:ea typeface="Malgun Gothic"/>
+                <a:cs typeface="Malgun Gothic"/>
+              </a:rPr>
+              <a:t>문제   </a:t>
+            </a:r>
+            <a:r>
+              <a:rPr sz="1250" b="0" i="0">
+                <a:solidFill>
+                  <a:srgbClr val="181F2B"/>
+                </a:solidFill>
+                <a:latin typeface="Malgun Gothic"/>
+                <a:ea typeface="Malgun Gothic"/>
+                <a:cs typeface="Malgun Gothic"/>
+              </a:rPr>
+              <a:t>짧고 모호한 프롬프트 → 빗나간 답 → 다시 묻는 비효율. 토큰·시간 낭비.</a:t>
+            </a:r>
+          </a:p>
+        </p:txBody>
+      </p:sp>
+      <p:sp>
+        <p:nvSpPr>
+          <p:cNvPr id="21" name="Rounded Rectangle 20"/>
           <p:cNvSpPr/>
           <p:nvPr/>
         </p:nvSpPr>
         <p:spPr>
           <a:xfrm>
-            <a:off x="457200" y="4261104"/>
-            <a:ext cx="6645584" cy="1417320"/>
+            <a:off x="457200" y="4617720"/>
+            <a:ext cx="6645584" cy="713232"/>
           </a:xfrm>
           <a:prstGeom prst="roundRect">
             <a:avLst>
-              <a:gd name="adj" fmla="val 5000"/>
+              <a:gd name="adj" fmla="val 6000"/>
+            </a:avLst>
+          </a:prstGeom>
+          <a:solidFill>
+            <a:srgbClr val="1A253D"/>
+          </a:solidFill>
+          <a:ln>
+            <a:noFill/>
+          </a:ln>
+          <a:effectLst/>
+        </p:spPr>
+        <p:style>
+          <a:lnRef idx="1">
+            <a:schemeClr val="accent1"/>
+          </a:lnRef>
+          <a:fillRef idx="3">
+            <a:schemeClr val="accent1"/>
+          </a:fillRef>
+          <a:effectRef idx="2">
+            <a:schemeClr val="accent1"/>
+          </a:effectRef>
+          <a:fontRef idx="minor">
+            <a:schemeClr val="lt1"/>
+          </a:fontRef>
+        </p:style>
+        <p:txBody>
+          <a:bodyPr rtlCol="0" anchor="ctr"/>
+          <a:lstStyle/>
+          <a:p>
+            <a:pPr algn="ctr"/>
+            <a:endParaRPr/>
+          </a:p>
+        </p:txBody>
+      </p:sp>
+      <p:sp>
+        <p:nvSpPr>
+          <p:cNvPr id="22" name="TextBox 21"/>
+          <p:cNvSpPr txBox="1"/>
+          <p:nvPr/>
+        </p:nvSpPr>
+        <p:spPr>
+          <a:xfrm>
+            <a:off x="676656" y="4757930"/>
+            <a:ext cx="6206672" cy="432811"/>
+          </a:xfrm>
+          <a:prstGeom prst="rect">
+            <a:avLst/>
+          </a:prstGeom>
+          <a:noFill/>
+        </p:spPr>
+        <p:txBody>
+          <a:bodyPr wrap="square" lIns="73152" tIns="0" rIns="73152" bIns="0" anchor="ctr">
+            <a:spAutoFit/>
+          </a:bodyPr>
+          <a:lstStyle/>
+          <a:p>
+            <a:pPr algn="l">
+              <a:lnSpc>
+                <a:spcPct val="105000"/>
+              </a:lnSpc>
+              <a:spcAft>
+                <a:spcPts val="300"/>
+              </a:spcAft>
+            </a:pPr>
+            <a:r>
+              <a:rPr sz="1150" b="1" i="0" dirty="0" err="1">
+                <a:solidFill>
+                  <a:srgbClr val="CADCFC"/>
+                </a:solidFill>
+                <a:latin typeface="Malgun Gothic"/>
+                <a:ea typeface="Malgun Gothic"/>
+                <a:cs typeface="Malgun Gothic"/>
+              </a:rPr>
+              <a:t>핵심</a:t>
+            </a:r>
+            <a:r>
+              <a:rPr sz="1150" b="1" i="0" dirty="0">
+                <a:solidFill>
+                  <a:srgbClr val="CADCFC"/>
+                </a:solidFill>
+                <a:latin typeface="Malgun Gothic"/>
+                <a:ea typeface="Malgun Gothic"/>
+                <a:cs typeface="Malgun Gothic"/>
+              </a:rPr>
+              <a:t> </a:t>
+            </a:r>
+            <a:r>
+              <a:rPr sz="1150" b="1" i="0" dirty="0" err="1">
+                <a:solidFill>
+                  <a:srgbClr val="CADCFC"/>
+                </a:solidFill>
+                <a:latin typeface="Malgun Gothic"/>
+                <a:ea typeface="Malgun Gothic"/>
+                <a:cs typeface="Malgun Gothic"/>
+              </a:rPr>
+              <a:t>인사이트</a:t>
+            </a:r>
+            <a:r>
+              <a:rPr sz="1150" b="1" i="0" dirty="0">
+                <a:solidFill>
+                  <a:srgbClr val="CADCFC"/>
+                </a:solidFill>
+                <a:latin typeface="Malgun Gothic"/>
+                <a:ea typeface="Malgun Gothic"/>
+                <a:cs typeface="Malgun Gothic"/>
+              </a:rPr>
+              <a:t>    </a:t>
+            </a:r>
+            <a:r>
+              <a:rPr lang="ko-KR" altLang="en-US" sz="1250" b="0" i="0" dirty="0">
+                <a:solidFill>
+                  <a:srgbClr val="FFFFFF"/>
+                </a:solidFill>
+                <a:latin typeface="Malgun Gothic"/>
+                <a:ea typeface="Malgun Gothic"/>
+                <a:cs typeface="Malgun Gothic"/>
+              </a:rPr>
+              <a:t>답은</a:t>
+            </a:r>
+            <a:r>
+              <a:rPr sz="1250" b="0" i="0" dirty="0">
+                <a:solidFill>
+                  <a:srgbClr val="FFFFFF"/>
+                </a:solidFill>
+                <a:latin typeface="Malgun Gothic"/>
+                <a:ea typeface="Malgun Gothic"/>
+                <a:cs typeface="Malgun Gothic"/>
+              </a:rPr>
+              <a:t> </a:t>
+            </a:r>
+            <a:r>
+              <a:rPr sz="1250" b="1" i="0" dirty="0">
+                <a:solidFill>
+                  <a:srgbClr val="CADCFC"/>
+                </a:solidFill>
+                <a:latin typeface="Malgun Gothic"/>
+                <a:ea typeface="Malgun Gothic"/>
+                <a:cs typeface="Malgun Gothic"/>
+              </a:rPr>
+              <a:t>“더 </a:t>
+            </a:r>
+            <a:r>
+              <a:rPr sz="1250" b="1" i="0" dirty="0" err="1">
+                <a:solidFill>
+                  <a:srgbClr val="CADCFC"/>
+                </a:solidFill>
+                <a:latin typeface="Malgun Gothic"/>
+                <a:ea typeface="Malgun Gothic"/>
+                <a:cs typeface="Malgun Gothic"/>
+              </a:rPr>
+              <a:t>비싼</a:t>
+            </a:r>
+            <a:r>
+              <a:rPr sz="1250" b="1" i="0" dirty="0">
+                <a:solidFill>
+                  <a:srgbClr val="CADCFC"/>
+                </a:solidFill>
+                <a:latin typeface="Malgun Gothic"/>
+                <a:ea typeface="Malgun Gothic"/>
+                <a:cs typeface="Malgun Gothic"/>
+              </a:rPr>
+              <a:t> </a:t>
+            </a:r>
+            <a:r>
+              <a:rPr sz="1250" b="1" i="0" dirty="0" err="1">
+                <a:solidFill>
+                  <a:srgbClr val="CADCFC"/>
+                </a:solidFill>
+                <a:latin typeface="Malgun Gothic"/>
+                <a:ea typeface="Malgun Gothic"/>
+                <a:cs typeface="Malgun Gothic"/>
+              </a:rPr>
+              <a:t>모델”</a:t>
+            </a:r>
+            <a:r>
+              <a:rPr sz="1250" b="0" i="0" dirty="0" err="1">
+                <a:solidFill>
+                  <a:srgbClr val="FFFFFF"/>
+                </a:solidFill>
+                <a:latin typeface="Malgun Gothic"/>
+                <a:ea typeface="Malgun Gothic"/>
+                <a:cs typeface="Malgun Gothic"/>
+              </a:rPr>
+              <a:t>이</a:t>
+            </a:r>
+            <a:r>
+              <a:rPr sz="1250" b="0" i="0" dirty="0">
+                <a:solidFill>
+                  <a:srgbClr val="FFFFFF"/>
+                </a:solidFill>
+                <a:latin typeface="Malgun Gothic"/>
+                <a:ea typeface="Malgun Gothic"/>
+                <a:cs typeface="Malgun Gothic"/>
+              </a:rPr>
+              <a:t> </a:t>
+            </a:r>
+            <a:r>
+              <a:rPr sz="1250" b="0" i="0" dirty="0" err="1">
+                <a:solidFill>
+                  <a:srgbClr val="FFFFFF"/>
+                </a:solidFill>
+                <a:latin typeface="Malgun Gothic"/>
+                <a:ea typeface="Malgun Gothic"/>
+                <a:cs typeface="Malgun Gothic"/>
+              </a:rPr>
+              <a:t>아니라</a:t>
+            </a:r>
+            <a:r>
+              <a:rPr sz="1250" b="0" i="0" dirty="0">
+                <a:solidFill>
+                  <a:srgbClr val="FFFFFF"/>
+                </a:solidFill>
+                <a:latin typeface="Malgun Gothic"/>
+                <a:ea typeface="Malgun Gothic"/>
+                <a:cs typeface="Malgun Gothic"/>
+              </a:rPr>
+              <a:t> </a:t>
+            </a:r>
+            <a:r>
+              <a:rPr sz="1250" b="1" i="0" dirty="0">
+                <a:solidFill>
+                  <a:srgbClr val="E4002B"/>
+                </a:solidFill>
+                <a:latin typeface="Malgun Gothic"/>
+                <a:ea typeface="Malgun Gothic"/>
+                <a:cs typeface="Malgun Gothic"/>
+              </a:rPr>
+              <a:t>“더 </a:t>
+            </a:r>
+            <a:r>
+              <a:rPr lang="ko-KR" altLang="en-US" sz="1250" b="1" dirty="0">
+                <a:solidFill>
+                  <a:srgbClr val="E4002B"/>
+                </a:solidFill>
+                <a:latin typeface="Malgun Gothic"/>
+                <a:ea typeface="Malgun Gothic"/>
+                <a:cs typeface="Malgun Gothic"/>
+              </a:rPr>
+              <a:t>구조화된</a:t>
+            </a:r>
+            <a:r>
+              <a:rPr sz="1250" b="1" i="0" dirty="0">
+                <a:solidFill>
+                  <a:srgbClr val="E4002B"/>
+                </a:solidFill>
+                <a:latin typeface="Malgun Gothic"/>
+                <a:ea typeface="Malgun Gothic"/>
+                <a:cs typeface="Malgun Gothic"/>
+              </a:rPr>
+              <a:t> </a:t>
+            </a:r>
+            <a:r>
+              <a:rPr sz="1250" b="1" i="0" dirty="0" err="1">
+                <a:solidFill>
+                  <a:srgbClr val="E4002B"/>
+                </a:solidFill>
+                <a:latin typeface="Malgun Gothic"/>
+                <a:ea typeface="Malgun Gothic"/>
+                <a:cs typeface="Malgun Gothic"/>
+              </a:rPr>
+              <a:t>프롬프트</a:t>
+            </a:r>
+            <a:r>
+              <a:rPr sz="1250" b="1" i="0" dirty="0">
+                <a:solidFill>
+                  <a:srgbClr val="E4002B"/>
+                </a:solidFill>
+                <a:latin typeface="Malgun Gothic"/>
+                <a:ea typeface="Malgun Gothic"/>
+                <a:cs typeface="Malgun Gothic"/>
+              </a:rPr>
+              <a:t>”</a:t>
+            </a:r>
+            <a:r>
+              <a:rPr sz="1250" b="0" i="0" dirty="0">
+                <a:solidFill>
+                  <a:srgbClr val="FFFFFF"/>
+                </a:solidFill>
+                <a:latin typeface="Calibri"/>
+                <a:ea typeface="Malgun Gothic"/>
+                <a:cs typeface="Calibri"/>
+              </a:rPr>
+              <a:t>.</a:t>
+            </a:r>
+          </a:p>
+          <a:p>
+            <a:pPr algn="l">
+              <a:spcAft>
+                <a:spcPts val="0"/>
+              </a:spcAft>
+            </a:pPr>
+            <a:r>
+              <a:rPr lang="en-US" sz="1250" b="0" i="0" dirty="0">
+                <a:solidFill>
+                  <a:srgbClr val="FFFFFF"/>
+                </a:solidFill>
+                <a:latin typeface="Malgun Gothic"/>
+                <a:ea typeface="Malgun Gothic"/>
+                <a:cs typeface="Malgun Gothic"/>
+              </a:rPr>
+              <a:t>		    </a:t>
+            </a:r>
+            <a:r>
+              <a:rPr sz="1250" b="0" i="0" dirty="0" err="1">
+                <a:solidFill>
+                  <a:srgbClr val="FFFFFF"/>
+                </a:solidFill>
+                <a:latin typeface="Malgun Gothic"/>
+                <a:ea typeface="Malgun Gothic"/>
+                <a:cs typeface="Malgun Gothic"/>
+              </a:rPr>
+              <a:t>소형</a:t>
+            </a:r>
+            <a:r>
+              <a:rPr sz="1250" b="0" i="0" dirty="0">
+                <a:solidFill>
+                  <a:srgbClr val="FFFFFF"/>
+                </a:solidFill>
+                <a:latin typeface="Malgun Gothic"/>
+                <a:ea typeface="Malgun Gothic"/>
+                <a:cs typeface="Malgun Gothic"/>
+              </a:rPr>
+              <a:t> </a:t>
+            </a:r>
+            <a:r>
+              <a:rPr sz="1250" b="0" i="0" dirty="0" err="1">
+                <a:solidFill>
+                  <a:srgbClr val="FFFFFF"/>
+                </a:solidFill>
+                <a:latin typeface="Malgun Gothic"/>
+                <a:ea typeface="Malgun Gothic"/>
+                <a:cs typeface="Malgun Gothic"/>
+              </a:rPr>
+              <a:t>모델도</a:t>
+            </a:r>
+            <a:r>
+              <a:rPr sz="1250" b="0" i="0" dirty="0">
+                <a:solidFill>
+                  <a:srgbClr val="FFFFFF"/>
+                </a:solidFill>
+                <a:latin typeface="Malgun Gothic"/>
+                <a:ea typeface="Malgun Gothic"/>
+                <a:cs typeface="Malgun Gothic"/>
+              </a:rPr>
+              <a:t> 잘 </a:t>
+            </a:r>
+            <a:r>
+              <a:rPr sz="1250" b="0" i="0" dirty="0" err="1">
+                <a:solidFill>
+                  <a:srgbClr val="FFFFFF"/>
+                </a:solidFill>
+                <a:latin typeface="Malgun Gothic"/>
+                <a:ea typeface="Malgun Gothic"/>
+                <a:cs typeface="Malgun Gothic"/>
+              </a:rPr>
+              <a:t>설계된</a:t>
+            </a:r>
+            <a:r>
+              <a:rPr sz="1250" b="0" i="0" dirty="0">
+                <a:solidFill>
+                  <a:srgbClr val="FFFFFF"/>
+                </a:solidFill>
+                <a:latin typeface="Malgun Gothic"/>
+                <a:ea typeface="Malgun Gothic"/>
+                <a:cs typeface="Malgun Gothic"/>
+              </a:rPr>
+              <a:t> </a:t>
+            </a:r>
+            <a:r>
+              <a:rPr sz="1250" b="0" i="0" dirty="0" err="1">
+                <a:solidFill>
+                  <a:srgbClr val="FFFFFF"/>
+                </a:solidFill>
+                <a:latin typeface="Malgun Gothic"/>
+                <a:ea typeface="Malgun Gothic"/>
+                <a:cs typeface="Malgun Gothic"/>
+              </a:rPr>
+              <a:t>프롬프트면</a:t>
+            </a:r>
+            <a:r>
+              <a:rPr sz="1250" b="0" i="0" dirty="0">
+                <a:solidFill>
+                  <a:srgbClr val="FFFFFF"/>
+                </a:solidFill>
+                <a:latin typeface="Malgun Gothic"/>
+                <a:ea typeface="Malgun Gothic"/>
+                <a:cs typeface="Malgun Gothic"/>
+              </a:rPr>
+              <a:t> </a:t>
+            </a:r>
+            <a:r>
+              <a:rPr sz="1250" b="0" i="0" dirty="0" err="1">
+                <a:solidFill>
+                  <a:srgbClr val="FFFFFF"/>
+                </a:solidFill>
+                <a:latin typeface="Malgun Gothic"/>
+                <a:ea typeface="Malgun Gothic"/>
+                <a:cs typeface="Malgun Gothic"/>
+              </a:rPr>
+              <a:t>고품질</a:t>
+            </a:r>
+            <a:r>
+              <a:rPr sz="1250" b="0" i="0" dirty="0">
+                <a:solidFill>
+                  <a:srgbClr val="FFFFFF"/>
+                </a:solidFill>
+                <a:latin typeface="Malgun Gothic"/>
+                <a:ea typeface="Malgun Gothic"/>
+                <a:cs typeface="Malgun Gothic"/>
+              </a:rPr>
+              <a:t> → </a:t>
+            </a:r>
+            <a:r>
+              <a:rPr lang="ko-KR" altLang="en-US" sz="1250" b="1" dirty="0">
+                <a:solidFill>
+                  <a:srgbClr val="1E9E57"/>
+                </a:solidFill>
+                <a:latin typeface="Malgun Gothic"/>
+                <a:ea typeface="Malgun Gothic"/>
+                <a:cs typeface="Malgun Gothic"/>
+              </a:rPr>
+              <a:t>비용</a:t>
+            </a:r>
+            <a:r>
+              <a:rPr sz="1250" b="1" i="0" dirty="0">
+                <a:solidFill>
+                  <a:srgbClr val="1E9E57"/>
+                </a:solidFill>
+                <a:latin typeface="Malgun Gothic"/>
+                <a:ea typeface="Malgun Gothic"/>
+                <a:cs typeface="Malgun Gothic"/>
+              </a:rPr>
+              <a:t> </a:t>
+            </a:r>
+            <a:r>
+              <a:rPr sz="1250" b="1" i="0" dirty="0" err="1">
+                <a:solidFill>
+                  <a:srgbClr val="1E9E57"/>
+                </a:solidFill>
+                <a:latin typeface="Malgun Gothic"/>
+                <a:ea typeface="Malgun Gothic"/>
+                <a:cs typeface="Malgun Gothic"/>
+              </a:rPr>
+              <a:t>절감</a:t>
+            </a:r>
+            <a:r>
+              <a:rPr sz="1250" b="0" i="0" dirty="0">
+                <a:solidFill>
+                  <a:srgbClr val="FFFFFF"/>
+                </a:solidFill>
+                <a:latin typeface="Calibri"/>
+                <a:ea typeface="Malgun Gothic"/>
+                <a:cs typeface="Calibri"/>
+              </a:rPr>
+              <a:t>.</a:t>
+            </a:r>
+          </a:p>
+        </p:txBody>
+      </p:sp>
+      <p:sp>
+        <p:nvSpPr>
+          <p:cNvPr id="23" name="TextBox 22"/>
+          <p:cNvSpPr txBox="1"/>
+          <p:nvPr/>
+        </p:nvSpPr>
+        <p:spPr>
+          <a:xfrm>
+            <a:off x="457200" y="5440680"/>
+            <a:ext cx="6645584" cy="207749"/>
+          </a:xfrm>
+          <a:prstGeom prst="rect">
+            <a:avLst/>
+          </a:prstGeom>
+          <a:noFill/>
+        </p:spPr>
+        <p:txBody>
+          <a:bodyPr wrap="square" lIns="73152" tIns="0" rIns="73152" bIns="0" anchor="t">
+            <a:spAutoFit/>
+          </a:bodyPr>
+          <a:lstStyle/>
+          <a:p>
+            <a:pPr algn="l">
+              <a:spcAft>
+                <a:spcPts val="0"/>
+              </a:spcAft>
+            </a:pPr>
+            <a:r>
+              <a:rPr sz="1350" b="1" i="0" dirty="0" err="1">
+                <a:solidFill>
+                  <a:srgbClr val="E4002B"/>
+                </a:solidFill>
+                <a:latin typeface="Malgun Gothic"/>
+                <a:ea typeface="Malgun Gothic"/>
+                <a:cs typeface="Malgun Gothic"/>
+              </a:rPr>
+              <a:t>실제</a:t>
+            </a:r>
+            <a:r>
+              <a:rPr sz="1350" b="1" i="0" dirty="0">
+                <a:solidFill>
+                  <a:srgbClr val="E4002B"/>
+                </a:solidFill>
+                <a:latin typeface="Malgun Gothic"/>
+                <a:ea typeface="Malgun Gothic"/>
+                <a:cs typeface="Malgun Gothic"/>
+              </a:rPr>
+              <a:t> </a:t>
+            </a:r>
+            <a:r>
+              <a:rPr sz="1350" b="1" i="0" dirty="0" err="1">
+                <a:solidFill>
+                  <a:srgbClr val="E4002B"/>
+                </a:solidFill>
+                <a:latin typeface="Malgun Gothic"/>
+                <a:ea typeface="Malgun Gothic"/>
+                <a:cs typeface="Malgun Gothic"/>
+              </a:rPr>
+              <a:t>사용사례</a:t>
+            </a:r>
+            <a:r>
+              <a:rPr sz="1100" b="0" i="0" dirty="0">
+                <a:solidFill>
+                  <a:srgbClr val="66717E"/>
+                </a:solidFill>
+                <a:latin typeface="Malgun Gothic"/>
+                <a:ea typeface="Malgun Gothic"/>
+                <a:cs typeface="Malgun Gothic"/>
+              </a:rPr>
+              <a:t>    </a:t>
+            </a:r>
+            <a:r>
+              <a:rPr sz="1100" b="0" i="0" dirty="0" err="1">
+                <a:solidFill>
+                  <a:srgbClr val="66717E"/>
+                </a:solidFill>
+                <a:latin typeface="Malgun Gothic"/>
+                <a:ea typeface="Malgun Gothic"/>
+                <a:cs typeface="Malgun Gothic"/>
+              </a:rPr>
+              <a:t>원본</a:t>
+            </a:r>
+            <a:r>
+              <a:rPr sz="1100" b="0" i="0" dirty="0">
+                <a:solidFill>
+                  <a:srgbClr val="66717E"/>
+                </a:solidFill>
+                <a:latin typeface="Malgun Gothic"/>
+                <a:ea typeface="Malgun Gothic"/>
+                <a:cs typeface="Malgun Gothic"/>
+              </a:rPr>
+              <a:t> 한 </a:t>
+            </a:r>
+            <a:r>
+              <a:rPr sz="1100" b="0" i="0" dirty="0" err="1">
+                <a:solidFill>
+                  <a:srgbClr val="66717E"/>
+                </a:solidFill>
+                <a:latin typeface="Malgun Gothic"/>
+                <a:ea typeface="Malgun Gothic"/>
+                <a:cs typeface="Malgun Gothic"/>
+              </a:rPr>
+              <a:t>줄이</a:t>
+            </a:r>
+            <a:r>
+              <a:rPr sz="1100" b="0" i="0" dirty="0">
+                <a:solidFill>
+                  <a:srgbClr val="66717E"/>
+                </a:solidFill>
+                <a:latin typeface="Malgun Gothic"/>
+                <a:ea typeface="Malgun Gothic"/>
+                <a:cs typeface="Malgun Gothic"/>
+              </a:rPr>
+              <a:t> </a:t>
+            </a:r>
+            <a:r>
+              <a:rPr sz="1100" b="0" i="0" dirty="0" err="1">
+                <a:solidFill>
+                  <a:srgbClr val="66717E"/>
+                </a:solidFill>
+                <a:latin typeface="Malgun Gothic"/>
+                <a:ea typeface="Malgun Gothic"/>
+                <a:cs typeface="Malgun Gothic"/>
+              </a:rPr>
+              <a:t>실무</a:t>
+            </a:r>
+            <a:r>
+              <a:rPr sz="1100" b="0" i="0" dirty="0">
+                <a:solidFill>
+                  <a:srgbClr val="66717E"/>
+                </a:solidFill>
+                <a:latin typeface="Malgun Gothic"/>
+                <a:ea typeface="Malgun Gothic"/>
+                <a:cs typeface="Malgun Gothic"/>
+              </a:rPr>
+              <a:t> </a:t>
+            </a:r>
+            <a:r>
+              <a:rPr sz="1100" b="0" i="0" dirty="0" err="1">
+                <a:solidFill>
+                  <a:srgbClr val="66717E"/>
+                </a:solidFill>
+                <a:latin typeface="Malgun Gothic"/>
+                <a:ea typeface="Malgun Gothic"/>
+                <a:cs typeface="Malgun Gothic"/>
+              </a:rPr>
+              <a:t>설계</a:t>
+            </a:r>
+            <a:r>
+              <a:rPr sz="1100" b="0" i="0" dirty="0">
+                <a:solidFill>
+                  <a:srgbClr val="66717E"/>
+                </a:solidFill>
+                <a:latin typeface="Malgun Gothic"/>
+                <a:ea typeface="Malgun Gothic"/>
+                <a:cs typeface="Malgun Gothic"/>
+              </a:rPr>
+              <a:t> </a:t>
+            </a:r>
+            <a:r>
+              <a:rPr sz="1100" b="0" i="0" dirty="0" err="1">
+                <a:solidFill>
+                  <a:srgbClr val="66717E"/>
+                </a:solidFill>
+                <a:latin typeface="Malgun Gothic"/>
+                <a:ea typeface="Malgun Gothic"/>
+                <a:cs typeface="Malgun Gothic"/>
+              </a:rPr>
+              <a:t>명세로</a:t>
+            </a:r>
+            <a:r>
+              <a:rPr sz="1100" b="0" i="0" dirty="0">
+                <a:solidFill>
+                  <a:srgbClr val="66717E"/>
+                </a:solidFill>
+                <a:latin typeface="Malgun Gothic"/>
+                <a:ea typeface="Malgun Gothic"/>
+                <a:cs typeface="Malgun Gothic"/>
+              </a:rPr>
+              <a:t> </a:t>
+            </a:r>
+            <a:r>
+              <a:rPr lang="ko-KR" altLang="en-US" sz="1100" b="0" i="0" dirty="0">
+                <a:solidFill>
+                  <a:srgbClr val="66717E"/>
+                </a:solidFill>
+                <a:latin typeface="Malgun Gothic"/>
+                <a:ea typeface="Malgun Gothic"/>
+                <a:cs typeface="Malgun Gothic"/>
+              </a:rPr>
+              <a:t>정제</a:t>
+            </a:r>
+            <a:r>
+              <a:rPr sz="1100" b="0" i="0" dirty="0" err="1">
+                <a:solidFill>
+                  <a:srgbClr val="66717E"/>
+                </a:solidFill>
+                <a:latin typeface="Malgun Gothic"/>
+                <a:ea typeface="Malgun Gothic"/>
+                <a:cs typeface="Malgun Gothic"/>
+              </a:rPr>
+              <a:t>됩니다</a:t>
+            </a:r>
+            <a:endParaRPr sz="1100" b="0" i="0" dirty="0">
+              <a:solidFill>
+                <a:srgbClr val="66717E"/>
+              </a:solidFill>
+              <a:latin typeface="Malgun Gothic"/>
+              <a:ea typeface="Malgun Gothic"/>
+              <a:cs typeface="Malgun Gothic"/>
+            </a:endParaRPr>
+          </a:p>
+        </p:txBody>
+      </p:sp>
+      <p:sp>
+        <p:nvSpPr>
+          <p:cNvPr id="24" name="Rounded Rectangle 23"/>
+          <p:cNvSpPr/>
+          <p:nvPr/>
+        </p:nvSpPr>
+        <p:spPr>
+          <a:xfrm>
+            <a:off x="457200" y="5742432"/>
+            <a:ext cx="6645584" cy="566928"/>
+          </a:xfrm>
+          <a:prstGeom prst="roundRect">
+            <a:avLst>
+              <a:gd name="adj" fmla="val 6000"/>
             </a:avLst>
           </a:prstGeom>
           <a:solidFill>
@@ -4063,105 +5125,22 @@
       </p:sp>
       <p:sp>
         <p:nvSpPr>
-          <p:cNvPr id="23" name="TextBox 22"/>
-          <p:cNvSpPr txBox="1"/>
-          <p:nvPr/>
-        </p:nvSpPr>
-        <p:spPr>
-          <a:xfrm>
-            <a:off x="658368" y="4407408"/>
-            <a:ext cx="6243248" cy="1143000"/>
-          </a:xfrm>
-          <a:prstGeom prst="rect">
-            <a:avLst/>
-          </a:prstGeom>
-          <a:noFill/>
-        </p:spPr>
-        <p:txBody>
-          <a:bodyPr wrap="square" lIns="73152" tIns="0" rIns="73152" bIns="0" anchor="t">
-            <a:spAutoFit/>
-          </a:bodyPr>
-          <a:lstStyle/>
-          <a:p>
-            <a:pPr algn="l">
-              <a:spcAft>
-                <a:spcPts val="500"/>
-              </a:spcAft>
-            </a:pPr>
-            <a:r>
-              <a:rPr sz="1350" b="1" i="0">
-                <a:solidFill>
-                  <a:srgbClr val="E4002B"/>
-                </a:solidFill>
-                <a:latin typeface="Malgun Gothic"/>
-                <a:ea typeface="Malgun Gothic"/>
-                <a:cs typeface="Malgun Gothic"/>
-              </a:rPr>
-              <a:t>문제</a:t>
-            </a:r>
-          </a:p>
-          <a:p>
-            <a:pPr algn="l">
-              <a:lnSpc>
-                <a:spcPct val="105000"/>
-              </a:lnSpc>
-              <a:spcAft>
-                <a:spcPts val="300"/>
-              </a:spcAft>
-            </a:pPr>
-            <a:r>
-              <a:rPr sz="1150" b="0" i="0">
-                <a:solidFill>
-                  <a:srgbClr val="181F2B"/>
-                </a:solidFill>
-                <a:latin typeface="Malgun Gothic"/>
-                <a:ea typeface="Malgun Gothic"/>
-                <a:cs typeface="Malgun Gothic"/>
-              </a:rPr>
-              <a:t>짧고 모호한 프롬프트(“정렬 코드 짜줘”) → 빗나간 답 → 다시 묻는 비효율</a:t>
-            </a:r>
-          </a:p>
-          <a:p>
-            <a:pPr algn="l">
-              <a:lnSpc>
-                <a:spcPct val="105000"/>
-              </a:lnSpc>
-              <a:spcAft>
-                <a:spcPts val="300"/>
-              </a:spcAft>
-            </a:pPr>
-            <a:r>
-              <a:rPr sz="1150" b="0" i="0">
-                <a:solidFill>
-                  <a:srgbClr val="181F2B"/>
-                </a:solidFill>
-                <a:latin typeface="Malgun Gothic"/>
-                <a:ea typeface="Malgun Gothic"/>
-                <a:cs typeface="Malgun Gothic"/>
-              </a:rPr>
-              <a:t>토큰·시간 낭비로 이어진다.</a:t>
-            </a:r>
-          </a:p>
-        </p:txBody>
-      </p:sp>
-      <p:sp>
-        <p:nvSpPr>
-          <p:cNvPr id="24" name="Rounded Rectangle 23"/>
+          <p:cNvPr id="25" name="Rounded Rectangle 24"/>
           <p:cNvSpPr/>
           <p:nvPr/>
         </p:nvSpPr>
         <p:spPr>
           <a:xfrm>
-            <a:off x="457200" y="5815584"/>
-            <a:ext cx="6645584" cy="1417320"/>
+            <a:off x="640080" y="5879592"/>
+            <a:ext cx="1371600" cy="310896"/>
           </a:xfrm>
           <a:prstGeom prst="roundRect">
             <a:avLst>
-              <a:gd name="adj" fmla="val 5000"/>
+              <a:gd name="adj" fmla="val 50000"/>
             </a:avLst>
           </a:prstGeom>
           <a:solidFill>
-            <a:srgbClr val="1A253D"/>
+            <a:srgbClr val="23304F"/>
           </a:solidFill>
           <a:ln>
             <a:noFill/>
@@ -4193,14 +5172,14 @@
       </p:sp>
       <p:sp>
         <p:nvSpPr>
-          <p:cNvPr id="25" name="TextBox 24"/>
+          <p:cNvPr id="26" name="TextBox 25"/>
           <p:cNvSpPr txBox="1"/>
           <p:nvPr/>
         </p:nvSpPr>
         <p:spPr>
           <a:xfrm>
-            <a:off x="658368" y="5961888"/>
-            <a:ext cx="6243248" cy="1188720"/>
+            <a:off x="640080" y="5879592"/>
+            <a:ext cx="1371600" cy="310896"/>
           </a:xfrm>
           <a:prstGeom prst="rect">
             <a:avLst/>
@@ -4208,104 +5187,18 @@
           <a:noFill/>
         </p:spPr>
         <p:txBody>
-          <a:bodyPr wrap="square" lIns="73152" tIns="0" rIns="73152" bIns="0" anchor="t">
+          <a:bodyPr wrap="square" lIns="0" tIns="0" rIns="0" bIns="0" anchor="ctr">
             <a:spAutoFit/>
           </a:bodyPr>
           <a:lstStyle/>
           <a:p>
-            <a:pPr algn="l">
-              <a:spcAft>
-                <a:spcPts val="500"/>
-              </a:spcAft>
-            </a:pPr>
-            <a:r>
-              <a:rPr sz="1350" b="1" i="0">
-                <a:solidFill>
-                  <a:srgbClr val="E4002B"/>
-                </a:solidFill>
-                <a:latin typeface="Malgun Gothic"/>
-                <a:ea typeface="Malgun Gothic"/>
-                <a:cs typeface="Malgun Gothic"/>
-              </a:rPr>
-              <a:t>핵심 통찰</a:t>
-            </a:r>
-          </a:p>
-          <a:p>
-            <a:pPr algn="l">
-              <a:lnSpc>
-                <a:spcPct val="105000"/>
-              </a:lnSpc>
-              <a:spcAft>
-                <a:spcPts val="300"/>
-              </a:spcAft>
-            </a:pPr>
-            <a:r>
-              <a:rPr sz="1200" b="0" i="0">
-                <a:solidFill>
-                  <a:srgbClr val="FFFFFF"/>
-                </a:solidFill>
-                <a:latin typeface="Malgun Gothic"/>
-                <a:ea typeface="Malgun Gothic"/>
-                <a:cs typeface="Malgun Gothic"/>
-              </a:rPr>
-              <a:t>정답은 </a:t>
-            </a:r>
-            <a:r>
-              <a:rPr sz="1200" b="1" i="0">
-                <a:solidFill>
-                  <a:srgbClr val="CADCFC"/>
-                </a:solidFill>
-                <a:latin typeface="Malgun Gothic"/>
-                <a:ea typeface="Malgun Gothic"/>
-                <a:cs typeface="Malgun Gothic"/>
-              </a:rPr>
-              <a:t>“더 비싼 모델”</a:t>
-            </a:r>
-            <a:r>
-              <a:rPr sz="1200" b="0" i="0">
-                <a:solidFill>
-                  <a:srgbClr val="FFFFFF"/>
-                </a:solidFill>
-                <a:latin typeface="Malgun Gothic"/>
-                <a:ea typeface="Malgun Gothic"/>
-                <a:cs typeface="Malgun Gothic"/>
-              </a:rPr>
-              <a:t>이 아니라 </a:t>
-            </a:r>
-            <a:r>
-              <a:rPr sz="1200" b="1" i="0">
-                <a:solidFill>
-                  <a:srgbClr val="CADCFC"/>
-                </a:solidFill>
-                <a:latin typeface="Malgun Gothic"/>
-                <a:ea typeface="Malgun Gothic"/>
-                <a:cs typeface="Malgun Gothic"/>
-              </a:rPr>
-              <a:t>“더 좋은 프롬프트”</a:t>
-            </a:r>
-            <a:r>
-              <a:rPr sz="1200" b="0" i="0">
-                <a:solidFill>
-                  <a:srgbClr val="FFFFFF"/>
-                </a:solidFill>
-                <a:latin typeface="Calibri"/>
-                <a:ea typeface="Malgun Gothic"/>
-                <a:cs typeface="Calibri"/>
-              </a:rPr>
-              <a:t>.</a:t>
-            </a:r>
-          </a:p>
-          <a:p>
-            <a:pPr algn="l">
-              <a:lnSpc>
-                <a:spcPct val="105000"/>
-              </a:lnSpc>
+            <a:pPr algn="ctr">
               <a:spcAft>
                 <a:spcPts val="0"/>
               </a:spcAft>
             </a:pPr>
             <a:r>
-              <a:rPr sz="1200" b="0" i="0">
+              <a:rPr sz="950" b="1" i="0">
                 <a:solidFill>
                   <a:srgbClr val="FFFFFF"/>
                 </a:solidFill>
@@ -4313,47 +5206,118 @@
                 <a:ea typeface="Malgun Gothic"/>
                 <a:cs typeface="Malgun Gothic"/>
               </a:rPr>
-              <a:t>소형 모델도 잘 설계된 프롬프트면 고품질 → </a:t>
-            </a:r>
-            <a:r>
-              <a:rPr sz="1200" b="1" i="0">
-                <a:solidFill>
-                  <a:srgbClr val="1E9E57"/>
-                </a:solidFill>
-                <a:latin typeface="Malgun Gothic"/>
-                <a:ea typeface="Malgun Gothic"/>
-                <a:cs typeface="Malgun Gothic"/>
-              </a:rPr>
-              <a:t>토큰 절감</a:t>
-            </a:r>
-            <a:r>
-              <a:rPr sz="1200" b="0" i="0">
-                <a:solidFill>
-                  <a:srgbClr val="FFFFFF"/>
-                </a:solidFill>
-                <a:latin typeface="Calibri"/>
-                <a:ea typeface="Malgun Gothic"/>
-                <a:cs typeface="Calibri"/>
-              </a:rPr>
-              <a:t>.</a:t>
-            </a:r>
-          </a:p>
-        </p:txBody>
-      </p:sp>
-      <p:sp>
-        <p:nvSpPr>
-          <p:cNvPr id="26" name="Rounded Rectangle 25"/>
+              <a:t>BEFORE · 원본</a:t>
+            </a:r>
+          </a:p>
+        </p:txBody>
+      </p:sp>
+      <p:sp>
+        <p:nvSpPr>
+          <p:cNvPr id="27" name="TextBox 26"/>
+          <p:cNvSpPr txBox="1"/>
+          <p:nvPr/>
+        </p:nvSpPr>
+        <p:spPr>
+          <a:xfrm>
+            <a:off x="2194560" y="5742432"/>
+            <a:ext cx="4771064" cy="566928"/>
+          </a:xfrm>
+          <a:prstGeom prst="rect">
+            <a:avLst/>
+          </a:prstGeom>
+          <a:noFill/>
+        </p:spPr>
+        <p:txBody>
+          <a:bodyPr wrap="square" lIns="73152" tIns="0" rIns="73152" bIns="0" anchor="ctr">
+            <a:spAutoFit/>
+          </a:bodyPr>
+          <a:lstStyle/>
+          <a:p>
+            <a:pPr algn="l">
+              <a:spcAft>
+                <a:spcPts val="0"/>
+              </a:spcAft>
+            </a:pPr>
+            <a:r>
+              <a:rPr sz="1600" b="1" i="0">
+                <a:solidFill>
+                  <a:srgbClr val="181F2B"/>
+                </a:solidFill>
+                <a:latin typeface="Malgun Gothic"/>
+                <a:ea typeface="Malgun Gothic"/>
+                <a:cs typeface="Malgun Gothic"/>
+              </a:rPr>
+              <a:t>“레이트 리미터 만들어줘”</a:t>
+            </a:r>
+          </a:p>
+        </p:txBody>
+      </p:sp>
+      <p:sp>
+        <p:nvSpPr>
+          <p:cNvPr id="28" name="TextBox 27"/>
+          <p:cNvSpPr txBox="1"/>
+          <p:nvPr/>
+        </p:nvSpPr>
+        <p:spPr>
+          <a:xfrm>
+            <a:off x="457200" y="6327648"/>
+            <a:ext cx="6645584" cy="274320"/>
+          </a:xfrm>
+          <a:prstGeom prst="rect">
+            <a:avLst/>
+          </a:prstGeom>
+          <a:noFill/>
+        </p:spPr>
+        <p:txBody>
+          <a:bodyPr wrap="square" lIns="73152" tIns="0" rIns="73152" bIns="0" anchor="ctr">
+            <a:spAutoFit/>
+          </a:bodyPr>
+          <a:lstStyle/>
+          <a:p>
+            <a:pPr algn="ctr">
+              <a:spcAft>
+                <a:spcPts val="0"/>
+              </a:spcAft>
+            </a:pPr>
+            <a:r>
+              <a:rPr sz="1250" b="1" i="0">
+                <a:solidFill>
+                  <a:srgbClr val="E4002B"/>
+                </a:solidFill>
+                <a:latin typeface="Cambria"/>
+                <a:ea typeface="Malgun Gothic"/>
+                <a:cs typeface="Cambria"/>
+              </a:rPr>
+              <a:t>@refine</a:t>
+            </a:r>
+            <a:r>
+              <a:rPr sz="1100" b="1" i="0">
+                <a:solidFill>
+                  <a:srgbClr val="66717E"/>
+                </a:solidFill>
+                <a:latin typeface="Malgun Gothic"/>
+                <a:ea typeface="Malgun Gothic"/>
+                <a:cs typeface="Malgun Gothic"/>
+              </a:rPr>
+              <a:t>  정제  ▼</a:t>
+            </a:r>
+          </a:p>
+        </p:txBody>
+      </p:sp>
+      <p:sp>
+        <p:nvSpPr>
+          <p:cNvPr id="29" name="Rounded Rectangle 28"/>
           <p:cNvSpPr/>
           <p:nvPr/>
         </p:nvSpPr>
         <p:spPr>
           <a:xfrm>
-            <a:off x="457200" y="7397496"/>
-            <a:ext cx="6645584" cy="1417320"/>
+            <a:off x="457200" y="6656832"/>
+            <a:ext cx="6645584" cy="3504803"/>
           </a:xfrm>
           <a:prstGeom prst="roundRect">
             <a:avLst>
-              <a:gd name="adj" fmla="val 5000"/>
+              <a:gd name="adj" fmla="val 3500"/>
             </a:avLst>
           </a:prstGeom>
           <a:solidFill>
@@ -4391,14 +5355,102 @@
       </p:sp>
       <p:sp>
         <p:nvSpPr>
-          <p:cNvPr id="27" name="TextBox 26"/>
+          <p:cNvPr id="30" name="Rounded Rectangle 29"/>
+          <p:cNvSpPr/>
+          <p:nvPr/>
+        </p:nvSpPr>
+        <p:spPr>
+          <a:xfrm>
+            <a:off x="640080" y="6803136"/>
+            <a:ext cx="1554480" cy="310896"/>
+          </a:xfrm>
+          <a:prstGeom prst="roundRect">
+            <a:avLst>
+              <a:gd name="adj" fmla="val 50000"/>
+            </a:avLst>
+          </a:prstGeom>
+          <a:solidFill>
+            <a:srgbClr val="E4002B"/>
+          </a:solidFill>
+          <a:ln>
+            <a:noFill/>
+          </a:ln>
+          <a:effectLst/>
+        </p:spPr>
+        <p:style>
+          <a:lnRef idx="1">
+            <a:schemeClr val="accent1"/>
+          </a:lnRef>
+          <a:fillRef idx="3">
+            <a:schemeClr val="accent1"/>
+          </a:fillRef>
+          <a:effectRef idx="2">
+            <a:schemeClr val="accent1"/>
+          </a:effectRef>
+          <a:fontRef idx="minor">
+            <a:schemeClr val="lt1"/>
+          </a:fontRef>
+        </p:style>
+        <p:txBody>
+          <a:bodyPr rtlCol="0" anchor="ctr"/>
+          <a:lstStyle/>
+          <a:p>
+            <a:pPr algn="ctr"/>
+            <a:endParaRPr/>
+          </a:p>
+        </p:txBody>
+      </p:sp>
+      <p:sp>
+        <p:nvSpPr>
+          <p:cNvPr id="31" name="TextBox 30"/>
           <p:cNvSpPr txBox="1"/>
           <p:nvPr/>
         </p:nvSpPr>
         <p:spPr>
           <a:xfrm>
-            <a:off x="658368" y="7543800"/>
-            <a:ext cx="6243248" cy="1143000"/>
+            <a:off x="640080" y="6803136"/>
+            <a:ext cx="1554480" cy="310896"/>
+          </a:xfrm>
+          <a:prstGeom prst="rect">
+            <a:avLst/>
+          </a:prstGeom>
+          <a:noFill/>
+        </p:spPr>
+        <p:txBody>
+          <a:bodyPr wrap="square" lIns="0" tIns="0" rIns="0" bIns="0" anchor="ctr">
+            <a:spAutoFit/>
+          </a:bodyPr>
+          <a:lstStyle/>
+          <a:p>
+            <a:pPr algn="ctr">
+              <a:spcAft>
+                <a:spcPts val="0"/>
+              </a:spcAft>
+            </a:pPr>
+            <a:r>
+              <a:rPr sz="950" b="1" i="0">
+                <a:solidFill>
+                  <a:srgbClr val="FFFFFF"/>
+                </a:solidFill>
+                <a:latin typeface="Malgun Gothic"/>
+                <a:ea typeface="Malgun Gothic"/>
+                <a:cs typeface="Malgun Gothic"/>
+              </a:rPr>
+              <a:t>AFTER · 정제본</a:t>
+            </a:r>
+          </a:p>
+        </p:txBody>
+      </p:sp>
+      <p:sp>
+        <p:nvSpPr>
+          <p:cNvPr id="33" name="TextBox 32"/>
+          <p:cNvSpPr txBox="1"/>
+          <p:nvPr/>
+        </p:nvSpPr>
+        <p:spPr>
+          <a:xfrm>
+            <a:off x="658368" y="7223760"/>
+            <a:ext cx="1024128" cy="457200"/>
           </a:xfrm>
           <a:prstGeom prst="rect">
             <a:avLst/>
@@ -4413,11 +5465,11 @@
           <a:p>
             <a:pPr algn="l">
               <a:spcAft>
-                <a:spcPts val="500"/>
+                <a:spcPts val="0"/>
               </a:spcAft>
             </a:pPr>
             <a:r>
-              <a:rPr sz="1350" b="1" i="0">
+              <a:rPr sz="1100" b="1" i="0">
                 <a:solidFill>
                   <a:srgbClr val="E4002B"/>
                 </a:solidFill>
@@ -4425,20 +5477,213 @@
                 <a:ea typeface="Malgun Gothic"/>
                 <a:cs typeface="Malgun Gothic"/>
               </a:rPr>
-              <a:t>해법</a:t>
-            </a:r>
-          </a:p>
+              <a:t>역할</a:t>
+            </a:r>
+          </a:p>
+        </p:txBody>
+      </p:sp>
+      <p:sp>
+        <p:nvSpPr>
+          <p:cNvPr id="34" name="TextBox 33"/>
+          <p:cNvSpPr txBox="1"/>
+          <p:nvPr/>
+        </p:nvSpPr>
+        <p:spPr>
+          <a:xfrm>
+            <a:off x="1737360" y="7223760"/>
+            <a:ext cx="5182544" cy="457200"/>
+          </a:xfrm>
+          <a:prstGeom prst="rect">
+            <a:avLst/>
+          </a:prstGeom>
+          <a:noFill/>
+        </p:spPr>
+        <p:txBody>
+          <a:bodyPr wrap="square" lIns="73152" tIns="0" rIns="73152" bIns="0" anchor="t">
+            <a:spAutoFit/>
+          </a:bodyPr>
+          <a:lstStyle/>
           <a:p>
             <a:pPr algn="l">
               <a:lnSpc>
-                <a:spcPct val="105000"/>
+                <a:spcPct val="100000"/>
+              </a:lnSpc>
+              <a:spcAft>
+                <a:spcPts val="200"/>
+              </a:spcAft>
+            </a:pPr>
+            <a:r>
+              <a:rPr sz="1050" b="0" i="0">
+                <a:solidFill>
+                  <a:srgbClr val="181F2B"/>
+                </a:solidFill>
+                <a:latin typeface="Malgun Gothic"/>
+                <a:ea typeface="Malgun Gothic"/>
+                <a:cs typeface="Malgun Gothic"/>
+              </a:rPr>
+              <a:t>대규모 트래픽 백엔드·분산 시스템 아키텍트 — 동시성·부하 분산·안정성 전문</a:t>
+            </a:r>
+          </a:p>
+        </p:txBody>
+      </p:sp>
+      <p:sp>
+        <p:nvSpPr>
+          <p:cNvPr id="35" name="TextBox 34"/>
+          <p:cNvSpPr txBox="1"/>
+          <p:nvPr/>
+        </p:nvSpPr>
+        <p:spPr>
+          <a:xfrm>
+            <a:off x="658368" y="7680960"/>
+            <a:ext cx="1024128" cy="457200"/>
+          </a:xfrm>
+          <a:prstGeom prst="rect">
+            <a:avLst/>
+          </a:prstGeom>
+          <a:noFill/>
+        </p:spPr>
+        <p:txBody>
+          <a:bodyPr wrap="square" lIns="73152" tIns="0" rIns="73152" bIns="0" anchor="t">
+            <a:spAutoFit/>
+          </a:bodyPr>
+          <a:lstStyle/>
+          <a:p>
+            <a:pPr algn="l">
+              <a:spcAft>
+                <a:spcPts val="0"/>
+              </a:spcAft>
+            </a:pPr>
+            <a:r>
+              <a:rPr sz="1100" b="1" i="0">
+                <a:solidFill>
+                  <a:srgbClr val="E4002B"/>
+                </a:solidFill>
+                <a:latin typeface="Malgun Gothic"/>
+                <a:ea typeface="Malgun Gothic"/>
+                <a:cs typeface="Malgun Gothic"/>
+              </a:rPr>
+              <a:t>임무</a:t>
+            </a:r>
+          </a:p>
+        </p:txBody>
+      </p:sp>
+      <p:sp>
+        <p:nvSpPr>
+          <p:cNvPr id="36" name="TextBox 35"/>
+          <p:cNvSpPr txBox="1"/>
+          <p:nvPr/>
+        </p:nvSpPr>
+        <p:spPr>
+          <a:xfrm>
+            <a:off x="1737360" y="7680960"/>
+            <a:ext cx="5182544" cy="457200"/>
+          </a:xfrm>
+          <a:prstGeom prst="rect">
+            <a:avLst/>
+          </a:prstGeom>
+          <a:noFill/>
+        </p:spPr>
+        <p:txBody>
+          <a:bodyPr wrap="square" lIns="73152" tIns="0" rIns="73152" bIns="0" anchor="t">
+            <a:spAutoFit/>
+          </a:bodyPr>
+          <a:lstStyle/>
+          <a:p>
+            <a:pPr algn="l">
+              <a:lnSpc>
+                <a:spcPct val="100000"/>
+              </a:lnSpc>
+              <a:spcAft>
+                <a:spcPts val="200"/>
+              </a:spcAft>
+            </a:pPr>
+            <a:r>
+              <a:rPr sz="1050" b="0" i="0">
+                <a:solidFill>
+                  <a:srgbClr val="181F2B"/>
+                </a:solidFill>
+                <a:latin typeface="Malgun Gothic"/>
+                <a:ea typeface="Malgun Gothic"/>
+                <a:cs typeface="Malgun Gothic"/>
+              </a:rPr>
+              <a:t>프로덕션급 Rate Limiter 설계·구현 — 단순 코드를 넘어 견고한 아키텍처 제안</a:t>
+            </a:r>
+          </a:p>
+        </p:txBody>
+      </p:sp>
+      <p:sp>
+        <p:nvSpPr>
+          <p:cNvPr id="37" name="TextBox 36"/>
+          <p:cNvSpPr txBox="1"/>
+          <p:nvPr/>
+        </p:nvSpPr>
+        <p:spPr>
+          <a:xfrm>
+            <a:off x="658368" y="8138160"/>
+            <a:ext cx="1024128" cy="365760"/>
+          </a:xfrm>
+          <a:prstGeom prst="rect">
+            <a:avLst/>
+          </a:prstGeom>
+          <a:noFill/>
+        </p:spPr>
+        <p:txBody>
+          <a:bodyPr wrap="square" lIns="73152" tIns="0" rIns="73152" bIns="0" anchor="t">
+            <a:spAutoFit/>
+          </a:bodyPr>
+          <a:lstStyle/>
+          <a:p>
+            <a:pPr algn="l">
+              <a:spcAft>
+                <a:spcPts val="0"/>
+              </a:spcAft>
+            </a:pPr>
+            <a:r>
+              <a:rPr sz="1100" b="1" i="0">
+                <a:solidFill>
+                  <a:srgbClr val="E4002B"/>
+                </a:solidFill>
+                <a:latin typeface="Malgun Gothic"/>
+                <a:ea typeface="Malgun Gothic"/>
+                <a:cs typeface="Malgun Gothic"/>
+              </a:rPr>
+              <a:t>필수 포함</a:t>
+            </a:r>
+          </a:p>
+        </p:txBody>
+      </p:sp>
+      <p:sp>
+        <p:nvSpPr>
+          <p:cNvPr id="38" name="TextBox 37"/>
+          <p:cNvSpPr txBox="1"/>
+          <p:nvPr/>
+        </p:nvSpPr>
+        <p:spPr>
+          <a:xfrm>
+            <a:off x="1737360" y="8138160"/>
+            <a:ext cx="5182544" cy="1417320"/>
+          </a:xfrm>
+          <a:prstGeom prst="rect">
+            <a:avLst/>
+          </a:prstGeom>
+          <a:noFill/>
+        </p:spPr>
+        <p:txBody>
+          <a:bodyPr wrap="square" lIns="73152" tIns="0" rIns="73152" bIns="0" anchor="t">
+            <a:spAutoFit/>
+          </a:bodyPr>
+          <a:lstStyle/>
+          <a:p>
+            <a:pPr algn="l">
+              <a:lnSpc>
+                <a:spcPct val="100000"/>
               </a:lnSpc>
               <a:spcAft>
                 <a:spcPts val="300"/>
               </a:spcAft>
             </a:pPr>
             <a:r>
-              <a:rPr sz="1150" b="0" i="0">
+              <a:rPr sz="1050" b="0" i="0">
                 <a:solidFill>
                   <a:srgbClr val="181F2B"/>
                 </a:solidFill>
@@ -4446,83 +5691,84 @@
                 <a:ea typeface="Malgun Gothic"/>
                 <a:cs typeface="Malgun Gothic"/>
               </a:rPr>
-              <a:t>입력과 LLM 사이에 ‘정제 계층’을 끼워 넣되, 미리보기·승인으로 가로막지 않는다.</a:t>
+              <a:t>① 알고리즘 비교 — Token Bucket · Sliding Window · Fixed Window (버스트·메모리 트레이드오프)</a:t>
             </a:r>
           </a:p>
           <a:p>
             <a:pPr algn="l">
               <a:lnSpc>
-                <a:spcPct val="105000"/>
+                <a:spcPct val="100000"/>
               </a:lnSpc>
               <a:spcAft>
                 <a:spcPts val="300"/>
               </a:spcAft>
             </a:pPr>
             <a:r>
-              <a:rPr sz="1150" b="1" i="0">
-                <a:solidFill>
-                  <a:srgbClr val="E4002B"/>
-                </a:solidFill>
-                <a:latin typeface="Malgun Gothic"/>
-                <a:ea typeface="Malgun Gothic"/>
-                <a:cs typeface="Malgun Gothic"/>
-              </a:rPr>
-              <a:t>끼어들되 가로막지 않는다.</a:t>
-            </a:r>
-          </a:p>
-        </p:txBody>
-      </p:sp>
-      <p:sp>
-        <p:nvSpPr>
-          <p:cNvPr id="28" name="TextBox 27"/>
-          <p:cNvSpPr txBox="1"/>
-          <p:nvPr/>
-        </p:nvSpPr>
-        <p:spPr>
-          <a:xfrm>
-            <a:off x="457200" y="9015984"/>
-            <a:ext cx="6645584" cy="640080"/>
-          </a:xfrm>
-          <a:prstGeom prst="rect">
-            <a:avLst/>
-          </a:prstGeom>
-          <a:noFill/>
-        </p:spPr>
-        <p:txBody>
-          <a:bodyPr wrap="square" lIns="73152" tIns="36576" rIns="73152" bIns="36576" anchor="ctr">
-            <a:spAutoFit/>
-          </a:bodyPr>
-          <a:lstStyle/>
-          <a:p>
-            <a:pPr algn="ctr">
+              <a:rPr sz="1050" b="0" i="0">
+                <a:solidFill>
+                  <a:srgbClr val="181F2B"/>
+                </a:solidFill>
+                <a:latin typeface="Malgun Gothic"/>
+                <a:ea typeface="Malgun Gothic"/>
+                <a:cs typeface="Malgun Gothic"/>
+              </a:rPr>
+              <a:t>② 동시성 안전 구현 — Python/Go, Redis 분산으로 단일 인스턴스 한계 극복. 한국어 주석 첨부</a:t>
+            </a:r>
+          </a:p>
+          <a:p>
+            <a:pPr algn="l">
+              <a:lnSpc>
+                <a:spcPct val="100000"/>
+              </a:lnSpc>
+              <a:spcAft>
+                <a:spcPts val="300"/>
+              </a:spcAft>
+            </a:pPr>
+            <a:r>
+              <a:rPr sz="1050" b="0" i="0">
+                <a:solidFill>
+                  <a:srgbClr val="181F2B"/>
+                </a:solidFill>
+                <a:latin typeface="Malgun Gothic"/>
+                <a:ea typeface="Malgun Gothic"/>
+                <a:cs typeface="Malgun Gothic"/>
+              </a:rPr>
+              <a:t>③ Race Condition 방지 — Lock 메커니즘 · Atomic 연산</a:t>
+            </a:r>
+          </a:p>
+          <a:p>
+            <a:pPr algn="l">
+              <a:lnSpc>
+                <a:spcPct val="100000"/>
+              </a:lnSpc>
               <a:spcAft>
                 <a:spcPts val="0"/>
               </a:spcAft>
             </a:pPr>
             <a:r>
-              <a:rPr sz="1900" b="1" i="1">
-                <a:solidFill>
-                  <a:srgbClr val="A80020"/>
-                </a:solidFill>
-                <a:latin typeface="Malgun Gothic"/>
-                <a:ea typeface="Malgun Gothic"/>
-                <a:cs typeface="Malgun Gothic"/>
-              </a:rPr>
-              <a:t>“끼어들되 가로막지 않는다”</a:t>
-            </a:r>
-          </a:p>
-        </p:txBody>
-      </p:sp>
-      <p:sp>
-        <p:nvSpPr>
-          <p:cNvPr id="29" name="TextBox 28"/>
+              <a:rPr sz="1050" b="0" i="0">
+                <a:solidFill>
+                  <a:srgbClr val="181F2B"/>
+                </a:solidFill>
+                <a:latin typeface="Malgun Gothic"/>
+                <a:ea typeface="Malgun Gothic"/>
+                <a:cs typeface="Malgun Gothic"/>
+              </a:rPr>
+              <a:t>④ 아키텍처 — 배치 위치(Gateway vs App) · 파라미터(window·max) · 예외(HTTP 상태코드)</a:t>
+            </a:r>
+          </a:p>
+        </p:txBody>
+      </p:sp>
+      <p:sp>
+        <p:nvSpPr>
+          <p:cNvPr id="39" name="TextBox 38"/>
           <p:cNvSpPr txBox="1"/>
           <p:nvPr/>
         </p:nvSpPr>
         <p:spPr>
           <a:xfrm>
-            <a:off x="457200" y="10271363"/>
-            <a:ext cx="6096944" cy="274320"/>
+            <a:off x="658368" y="9601200"/>
+            <a:ext cx="1024128" cy="457200"/>
           </a:xfrm>
           <a:prstGeom prst="rect">
             <a:avLst/>
@@ -4530,7 +5776,7 @@
           <a:noFill/>
         </p:spPr>
         <p:txBody>
-          <a:bodyPr wrap="square" lIns="73152" tIns="0" rIns="73152" bIns="0" anchor="ctr">
+          <a:bodyPr wrap="square" lIns="73152" tIns="0" rIns="73152" bIns="0" anchor="t">
             <a:spAutoFit/>
           </a:bodyPr>
           <a:lstStyle/>
@@ -4541,6 +5787,91 @@
               </a:spcAft>
             </a:pPr>
             <a:r>
+              <a:rPr sz="1100" b="1" i="0">
+                <a:solidFill>
+                  <a:srgbClr val="E4002B"/>
+                </a:solidFill>
+                <a:latin typeface="Malgun Gothic"/>
+                <a:ea typeface="Malgun Gothic"/>
+                <a:cs typeface="Malgun Gothic"/>
+              </a:rPr>
+              <a:t>출력 형식</a:t>
+            </a:r>
+          </a:p>
+        </p:txBody>
+      </p:sp>
+      <p:sp>
+        <p:nvSpPr>
+          <p:cNvPr id="40" name="TextBox 39"/>
+          <p:cNvSpPr txBox="1"/>
+          <p:nvPr/>
+        </p:nvSpPr>
+        <p:spPr>
+          <a:xfrm>
+            <a:off x="1737360" y="9601200"/>
+            <a:ext cx="5182544" cy="457200"/>
+          </a:xfrm>
+          <a:prstGeom prst="rect">
+            <a:avLst/>
+          </a:prstGeom>
+          <a:noFill/>
+        </p:spPr>
+        <p:txBody>
+          <a:bodyPr wrap="square" lIns="73152" tIns="0" rIns="73152" bIns="0" anchor="t">
+            <a:spAutoFit/>
+          </a:bodyPr>
+          <a:lstStyle/>
+          <a:p>
+            <a:pPr algn="l">
+              <a:lnSpc>
+                <a:spcPct val="100000"/>
+              </a:lnSpc>
+              <a:spcAft>
+                <a:spcPts val="200"/>
+              </a:spcAft>
+            </a:pPr>
+            <a:r>
+              <a:rPr sz="1050" b="0" i="0">
+                <a:solidFill>
+                  <a:srgbClr val="181F2B"/>
+                </a:solidFill>
+                <a:latin typeface="Malgun Gothic"/>
+                <a:ea typeface="Malgun Gothic"/>
+                <a:cs typeface="Malgun Gothic"/>
+              </a:rPr>
+              <a:t>알고리즘 선택 근거 · 아키텍처 다이어그램 · 구현 코드 블록 · 동시성·확장성 요약</a:t>
+            </a:r>
+          </a:p>
+        </p:txBody>
+      </p:sp>
+      <p:sp>
+        <p:nvSpPr>
+          <p:cNvPr id="41" name="TextBox 40"/>
+          <p:cNvSpPr txBox="1"/>
+          <p:nvPr/>
+        </p:nvSpPr>
+        <p:spPr>
+          <a:xfrm>
+            <a:off x="457200" y="10271363"/>
+            <a:ext cx="6096944" cy="274320"/>
+          </a:xfrm>
+          <a:prstGeom prst="rect">
+            <a:avLst/>
+          </a:prstGeom>
+          <a:noFill/>
+        </p:spPr>
+        <p:txBody>
+          <a:bodyPr wrap="square" lIns="73152" tIns="0" rIns="73152" bIns="0" anchor="ctr">
+            <a:spAutoFit/>
+          </a:bodyPr>
+          <a:lstStyle/>
+          <a:p>
+            <a:pPr algn="l">
+              <a:spcAft>
+                <a:spcPts val="0"/>
+              </a:spcAft>
+            </a:pPr>
+            <a:r>
               <a:rPr sz="850" b="1" i="0">
                 <a:solidFill>
                   <a:srgbClr val="181F2B"/>
@@ -4567,7 +5898,7 @@
       </p:sp>
       <p:sp>
         <p:nvSpPr>
-          <p:cNvPr id="30" name="TextBox 29"/>
+          <p:cNvPr id="42" name="TextBox 41"/>
           <p:cNvSpPr txBox="1"/>
           <p:nvPr/>
         </p:nvSpPr>
@@ -4601,7 +5932,7 @@
                 <a:ea typeface="Malgun Gothic"/>
                 <a:cs typeface="Cambria"/>
               </a:rPr>
-              <a:t>1 / 4</a:t>
+              <a:t>1 / 2</a:t>
             </a:r>
           </a:p>
         </p:txBody>
@@ -4730,7 +6061,7 @@
                 <a:ea typeface="Malgun Gothic"/>
                 <a:cs typeface="Malgun Gothic"/>
               </a:rPr>
-              <a:t>아키텍처</a:t>
+              <a:t>아키텍처 &amp; 파이프라인</a:t>
             </a:r>
           </a:p>
         </p:txBody>
@@ -4784,8 +6115,8 @@
         </p:nvSpPr>
         <p:spPr>
           <a:xfrm>
-            <a:off x="457200" y="1417320"/>
-            <a:ext cx="6645584" cy="2651760"/>
+            <a:off x="457200" y="1325880"/>
+            <a:ext cx="6645584" cy="2121408"/>
           </a:xfrm>
           <a:prstGeom prst="roundRect">
             <a:avLst>
@@ -4833,7 +6164,7 @@
         </p:nvSpPr>
         <p:spPr>
           <a:xfrm>
-            <a:off x="685800" y="1581912"/>
+            <a:off x="685800" y="1453895"/>
             <a:ext cx="6188384" cy="274320"/>
           </a:xfrm>
           <a:prstGeom prst="rect">
@@ -4885,8 +6216,8 @@
         </p:nvSpPr>
         <p:spPr>
           <a:xfrm>
-            <a:off x="685800" y="1984248"/>
-            <a:ext cx="6188384" cy="457200"/>
+            <a:off x="685800" y="1819656"/>
+            <a:ext cx="6188384" cy="402336"/>
           </a:xfrm>
           <a:prstGeom prst="roundRect">
             <a:avLst>
@@ -4934,8 +6265,8 @@
         </p:nvSpPr>
         <p:spPr>
           <a:xfrm>
-            <a:off x="868680" y="1984248"/>
-            <a:ext cx="2286000" cy="457200"/>
+            <a:off x="868680" y="1819656"/>
+            <a:ext cx="2286000" cy="402336"/>
           </a:xfrm>
           <a:prstGeom prst="rect">
             <a:avLst/>
@@ -4975,8 +6306,8 @@
         </p:nvSpPr>
         <p:spPr>
           <a:xfrm>
-            <a:off x="3154680" y="1984248"/>
-            <a:ext cx="3628064" cy="457200"/>
+            <a:off x="3154680" y="1940032"/>
+            <a:ext cx="3628064" cy="161583"/>
           </a:xfrm>
           <a:prstGeom prst="rect">
             <a:avLst/>
@@ -4995,7 +6326,7 @@
               </a:spcAft>
             </a:pPr>
             <a:r>
-              <a:rPr sz="1050" b="0" i="0">
+              <a:rPr lang="ko-KR" altLang="en-US" sz="1050" dirty="0">
                 <a:solidFill>
                   <a:srgbClr val="66717E"/>
                 </a:solidFill>
@@ -5003,8 +6334,82 @@
                 <a:ea typeface="Malgun Gothic"/>
                 <a:cs typeface="Malgun Gothic"/>
               </a:rPr>
-              <a:t>정제 미리보기 + 5선택지 승인</a:t>
-            </a:r>
+              <a:t>개선</a:t>
+            </a:r>
+            <a:r>
+              <a:rPr sz="1050" b="0" i="0" dirty="0">
+                <a:solidFill>
+                  <a:srgbClr val="66717E"/>
+                </a:solidFill>
+                <a:latin typeface="Malgun Gothic"/>
+                <a:ea typeface="Malgun Gothic"/>
+                <a:cs typeface="Malgun Gothic"/>
+              </a:rPr>
+              <a:t>된 </a:t>
+            </a:r>
+            <a:r>
+              <a:rPr sz="1050" b="0" i="0" dirty="0" err="1">
+                <a:solidFill>
+                  <a:srgbClr val="66717E"/>
+                </a:solidFill>
+                <a:latin typeface="Malgun Gothic"/>
+                <a:ea typeface="Malgun Gothic"/>
+                <a:cs typeface="Malgun Gothic"/>
+              </a:rPr>
+              <a:t>프롬프트</a:t>
+            </a:r>
+            <a:r>
+              <a:rPr sz="1050" b="0" i="0" dirty="0">
+                <a:solidFill>
+                  <a:srgbClr val="66717E"/>
+                </a:solidFill>
+                <a:latin typeface="Malgun Gothic"/>
+                <a:ea typeface="Malgun Gothic"/>
+                <a:cs typeface="Malgun Gothic"/>
+              </a:rPr>
+              <a:t> </a:t>
+            </a:r>
+            <a:r>
+              <a:rPr sz="1050" b="0" i="0" dirty="0" err="1">
+                <a:solidFill>
+                  <a:srgbClr val="66717E"/>
+                </a:solidFill>
+                <a:latin typeface="Malgun Gothic"/>
+                <a:ea typeface="Malgun Gothic"/>
+                <a:cs typeface="Malgun Gothic"/>
+              </a:rPr>
+              <a:t>체크</a:t>
+            </a:r>
+            <a:r>
+              <a:rPr sz="1050" b="0" i="0" dirty="0">
+                <a:solidFill>
+                  <a:srgbClr val="66717E"/>
+                </a:solidFill>
+                <a:latin typeface="Malgun Gothic"/>
+                <a:ea typeface="Malgun Gothic"/>
+                <a:cs typeface="Malgun Gothic"/>
+              </a:rPr>
+              <a:t> + 5선택지 </a:t>
+            </a:r>
+            <a:r>
+              <a:rPr sz="1050" b="0" i="0" dirty="0" err="1">
+                <a:solidFill>
+                  <a:srgbClr val="66717E"/>
+                </a:solidFill>
+                <a:latin typeface="Malgun Gothic"/>
+                <a:ea typeface="Malgun Gothic"/>
+                <a:cs typeface="Malgun Gothic"/>
+              </a:rPr>
+              <a:t>제시</a:t>
+            </a:r>
+            <a:endParaRPr sz="1050" b="0" i="0" dirty="0">
+              <a:solidFill>
+                <a:srgbClr val="66717E"/>
+              </a:solidFill>
+              <a:latin typeface="Malgun Gothic"/>
+              <a:ea typeface="Malgun Gothic"/>
+              <a:cs typeface="Malgun Gothic"/>
+            </a:endParaRPr>
           </a:p>
         </p:txBody>
       </p:sp>
@@ -5016,8 +6421,8 @@
         </p:nvSpPr>
         <p:spPr>
           <a:xfrm>
-            <a:off x="685800" y="2532888"/>
-            <a:ext cx="6188384" cy="457200"/>
+            <a:off x="685800" y="2276856"/>
+            <a:ext cx="6188384" cy="402336"/>
           </a:xfrm>
           <a:prstGeom prst="roundRect">
             <a:avLst>
@@ -5065,8 +6470,8 @@
         </p:nvSpPr>
         <p:spPr>
           <a:xfrm>
-            <a:off x="868680" y="2532888"/>
-            <a:ext cx="2286000" cy="457200"/>
+            <a:off x="868680" y="2276856"/>
+            <a:ext cx="2286000" cy="402336"/>
           </a:xfrm>
           <a:prstGeom prst="rect">
             <a:avLst/>
@@ -5106,8 +6511,8 @@
         </p:nvSpPr>
         <p:spPr>
           <a:xfrm>
-            <a:off x="3154680" y="2532888"/>
-            <a:ext cx="3628064" cy="457200"/>
+            <a:off x="3154680" y="2276856"/>
+            <a:ext cx="3628064" cy="402336"/>
           </a:xfrm>
           <a:prstGeom prst="rect">
             <a:avLst/>
@@ -5126,7 +6531,7 @@
               </a:spcAft>
             </a:pPr>
             <a:r>
-              <a:rPr sz="1050" b="0" i="0">
+              <a:rPr sz="1050" b="0" i="0" dirty="0" err="1">
                 <a:solidFill>
                   <a:srgbClr val="66717E"/>
                 </a:solidFill>
@@ -5134,8 +6539,60 @@
                 <a:ea typeface="Malgun Gothic"/>
                 <a:cs typeface="Malgun Gothic"/>
               </a:rPr>
-              <a:t>원본→정제본 카드 · 검색 · diff</a:t>
-            </a:r>
+              <a:t>원본→정제본</a:t>
+            </a:r>
+            <a:r>
+              <a:rPr sz="1050" b="0" i="0" dirty="0">
+                <a:solidFill>
+                  <a:srgbClr val="66717E"/>
+                </a:solidFill>
+                <a:latin typeface="Malgun Gothic"/>
+                <a:ea typeface="Malgun Gothic"/>
+                <a:cs typeface="Malgun Gothic"/>
+              </a:rPr>
+              <a:t> </a:t>
+            </a:r>
+            <a:r>
+              <a:rPr sz="1050" b="0" i="0" dirty="0" err="1">
+                <a:solidFill>
+                  <a:srgbClr val="66717E"/>
+                </a:solidFill>
+                <a:latin typeface="Malgun Gothic"/>
+                <a:ea typeface="Malgun Gothic"/>
+                <a:cs typeface="Malgun Gothic"/>
+              </a:rPr>
+              <a:t>카드</a:t>
+            </a:r>
+            <a:r>
+              <a:rPr sz="1050" b="0" i="0" dirty="0">
+                <a:solidFill>
+                  <a:srgbClr val="66717E"/>
+                </a:solidFill>
+                <a:latin typeface="Malgun Gothic"/>
+                <a:ea typeface="Malgun Gothic"/>
+                <a:cs typeface="Malgun Gothic"/>
+              </a:rPr>
+              <a:t> · </a:t>
+            </a:r>
+            <a:r>
+              <a:rPr sz="1050" b="0" i="0" dirty="0" err="1">
+                <a:solidFill>
+                  <a:srgbClr val="66717E"/>
+                </a:solidFill>
+                <a:latin typeface="Malgun Gothic"/>
+                <a:ea typeface="Malgun Gothic"/>
+                <a:cs typeface="Malgun Gothic"/>
+              </a:rPr>
+              <a:t>검색</a:t>
+            </a:r>
+            <a:endParaRPr sz="1050" b="0" i="0" dirty="0">
+              <a:solidFill>
+                <a:srgbClr val="66717E"/>
+              </a:solidFill>
+              <a:latin typeface="Malgun Gothic"/>
+              <a:ea typeface="Malgun Gothic"/>
+              <a:cs typeface="Malgun Gothic"/>
+            </a:endParaRPr>
           </a:p>
         </p:txBody>
       </p:sp>
@@ -5147,8 +6604,8 @@
         </p:nvSpPr>
         <p:spPr>
           <a:xfrm>
-            <a:off x="685800" y="3081528"/>
-            <a:ext cx="6188384" cy="457200"/>
+            <a:off x="685800" y="2734056"/>
+            <a:ext cx="6188384" cy="402336"/>
           </a:xfrm>
           <a:prstGeom prst="roundRect">
             <a:avLst>
@@ -5196,8 +6653,8 @@
         </p:nvSpPr>
         <p:spPr>
           <a:xfrm>
-            <a:off x="868680" y="3081528"/>
-            <a:ext cx="2286000" cy="457200"/>
+            <a:off x="868680" y="2734056"/>
+            <a:ext cx="2286000" cy="402336"/>
           </a:xfrm>
           <a:prstGeom prst="rect">
             <a:avLst/>
@@ -5237,8 +6694,8 @@
         </p:nvSpPr>
         <p:spPr>
           <a:xfrm>
-            <a:off x="3154680" y="3081528"/>
-            <a:ext cx="3628064" cy="457200"/>
+            <a:off x="3154680" y="2734056"/>
+            <a:ext cx="3628064" cy="402336"/>
           </a:xfrm>
           <a:prstGeom prst="rect">
             <a:avLst/>
@@ -5278,7 +6735,7 @@
         </p:nvSpPr>
         <p:spPr>
           <a:xfrm>
-            <a:off x="685800" y="3758184"/>
+            <a:off x="685800" y="3172968"/>
             <a:ext cx="6188384" cy="256032"/>
           </a:xfrm>
           <a:prstGeom prst="rect">
@@ -5306,7 +6763,7 @@
                 <a:ea typeface="Malgun Gothic"/>
                 <a:cs typeface="Malgun Gothic"/>
               </a:rPr>
-              <a:t>R-EX-01 ~ 11   ·   순수 JS   ·   런타임 의존성 0</a:t>
+              <a:t>순수 JS   ·   런타임 의존성 0   ·   승인 게이트 기반 UX</a:t>
             </a:r>
           </a:p>
         </p:txBody>
@@ -5319,8 +6776,8 @@
         </p:nvSpPr>
         <p:spPr>
           <a:xfrm>
-            <a:off x="457200" y="4087368"/>
-            <a:ext cx="6645584" cy="329184"/>
+            <a:off x="457200" y="3483863"/>
+            <a:ext cx="6645584" cy="310896"/>
           </a:xfrm>
           <a:prstGeom prst="rect">
             <a:avLst/>
@@ -5360,12 +6817,12 @@
         </p:nvSpPr>
         <p:spPr>
           <a:xfrm>
-            <a:off x="457200" y="4453128"/>
-            <a:ext cx="6645584" cy="1481328"/>
+            <a:off x="457200" y="3849624"/>
+            <a:ext cx="6645584" cy="420624"/>
           </a:xfrm>
           <a:prstGeom prst="roundRect">
             <a:avLst>
-              <a:gd name="adj" fmla="val 4000"/>
+              <a:gd name="adj" fmla="val 12000"/>
             </a:avLst>
           </a:prstGeom>
           <a:solidFill>
@@ -5407,8 +6864,8 @@
         </p:nvSpPr>
         <p:spPr>
           <a:xfrm>
-            <a:off x="685800" y="4599432"/>
-            <a:ext cx="6188384" cy="274320"/>
+            <a:off x="685800" y="3849624"/>
+            <a:ext cx="6188384" cy="420624"/>
           </a:xfrm>
           <a:prstGeom prst="rect">
             <a:avLst/>
@@ -5416,7 +6873,7 @@
           <a:noFill/>
         </p:spPr>
         <p:txBody>
-          <a:bodyPr wrap="square" lIns="73152" tIns="0" rIns="73152" bIns="0" anchor="t">
+          <a:bodyPr wrap="square" lIns="73152" tIns="0" rIns="73152" bIns="0" anchor="ctr">
             <a:spAutoFit/>
           </a:bodyPr>
           <a:lstStyle/>
@@ -5438,7 +6895,7 @@
               <a:t>BACKEND</a:t>
             </a:r>
             <a:r>
-              <a:rPr sz="1350" b="1" i="0">
+              <a:rPr sz="1300" b="1" i="0">
                 <a:solidFill>
                   <a:srgbClr val="FFFFFF"/>
                 </a:solidFill>
@@ -5446,7 +6903,7 @@
                 <a:ea typeface="Malgun Gothic"/>
                 <a:cs typeface="Malgun Gothic"/>
               </a:rPr>
-              <a:t>   —   Endpoint (FastAPI) · 메타프롬프팅 파이프라인</a:t>
+              <a:t>   —   FastAPI · 프롬프트 향상 매커니즘 4단계</a:t>
             </a:r>
           </a:p>
         </p:txBody>
@@ -5459,651 +6916,12 @@
         </p:nvSpPr>
         <p:spPr>
           <a:xfrm>
-            <a:off x="685800" y="5001768"/>
-            <a:ext cx="1259060" cy="713232"/>
+            <a:off x="457200" y="4361688"/>
+            <a:ext cx="6645584" cy="713232"/>
           </a:xfrm>
           <a:prstGeom prst="roundRect">
             <a:avLst>
-              <a:gd name="adj" fmla="val 7000"/>
-            </a:avLst>
-          </a:prstGeom>
-          <a:solidFill>
-            <a:srgbClr val="23304F"/>
-          </a:solidFill>
-          <a:ln>
-            <a:noFill/>
-          </a:ln>
-          <a:effectLst/>
-        </p:spPr>
-        <p:style>
-          <a:lnRef idx="1">
-            <a:schemeClr val="accent1"/>
-          </a:lnRef>
-          <a:fillRef idx="3">
-            <a:schemeClr val="accent1"/>
-          </a:fillRef>
-          <a:effectRef idx="2">
-            <a:schemeClr val="accent1"/>
-          </a:effectRef>
-          <a:fontRef idx="minor">
-            <a:schemeClr val="lt1"/>
-          </a:fontRef>
-        </p:style>
-        <p:txBody>
-          <a:bodyPr rtlCol="0" anchor="ctr"/>
-          <a:lstStyle/>
-          <a:p>
-            <a:pPr algn="ctr"/>
-            <a:endParaRPr/>
-          </a:p>
-        </p:txBody>
-      </p:sp>
-      <p:sp>
-        <p:nvSpPr>
-          <p:cNvPr id="21" name="TextBox 20"/>
-          <p:cNvSpPr txBox="1"/>
-          <p:nvPr/>
-        </p:nvSpPr>
-        <p:spPr>
-          <a:xfrm>
-            <a:off x="685800" y="5093207"/>
-            <a:ext cx="1259060" cy="310896"/>
-          </a:xfrm>
-          <a:prstGeom prst="rect">
-            <a:avLst/>
-          </a:prstGeom>
-          <a:noFill/>
-        </p:spPr>
-        <p:txBody>
-          <a:bodyPr wrap="square" lIns="73152" tIns="0" rIns="73152" bIns="0" anchor="t">
-            <a:spAutoFit/>
-          </a:bodyPr>
-          <a:lstStyle/>
-          <a:p>
-            <a:pPr algn="ctr">
-              <a:spcAft>
-                <a:spcPts val="0"/>
-              </a:spcAft>
-            </a:pPr>
-            <a:r>
-              <a:rPr sz="1200" b="1" i="0">
-                <a:solidFill>
-                  <a:srgbClr val="FFFFFF"/>
-                </a:solidFill>
-                <a:latin typeface="Malgun Gothic"/>
-                <a:ea typeface="Malgun Gothic"/>
-                <a:cs typeface="Malgun Gothic"/>
-              </a:rPr>
-              <a:t>1. 정제</a:t>
-            </a:r>
-          </a:p>
-        </p:txBody>
-      </p:sp>
-      <p:sp>
-        <p:nvSpPr>
-          <p:cNvPr id="22" name="TextBox 21"/>
-          <p:cNvSpPr txBox="1"/>
-          <p:nvPr/>
-        </p:nvSpPr>
-        <p:spPr>
-          <a:xfrm>
-            <a:off x="685800" y="5385816"/>
-            <a:ext cx="1259060" cy="274320"/>
-          </a:xfrm>
-          <a:prstGeom prst="rect">
-            <a:avLst/>
-          </a:prstGeom>
-          <a:noFill/>
-        </p:spPr>
-        <p:txBody>
-          <a:bodyPr wrap="square" lIns="73152" tIns="0" rIns="73152" bIns="0" anchor="t">
-            <a:spAutoFit/>
-          </a:bodyPr>
-          <a:lstStyle/>
-          <a:p>
-            <a:pPr algn="ctr">
-              <a:spcAft>
-                <a:spcPts val="0"/>
-              </a:spcAft>
-            </a:pPr>
-            <a:r>
-              <a:rPr sz="1000" b="1" i="0">
-                <a:solidFill>
-                  <a:srgbClr val="CADCFC"/>
-                </a:solidFill>
-                <a:latin typeface="Calibri"/>
-                <a:ea typeface="Malgun Gothic"/>
-                <a:cs typeface="Calibri"/>
-              </a:rPr>
-              <a:t>/rewrite</a:t>
-            </a:r>
-          </a:p>
-        </p:txBody>
-      </p:sp>
-      <p:sp>
-        <p:nvSpPr>
-          <p:cNvPr id="23" name="TextBox 22"/>
-          <p:cNvSpPr txBox="1"/>
-          <p:nvPr/>
-        </p:nvSpPr>
-        <p:spPr>
-          <a:xfrm>
-            <a:off x="1944860" y="5001768"/>
-            <a:ext cx="384048" cy="713232"/>
-          </a:xfrm>
-          <a:prstGeom prst="rect">
-            <a:avLst/>
-          </a:prstGeom>
-          <a:noFill/>
-        </p:spPr>
-        <p:txBody>
-          <a:bodyPr wrap="square" lIns="0" tIns="0" rIns="0" bIns="0" anchor="ctr">
-            <a:spAutoFit/>
-          </a:bodyPr>
-          <a:lstStyle/>
-          <a:p>
-            <a:pPr algn="ctr">
-              <a:spcAft>
-                <a:spcPts val="0"/>
-              </a:spcAft>
-            </a:pPr>
-            <a:r>
-              <a:rPr sz="1500" b="1" i="0">
-                <a:solidFill>
-                  <a:srgbClr val="E4002B"/>
-                </a:solidFill>
-                <a:latin typeface="Cambria"/>
-                <a:ea typeface="Malgun Gothic"/>
-                <a:cs typeface="Cambria"/>
-              </a:rPr>
-              <a:t>›</a:t>
-            </a:r>
-          </a:p>
-        </p:txBody>
-      </p:sp>
-      <p:sp>
-        <p:nvSpPr>
-          <p:cNvPr id="24" name="Rounded Rectangle 23"/>
-          <p:cNvSpPr/>
-          <p:nvPr/>
-        </p:nvSpPr>
-        <p:spPr>
-          <a:xfrm>
-            <a:off x="2328908" y="5001768"/>
-            <a:ext cx="1259060" cy="713232"/>
-          </a:xfrm>
-          <a:prstGeom prst="roundRect">
-            <a:avLst>
-              <a:gd name="adj" fmla="val 7000"/>
-            </a:avLst>
-          </a:prstGeom>
-          <a:solidFill>
-            <a:srgbClr val="23304F"/>
-          </a:solidFill>
-          <a:ln>
-            <a:noFill/>
-          </a:ln>
-          <a:effectLst/>
-        </p:spPr>
-        <p:style>
-          <a:lnRef idx="1">
-            <a:schemeClr val="accent1"/>
-          </a:lnRef>
-          <a:fillRef idx="3">
-            <a:schemeClr val="accent1"/>
-          </a:fillRef>
-          <a:effectRef idx="2">
-            <a:schemeClr val="accent1"/>
-          </a:effectRef>
-          <a:fontRef idx="minor">
-            <a:schemeClr val="lt1"/>
-          </a:fontRef>
-        </p:style>
-        <p:txBody>
-          <a:bodyPr rtlCol="0" anchor="ctr"/>
-          <a:lstStyle/>
-          <a:p>
-            <a:pPr algn="ctr"/>
-            <a:endParaRPr/>
-          </a:p>
-        </p:txBody>
-      </p:sp>
-      <p:sp>
-        <p:nvSpPr>
-          <p:cNvPr id="25" name="TextBox 24"/>
-          <p:cNvSpPr txBox="1"/>
-          <p:nvPr/>
-        </p:nvSpPr>
-        <p:spPr>
-          <a:xfrm>
-            <a:off x="2328908" y="5093207"/>
-            <a:ext cx="1259060" cy="310896"/>
-          </a:xfrm>
-          <a:prstGeom prst="rect">
-            <a:avLst/>
-          </a:prstGeom>
-          <a:noFill/>
-        </p:spPr>
-        <p:txBody>
-          <a:bodyPr wrap="square" lIns="73152" tIns="0" rIns="73152" bIns="0" anchor="t">
-            <a:spAutoFit/>
-          </a:bodyPr>
-          <a:lstStyle/>
-          <a:p>
-            <a:pPr algn="ctr">
-              <a:spcAft>
-                <a:spcPts val="0"/>
-              </a:spcAft>
-            </a:pPr>
-            <a:r>
-              <a:rPr sz="1200" b="1" i="0">
-                <a:solidFill>
-                  <a:srgbClr val="FFFFFF"/>
-                </a:solidFill>
-                <a:latin typeface="Malgun Gothic"/>
-                <a:ea typeface="Malgun Gothic"/>
-                <a:cs typeface="Malgun Gothic"/>
-              </a:rPr>
-              <a:t>2. 검색</a:t>
-            </a:r>
-          </a:p>
-        </p:txBody>
-      </p:sp>
-      <p:sp>
-        <p:nvSpPr>
-          <p:cNvPr id="26" name="TextBox 25"/>
-          <p:cNvSpPr txBox="1"/>
-          <p:nvPr/>
-        </p:nvSpPr>
-        <p:spPr>
-          <a:xfrm>
-            <a:off x="2328908" y="5385816"/>
-            <a:ext cx="1259060" cy="274320"/>
-          </a:xfrm>
-          <a:prstGeom prst="rect">
-            <a:avLst/>
-          </a:prstGeom>
-          <a:noFill/>
-        </p:spPr>
-        <p:txBody>
-          <a:bodyPr wrap="square" lIns="73152" tIns="0" rIns="73152" bIns="0" anchor="t">
-            <a:spAutoFit/>
-          </a:bodyPr>
-          <a:lstStyle/>
-          <a:p>
-            <a:pPr algn="ctr">
-              <a:spcAft>
-                <a:spcPts val="0"/>
-              </a:spcAft>
-            </a:pPr>
-            <a:r>
-              <a:rPr sz="1000" b="1" i="0">
-                <a:solidFill>
-                  <a:srgbClr val="CADCFC"/>
-                </a:solidFill>
-                <a:latin typeface="Calibri"/>
-                <a:ea typeface="Malgun Gothic"/>
-                <a:cs typeface="Calibri"/>
-              </a:rPr>
-              <a:t>/search</a:t>
-            </a:r>
-          </a:p>
-        </p:txBody>
-      </p:sp>
-      <p:sp>
-        <p:nvSpPr>
-          <p:cNvPr id="27" name="TextBox 26"/>
-          <p:cNvSpPr txBox="1"/>
-          <p:nvPr/>
-        </p:nvSpPr>
-        <p:spPr>
-          <a:xfrm>
-            <a:off x="3587968" y="5001768"/>
-            <a:ext cx="384048" cy="713232"/>
-          </a:xfrm>
-          <a:prstGeom prst="rect">
-            <a:avLst/>
-          </a:prstGeom>
-          <a:noFill/>
-        </p:spPr>
-        <p:txBody>
-          <a:bodyPr wrap="square" lIns="0" tIns="0" rIns="0" bIns="0" anchor="ctr">
-            <a:spAutoFit/>
-          </a:bodyPr>
-          <a:lstStyle/>
-          <a:p>
-            <a:pPr algn="ctr">
-              <a:spcAft>
-                <a:spcPts val="0"/>
-              </a:spcAft>
-            </a:pPr>
-            <a:r>
-              <a:rPr sz="1500" b="1" i="0">
-                <a:solidFill>
-                  <a:srgbClr val="E4002B"/>
-                </a:solidFill>
-                <a:latin typeface="Cambria"/>
-                <a:ea typeface="Malgun Gothic"/>
-                <a:cs typeface="Cambria"/>
-              </a:rPr>
-              <a:t>›</a:t>
-            </a:r>
-          </a:p>
-        </p:txBody>
-      </p:sp>
-      <p:sp>
-        <p:nvSpPr>
-          <p:cNvPr id="28" name="Rounded Rectangle 27"/>
-          <p:cNvSpPr/>
-          <p:nvPr/>
-        </p:nvSpPr>
-        <p:spPr>
-          <a:xfrm>
-            <a:off x="3972016" y="5001768"/>
-            <a:ext cx="1259060" cy="713232"/>
-          </a:xfrm>
-          <a:prstGeom prst="roundRect">
-            <a:avLst>
-              <a:gd name="adj" fmla="val 7000"/>
-            </a:avLst>
-          </a:prstGeom>
-          <a:solidFill>
-            <a:srgbClr val="23304F"/>
-          </a:solidFill>
-          <a:ln>
-            <a:noFill/>
-          </a:ln>
-          <a:effectLst/>
-        </p:spPr>
-        <p:style>
-          <a:lnRef idx="1">
-            <a:schemeClr val="accent1"/>
-          </a:lnRef>
-          <a:fillRef idx="3">
-            <a:schemeClr val="accent1"/>
-          </a:fillRef>
-          <a:effectRef idx="2">
-            <a:schemeClr val="accent1"/>
-          </a:effectRef>
-          <a:fontRef idx="minor">
-            <a:schemeClr val="lt1"/>
-          </a:fontRef>
-        </p:style>
-        <p:txBody>
-          <a:bodyPr rtlCol="0" anchor="ctr"/>
-          <a:lstStyle/>
-          <a:p>
-            <a:pPr algn="ctr"/>
-            <a:endParaRPr/>
-          </a:p>
-        </p:txBody>
-      </p:sp>
-      <p:sp>
-        <p:nvSpPr>
-          <p:cNvPr id="29" name="TextBox 28"/>
-          <p:cNvSpPr txBox="1"/>
-          <p:nvPr/>
-        </p:nvSpPr>
-        <p:spPr>
-          <a:xfrm>
-            <a:off x="3972016" y="5093207"/>
-            <a:ext cx="1259060" cy="310896"/>
-          </a:xfrm>
-          <a:prstGeom prst="rect">
-            <a:avLst/>
-          </a:prstGeom>
-          <a:noFill/>
-        </p:spPr>
-        <p:txBody>
-          <a:bodyPr wrap="square" lIns="73152" tIns="0" rIns="73152" bIns="0" anchor="t">
-            <a:spAutoFit/>
-          </a:bodyPr>
-          <a:lstStyle/>
-          <a:p>
-            <a:pPr algn="ctr">
-              <a:spcAft>
-                <a:spcPts val="0"/>
-              </a:spcAft>
-            </a:pPr>
-            <a:r>
-              <a:rPr sz="1200" b="1" i="0">
-                <a:solidFill>
-                  <a:srgbClr val="FFFFFF"/>
-                </a:solidFill>
-                <a:latin typeface="Malgun Gothic"/>
-                <a:ea typeface="Malgun Gothic"/>
-                <a:cs typeface="Malgun Gothic"/>
-              </a:rPr>
-              <a:t>3. 리랭킹</a:t>
-            </a:r>
-          </a:p>
-        </p:txBody>
-      </p:sp>
-      <p:sp>
-        <p:nvSpPr>
-          <p:cNvPr id="30" name="TextBox 29"/>
-          <p:cNvSpPr txBox="1"/>
-          <p:nvPr/>
-        </p:nvSpPr>
-        <p:spPr>
-          <a:xfrm>
-            <a:off x="3972016" y="5385816"/>
-            <a:ext cx="1259060" cy="274320"/>
-          </a:xfrm>
-          <a:prstGeom prst="rect">
-            <a:avLst/>
-          </a:prstGeom>
-          <a:noFill/>
-        </p:spPr>
-        <p:txBody>
-          <a:bodyPr wrap="square" lIns="73152" tIns="0" rIns="73152" bIns="0" anchor="t">
-            <a:spAutoFit/>
-          </a:bodyPr>
-          <a:lstStyle/>
-          <a:p>
-            <a:pPr algn="ctr">
-              <a:spcAft>
-                <a:spcPts val="0"/>
-              </a:spcAft>
-            </a:pPr>
-            <a:r>
-              <a:rPr sz="1000" b="1" i="0">
-                <a:solidFill>
-                  <a:srgbClr val="CADCFC"/>
-                </a:solidFill>
-                <a:latin typeface="Calibri"/>
-                <a:ea typeface="Malgun Gothic"/>
-                <a:cs typeface="Calibri"/>
-              </a:rPr>
-              <a:t>/rerank</a:t>
-            </a:r>
-          </a:p>
-        </p:txBody>
-      </p:sp>
-      <p:sp>
-        <p:nvSpPr>
-          <p:cNvPr id="31" name="TextBox 30"/>
-          <p:cNvSpPr txBox="1"/>
-          <p:nvPr/>
-        </p:nvSpPr>
-        <p:spPr>
-          <a:xfrm>
-            <a:off x="5231076" y="5001768"/>
-            <a:ext cx="384048" cy="713232"/>
-          </a:xfrm>
-          <a:prstGeom prst="rect">
-            <a:avLst/>
-          </a:prstGeom>
-          <a:noFill/>
-        </p:spPr>
-        <p:txBody>
-          <a:bodyPr wrap="square" lIns="0" tIns="0" rIns="0" bIns="0" anchor="ctr">
-            <a:spAutoFit/>
-          </a:bodyPr>
-          <a:lstStyle/>
-          <a:p>
-            <a:pPr algn="ctr">
-              <a:spcAft>
-                <a:spcPts val="0"/>
-              </a:spcAft>
-            </a:pPr>
-            <a:r>
-              <a:rPr sz="1500" b="1" i="0">
-                <a:solidFill>
-                  <a:srgbClr val="E4002B"/>
-                </a:solidFill>
-                <a:latin typeface="Cambria"/>
-                <a:ea typeface="Malgun Gothic"/>
-                <a:cs typeface="Cambria"/>
-              </a:rPr>
-              <a:t>›</a:t>
-            </a:r>
-          </a:p>
-        </p:txBody>
-      </p:sp>
-      <p:sp>
-        <p:nvSpPr>
-          <p:cNvPr id="32" name="Rounded Rectangle 31"/>
-          <p:cNvSpPr/>
-          <p:nvPr/>
-        </p:nvSpPr>
-        <p:spPr>
-          <a:xfrm>
-            <a:off x="5615124" y="5001768"/>
-            <a:ext cx="1259060" cy="713232"/>
-          </a:xfrm>
-          <a:prstGeom prst="roundRect">
-            <a:avLst>
-              <a:gd name="adj" fmla="val 7000"/>
-            </a:avLst>
-          </a:prstGeom>
-          <a:solidFill>
-            <a:srgbClr val="23304F"/>
-          </a:solidFill>
-          <a:ln>
-            <a:noFill/>
-          </a:ln>
-          <a:effectLst/>
-        </p:spPr>
-        <p:style>
-          <a:lnRef idx="1">
-            <a:schemeClr val="accent1"/>
-          </a:lnRef>
-          <a:fillRef idx="3">
-            <a:schemeClr val="accent1"/>
-          </a:fillRef>
-          <a:effectRef idx="2">
-            <a:schemeClr val="accent1"/>
-          </a:effectRef>
-          <a:fontRef idx="minor">
-            <a:schemeClr val="lt1"/>
-          </a:fontRef>
-        </p:style>
-        <p:txBody>
-          <a:bodyPr rtlCol="0" anchor="ctr"/>
-          <a:lstStyle/>
-          <a:p>
-            <a:pPr algn="ctr"/>
-            <a:endParaRPr/>
-          </a:p>
-        </p:txBody>
-      </p:sp>
-      <p:sp>
-        <p:nvSpPr>
-          <p:cNvPr id="33" name="TextBox 32"/>
-          <p:cNvSpPr txBox="1"/>
-          <p:nvPr/>
-        </p:nvSpPr>
-        <p:spPr>
-          <a:xfrm>
-            <a:off x="5615124" y="5093207"/>
-            <a:ext cx="1259060" cy="310896"/>
-          </a:xfrm>
-          <a:prstGeom prst="rect">
-            <a:avLst/>
-          </a:prstGeom>
-          <a:noFill/>
-        </p:spPr>
-        <p:txBody>
-          <a:bodyPr wrap="square" lIns="73152" tIns="0" rIns="73152" bIns="0" anchor="t">
-            <a:spAutoFit/>
-          </a:bodyPr>
-          <a:lstStyle/>
-          <a:p>
-            <a:pPr algn="ctr">
-              <a:spcAft>
-                <a:spcPts val="0"/>
-              </a:spcAft>
-            </a:pPr>
-            <a:r>
-              <a:rPr sz="1200" b="1" i="0">
-                <a:solidFill>
-                  <a:srgbClr val="FFFFFF"/>
-                </a:solidFill>
-                <a:latin typeface="Malgun Gothic"/>
-                <a:ea typeface="Malgun Gothic"/>
-                <a:cs typeface="Malgun Gothic"/>
-              </a:rPr>
-              <a:t>4. 생성</a:t>
-            </a:r>
-          </a:p>
-        </p:txBody>
-      </p:sp>
-      <p:sp>
-        <p:nvSpPr>
-          <p:cNvPr id="34" name="TextBox 33"/>
-          <p:cNvSpPr txBox="1"/>
-          <p:nvPr/>
-        </p:nvSpPr>
-        <p:spPr>
-          <a:xfrm>
-            <a:off x="5615124" y="5385816"/>
-            <a:ext cx="1259060" cy="274320"/>
-          </a:xfrm>
-          <a:prstGeom prst="rect">
-            <a:avLst/>
-          </a:prstGeom>
-          <a:noFill/>
-        </p:spPr>
-        <p:txBody>
-          <a:bodyPr wrap="square" lIns="73152" tIns="0" rIns="73152" bIns="0" anchor="t">
-            <a:spAutoFit/>
-          </a:bodyPr>
-          <a:lstStyle/>
-          <a:p>
-            <a:pPr algn="ctr">
-              <a:spcAft>
-                <a:spcPts val="0"/>
-              </a:spcAft>
-            </a:pPr>
-            <a:r>
-              <a:rPr sz="1000" b="1" i="0">
-                <a:solidFill>
-                  <a:srgbClr val="CADCFC"/>
-                </a:solidFill>
-                <a:latin typeface="Calibri"/>
-                <a:ea typeface="Malgun Gothic"/>
-                <a:cs typeface="Calibri"/>
-              </a:rPr>
-              <a:t>/generate</a:t>
-            </a:r>
-          </a:p>
-        </p:txBody>
-      </p:sp>
-      <p:sp>
-        <p:nvSpPr>
-          <p:cNvPr id="35" name="Rounded Rectangle 34"/>
-          <p:cNvSpPr/>
-          <p:nvPr/>
-        </p:nvSpPr>
-        <p:spPr>
-          <a:xfrm>
-            <a:off x="457200" y="6245352"/>
-            <a:ext cx="3167344" cy="2971800"/>
-          </a:xfrm>
-          <a:prstGeom prst="roundRect">
-            <a:avLst>
-              <a:gd name="adj" fmla="val 4500"/>
+              <a:gd name="adj" fmla="val 5000"/>
             </a:avLst>
           </a:prstGeom>
           <a:solidFill>
@@ -6141,14 +6959,69 @@
       </p:sp>
       <p:sp>
         <p:nvSpPr>
-          <p:cNvPr id="36" name="TextBox 35"/>
+          <p:cNvPr id="21" name="Oval 20"/>
+          <p:cNvSpPr/>
+          <p:nvPr/>
+        </p:nvSpPr>
+        <p:spPr>
+          <a:xfrm>
+            <a:off x="640080" y="4535424"/>
+            <a:ext cx="365760" cy="365760"/>
+          </a:xfrm>
+          <a:prstGeom prst="ellipse">
+            <a:avLst/>
+          </a:prstGeom>
+          <a:solidFill>
+            <a:srgbClr val="E4002B"/>
+          </a:solidFill>
+          <a:ln>
+            <a:noFill/>
+          </a:ln>
+          <a:effectLst/>
+        </p:spPr>
+        <p:style>
+          <a:lnRef idx="1">
+            <a:schemeClr val="accent1"/>
+          </a:lnRef>
+          <a:fillRef idx="3">
+            <a:schemeClr val="accent1"/>
+          </a:fillRef>
+          <a:effectRef idx="2">
+            <a:schemeClr val="accent1"/>
+          </a:effectRef>
+          <a:fontRef idx="minor">
+            <a:schemeClr val="lt1"/>
+          </a:fontRef>
+        </p:style>
+        <p:txBody>
+          <a:bodyPr wrap="none" lIns="0" tIns="0" rIns="0" bIns="0" rtlCol="0" anchor="ctr"/>
+          <a:lstStyle/>
+          <a:p>
+            <a:pPr algn="ctr"/>
+            <a:r>
+              <a:rPr sz="1500" b="1" i="0">
+                <a:solidFill>
+                  <a:srgbClr val="FFFFFF"/>
+                </a:solidFill>
+                <a:latin typeface="Cambria"/>
+                <a:ea typeface="Malgun Gothic"/>
+                <a:cs typeface="Cambria"/>
+              </a:rPr>
+              <a:t>1</a:t>
+            </a:r>
+          </a:p>
+        </p:txBody>
+      </p:sp>
+      <p:sp>
+        <p:nvSpPr>
+          <p:cNvPr id="22" name="TextBox 21"/>
           <p:cNvSpPr txBox="1"/>
           <p:nvPr/>
         </p:nvSpPr>
         <p:spPr>
           <a:xfrm>
-            <a:off x="658368" y="6409944"/>
-            <a:ext cx="2765008" cy="274320"/>
+            <a:off x="1143000" y="4434840"/>
+            <a:ext cx="2103120" cy="292608"/>
           </a:xfrm>
           <a:prstGeom prst="rect">
             <a:avLst/>
@@ -6167,50 +7040,117 @@
               </a:spcAft>
             </a:pPr>
             <a:r>
-              <a:rPr sz="1100" b="1" i="0" spc="40">
-                <a:solidFill>
-                  <a:srgbClr val="E4002B"/>
-                </a:solidFill>
-                <a:latin typeface="Calibri"/>
-                <a:ea typeface="Malgun Gothic"/>
-                <a:cs typeface="Calibri"/>
-              </a:rPr>
-              <a:t>AI INFRA</a:t>
-            </a:r>
-          </a:p>
-          <a:p>
-            <a:pPr algn="l">
-              <a:spcBef>
-                <a:spcPts val="200"/>
-              </a:spcBef>
+              <a:rPr sz="1300" b="1" i="0">
+                <a:solidFill>
+                  <a:srgbClr val="181F2B"/>
+                </a:solidFill>
+                <a:latin typeface="Malgun Gothic"/>
+                <a:ea typeface="Malgun Gothic"/>
+                <a:cs typeface="Malgun Gothic"/>
+              </a:rPr>
+              <a:t>LLM 정제</a:t>
+            </a:r>
+          </a:p>
+        </p:txBody>
+      </p:sp>
+      <p:sp>
+        <p:nvSpPr>
+          <p:cNvPr id="23" name="Rounded Rectangle 22"/>
+          <p:cNvSpPr/>
+          <p:nvPr/>
+        </p:nvSpPr>
+        <p:spPr>
+          <a:xfrm>
+            <a:off x="1143000" y="4754879"/>
+            <a:ext cx="914400" cy="246888"/>
+          </a:xfrm>
+          <a:prstGeom prst="roundRect">
+            <a:avLst>
+              <a:gd name="adj" fmla="val 35000"/>
+            </a:avLst>
+          </a:prstGeom>
+          <a:solidFill>
+            <a:srgbClr val="0F1626"/>
+          </a:solidFill>
+          <a:ln>
+            <a:noFill/>
+          </a:ln>
+          <a:effectLst/>
+        </p:spPr>
+        <p:style>
+          <a:lnRef idx="1">
+            <a:schemeClr val="accent1"/>
+          </a:lnRef>
+          <a:fillRef idx="3">
+            <a:schemeClr val="accent1"/>
+          </a:fillRef>
+          <a:effectRef idx="2">
+            <a:schemeClr val="accent1"/>
+          </a:effectRef>
+          <a:fontRef idx="minor">
+            <a:schemeClr val="lt1"/>
+          </a:fontRef>
+        </p:style>
+        <p:txBody>
+          <a:bodyPr rtlCol="0" anchor="ctr"/>
+          <a:lstStyle/>
+          <a:p>
+            <a:pPr algn="ctr"/>
+            <a:endParaRPr/>
+          </a:p>
+        </p:txBody>
+      </p:sp>
+      <p:sp>
+        <p:nvSpPr>
+          <p:cNvPr id="24" name="TextBox 23"/>
+          <p:cNvSpPr txBox="1"/>
+          <p:nvPr/>
+        </p:nvSpPr>
+        <p:spPr>
+          <a:xfrm>
+            <a:off x="1143000" y="4754879"/>
+            <a:ext cx="914400" cy="246888"/>
+          </a:xfrm>
+          <a:prstGeom prst="rect">
+            <a:avLst/>
+          </a:prstGeom>
+          <a:noFill/>
+        </p:spPr>
+        <p:txBody>
+          <a:bodyPr wrap="square" lIns="0" tIns="0" rIns="0" bIns="0" anchor="ctr">
+            <a:spAutoFit/>
+          </a:bodyPr>
+          <a:lstStyle/>
+          <a:p>
+            <a:pPr algn="ctr">
               <a:spcAft>
                 <a:spcPts val="0"/>
               </a:spcAft>
             </a:pPr>
             <a:r>
-              <a:rPr sz="1350" b="1" i="0">
-                <a:solidFill>
-                  <a:srgbClr val="181F2B"/>
-                </a:solidFill>
-                <a:latin typeface="Malgun Gothic"/>
-                <a:ea typeface="Malgun Gothic"/>
-                <a:cs typeface="Malgun Gothic"/>
-              </a:rPr>
-              <a:t>vLLM 서빙</a:t>
-            </a:r>
-          </a:p>
-        </p:txBody>
-      </p:sp>
-      <p:sp>
-        <p:nvSpPr>
-          <p:cNvPr id="37" name="TextBox 36"/>
+              <a:rPr sz="950" b="1" i="0">
+                <a:solidFill>
+                  <a:srgbClr val="CADCFC"/>
+                </a:solidFill>
+                <a:latin typeface="Calibri"/>
+                <a:ea typeface="Malgun Gothic"/>
+                <a:cs typeface="Calibri"/>
+              </a:rPr>
+              <a:t>/rewrite</a:t>
+            </a:r>
+          </a:p>
+        </p:txBody>
+      </p:sp>
+      <p:sp>
+        <p:nvSpPr>
+          <p:cNvPr id="25" name="TextBox 24"/>
           <p:cNvSpPr txBox="1"/>
           <p:nvPr/>
         </p:nvSpPr>
         <p:spPr>
           <a:xfrm>
-            <a:off x="658368" y="7086600"/>
-            <a:ext cx="2765008" cy="548640"/>
+            <a:off x="2971800" y="4361688"/>
+            <a:ext cx="3993824" cy="713232"/>
           </a:xfrm>
           <a:prstGeom prst="rect">
             <a:avLst/>
@@ -6218,222 +7158,47 @@
           <a:noFill/>
         </p:spPr>
         <p:txBody>
-          <a:bodyPr wrap="square" lIns="73152" tIns="0" rIns="73152" bIns="0" anchor="t">
+          <a:bodyPr wrap="square" lIns="73152" tIns="0" rIns="73152" bIns="0" anchor="ctr">
             <a:spAutoFit/>
           </a:bodyPr>
           <a:lstStyle/>
           <a:p>
             <a:pPr algn="l">
-              <a:spcAft>
-                <a:spcPts val="100"/>
-              </a:spcAft>
-            </a:pPr>
-            <a:r>
-              <a:rPr sz="900" b="1" i="0">
-                <a:solidFill>
-                  <a:srgbClr val="E4002B"/>
-                </a:solidFill>
-                <a:latin typeface="Calibri"/>
-                <a:ea typeface="Malgun Gothic"/>
-                <a:cs typeface="Calibri"/>
-              </a:rPr>
-              <a:t>● </a:t>
-            </a:r>
-            <a:r>
-              <a:rPr sz="1150" b="1" i="0">
-                <a:solidFill>
-                  <a:srgbClr val="181F2B"/>
-                </a:solidFill>
-                <a:latin typeface="Calibri"/>
-                <a:ea typeface="Malgun Gothic"/>
-                <a:cs typeface="Calibri"/>
-              </a:rPr>
-              <a:t>LLM</a:t>
-            </a:r>
-          </a:p>
-          <a:p>
-            <a:pPr algn="l">
               <a:lnSpc>
-                <a:spcPct val="100000"/>
+                <a:spcPct val="105000"/>
               </a:lnSpc>
               <a:spcAft>
                 <a:spcPts val="0"/>
               </a:spcAft>
             </a:pPr>
             <a:r>
-              <a:rPr sz="1050" b="0" i="0">
+              <a:rPr sz="1150" b="0" i="0">
                 <a:solidFill>
                   <a:srgbClr val="66717E"/>
                 </a:solidFill>
-                <a:latin typeface="Calibri"/>
-                <a:ea typeface="Malgun Gothic"/>
-                <a:cs typeface="Calibri"/>
-              </a:rPr>
-              <a:t>   Qwen3.6-35B-A3B (AWQ 4-bit)</a:t>
-            </a:r>
-          </a:p>
-        </p:txBody>
-      </p:sp>
-      <p:sp>
-        <p:nvSpPr>
-          <p:cNvPr id="38" name="TextBox 37"/>
-          <p:cNvSpPr txBox="1"/>
-          <p:nvPr/>
-        </p:nvSpPr>
-        <p:spPr>
-          <a:xfrm>
-            <a:off x="658368" y="7690104"/>
-            <a:ext cx="2765008" cy="548640"/>
-          </a:xfrm>
-          <a:prstGeom prst="rect">
-            <a:avLst/>
-          </a:prstGeom>
-          <a:noFill/>
-        </p:spPr>
-        <p:txBody>
-          <a:bodyPr wrap="square" lIns="73152" tIns="0" rIns="73152" bIns="0" anchor="t">
-            <a:spAutoFit/>
-          </a:bodyPr>
-          <a:lstStyle/>
-          <a:p>
-            <a:pPr algn="l">
-              <a:spcAft>
-                <a:spcPts val="100"/>
-              </a:spcAft>
-            </a:pPr>
-            <a:r>
-              <a:rPr sz="900" b="1" i="0">
-                <a:solidFill>
-                  <a:srgbClr val="E4002B"/>
-                </a:solidFill>
-                <a:latin typeface="Calibri"/>
-                <a:ea typeface="Malgun Gothic"/>
-                <a:cs typeface="Calibri"/>
-              </a:rPr>
-              <a:t>● </a:t>
-            </a:r>
-            <a:r>
-              <a:rPr sz="1150" b="1" i="0">
-                <a:solidFill>
-                  <a:srgbClr val="181F2B"/>
-                </a:solidFill>
-                <a:latin typeface="Calibri"/>
-                <a:ea typeface="Malgun Gothic"/>
-                <a:cs typeface="Calibri"/>
-              </a:rPr>
-              <a:t>Embedding</a:t>
-            </a:r>
-          </a:p>
-          <a:p>
-            <a:pPr algn="l">
-              <a:lnSpc>
-                <a:spcPct val="100000"/>
-              </a:lnSpc>
-              <a:spcAft>
-                <a:spcPts val="0"/>
-              </a:spcAft>
-            </a:pPr>
-            <a:r>
-              <a:rPr sz="1050" b="0" i="0">
-                <a:solidFill>
-                  <a:srgbClr val="66717E"/>
-                </a:solidFill>
-                <a:latin typeface="Calibri"/>
-                <a:ea typeface="Malgun Gothic"/>
-                <a:cs typeface="Calibri"/>
-              </a:rPr>
-              <a:t>   Qwen3-Embedding-8B</a:t>
-            </a:r>
-          </a:p>
-        </p:txBody>
-      </p:sp>
-      <p:sp>
-        <p:nvSpPr>
-          <p:cNvPr id="39" name="TextBox 38"/>
-          <p:cNvSpPr txBox="1"/>
-          <p:nvPr/>
-        </p:nvSpPr>
-        <p:spPr>
-          <a:xfrm>
-            <a:off x="658368" y="8293608"/>
-            <a:ext cx="2765008" cy="548640"/>
-          </a:xfrm>
-          <a:prstGeom prst="rect">
-            <a:avLst/>
-          </a:prstGeom>
-          <a:noFill/>
-        </p:spPr>
-        <p:txBody>
-          <a:bodyPr wrap="square" lIns="73152" tIns="0" rIns="73152" bIns="0" anchor="t">
-            <a:spAutoFit/>
-          </a:bodyPr>
-          <a:lstStyle/>
-          <a:p>
-            <a:pPr algn="l">
-              <a:spcAft>
-                <a:spcPts val="100"/>
-              </a:spcAft>
-            </a:pPr>
-            <a:r>
-              <a:rPr sz="900" b="1" i="0">
-                <a:solidFill>
-                  <a:srgbClr val="E4002B"/>
-                </a:solidFill>
-                <a:latin typeface="Calibri"/>
-                <a:ea typeface="Malgun Gothic"/>
-                <a:cs typeface="Calibri"/>
-              </a:rPr>
-              <a:t>● </a:t>
-            </a:r>
-            <a:r>
-              <a:rPr sz="1150" b="1" i="0">
-                <a:solidFill>
-                  <a:srgbClr val="181F2B"/>
-                </a:solidFill>
-                <a:latin typeface="Calibri"/>
-                <a:ea typeface="Malgun Gothic"/>
-                <a:cs typeface="Calibri"/>
-              </a:rPr>
-              <a:t>Reranker</a:t>
-            </a:r>
-          </a:p>
-          <a:p>
-            <a:pPr algn="l">
-              <a:lnSpc>
-                <a:spcPct val="100000"/>
-              </a:lnSpc>
-              <a:spcAft>
-                <a:spcPts val="0"/>
-              </a:spcAft>
-            </a:pPr>
-            <a:r>
-              <a:rPr sz="1050" b="0" i="0">
-                <a:solidFill>
-                  <a:srgbClr val="66717E"/>
-                </a:solidFill>
-                <a:latin typeface="Calibri"/>
-                <a:ea typeface="Malgun Gothic"/>
-                <a:cs typeface="Calibri"/>
-              </a:rPr>
-              <a:t>   Qwen3-Reranker-4B</a:t>
-            </a:r>
-          </a:p>
-        </p:txBody>
-      </p:sp>
-      <p:sp>
-        <p:nvSpPr>
-          <p:cNvPr id="40" name="Rounded Rectangle 39"/>
+                <a:latin typeface="Malgun Gothic"/>
+                <a:ea typeface="Malgun Gothic"/>
+                <a:cs typeface="Malgun Gothic"/>
+              </a:rPr>
+              <a:t>모호한 입력을 명료한 영어 프롬프트로 재작성. 의도 보존.</a:t>
+            </a:r>
+          </a:p>
+        </p:txBody>
+      </p:sp>
+      <p:sp>
+        <p:nvSpPr>
+          <p:cNvPr id="26" name="Rounded Rectangle 25"/>
           <p:cNvSpPr/>
           <p:nvPr/>
         </p:nvSpPr>
         <p:spPr>
           <a:xfrm>
-            <a:off x="3935440" y="6245352"/>
-            <a:ext cx="3167344" cy="2971800"/>
+            <a:off x="457200" y="5111496"/>
+            <a:ext cx="6645584" cy="713232"/>
           </a:xfrm>
           <a:prstGeom prst="roundRect">
             <a:avLst>
-              <a:gd name="adj" fmla="val 4500"/>
+              <a:gd name="adj" fmla="val 5000"/>
             </a:avLst>
           </a:prstGeom>
           <a:solidFill>
@@ -6465,427 +7230,20 @@
           <a:lstStyle/>
           <a:p>
             <a:pPr algn="ctr"/>
-            <a:endParaRPr/>
-          </a:p>
-        </p:txBody>
-      </p:sp>
-      <p:sp>
-        <p:nvSpPr>
-          <p:cNvPr id="41" name="TextBox 40"/>
-          <p:cNvSpPr txBox="1"/>
-          <p:nvPr/>
-        </p:nvSpPr>
-        <p:spPr>
-          <a:xfrm>
-            <a:off x="4136608" y="6409944"/>
-            <a:ext cx="2765008" cy="274320"/>
-          </a:xfrm>
-          <a:prstGeom prst="rect">
-            <a:avLst/>
-          </a:prstGeom>
-          <a:noFill/>
-        </p:spPr>
-        <p:txBody>
-          <a:bodyPr wrap="square" lIns="73152" tIns="0" rIns="73152" bIns="0" anchor="t">
-            <a:spAutoFit/>
-          </a:bodyPr>
-          <a:lstStyle/>
-          <a:p>
-            <a:pPr algn="l">
-              <a:spcAft>
-                <a:spcPts val="0"/>
-              </a:spcAft>
-            </a:pPr>
-            <a:r>
-              <a:rPr sz="1100" b="1" i="0" spc="40">
-                <a:solidFill>
-                  <a:srgbClr val="E4002B"/>
-                </a:solidFill>
-                <a:latin typeface="Calibri"/>
-                <a:ea typeface="Malgun Gothic"/>
-                <a:cs typeface="Calibri"/>
-              </a:rPr>
-              <a:t>VECTOR DB</a:t>
-            </a:r>
-          </a:p>
-          <a:p>
-            <a:pPr algn="l">
-              <a:spcBef>
-                <a:spcPts val="200"/>
-              </a:spcBef>
-              <a:spcAft>
-                <a:spcPts val="0"/>
-              </a:spcAft>
-            </a:pPr>
-            <a:r>
-              <a:rPr sz="1350" b="1" i="0">
-                <a:solidFill>
-                  <a:srgbClr val="181F2B"/>
-                </a:solidFill>
-                <a:latin typeface="Calibri"/>
-                <a:ea typeface="Malgun Gothic"/>
-                <a:cs typeface="Calibri"/>
-              </a:rPr>
-              <a:t>Chroma</a:t>
-            </a:r>
-          </a:p>
-        </p:txBody>
-      </p:sp>
-      <p:sp>
-        <p:nvSpPr>
-          <p:cNvPr id="42" name="TextBox 41"/>
-          <p:cNvSpPr txBox="1"/>
-          <p:nvPr/>
-        </p:nvSpPr>
-        <p:spPr>
-          <a:xfrm>
-            <a:off x="4136608" y="7086600"/>
-            <a:ext cx="2765008" cy="548640"/>
-          </a:xfrm>
-          <a:prstGeom prst="rect">
-            <a:avLst/>
-          </a:prstGeom>
-          <a:noFill/>
-        </p:spPr>
-        <p:txBody>
-          <a:bodyPr wrap="square" lIns="73152" tIns="0" rIns="73152" bIns="0" anchor="t">
-            <a:spAutoFit/>
-          </a:bodyPr>
-          <a:lstStyle/>
-          <a:p>
-            <a:pPr algn="l">
-              <a:spcAft>
-                <a:spcPts val="100"/>
-              </a:spcAft>
-            </a:pPr>
-            <a:r>
-              <a:rPr sz="900" b="1" i="0">
-                <a:solidFill>
-                  <a:srgbClr val="E4002B"/>
-                </a:solidFill>
-                <a:latin typeface="Calibri"/>
-                <a:ea typeface="Malgun Gothic"/>
-                <a:cs typeface="Calibri"/>
-              </a:rPr>
-              <a:t>● </a:t>
-            </a:r>
-            <a:r>
-              <a:rPr sz="1150" b="1" i="0">
-                <a:solidFill>
-                  <a:srgbClr val="181F2B"/>
-                </a:solidFill>
-                <a:latin typeface="Malgun Gothic"/>
-                <a:ea typeface="Malgun Gothic"/>
-                <a:cs typeface="Malgun Gothic"/>
-              </a:rPr>
-              <a:t>템플릿</a:t>
-            </a:r>
-          </a:p>
-          <a:p>
-            <a:pPr algn="l">
-              <a:lnSpc>
-                <a:spcPct val="100000"/>
-              </a:lnSpc>
-              <a:spcAft>
-                <a:spcPts val="0"/>
-              </a:spcAft>
-            </a:pPr>
-            <a:r>
-              <a:rPr sz="1050" b="0" i="0">
-                <a:solidFill>
-                  <a:srgbClr val="66717E"/>
-                </a:solidFill>
-                <a:latin typeface="Malgun Gothic"/>
-                <a:ea typeface="Malgun Gothic"/>
-                <a:cs typeface="Malgun Gothic"/>
-              </a:rPr>
-              <a:t>   651개 고품질 프롬프트</a:t>
-            </a:r>
-          </a:p>
-        </p:txBody>
-      </p:sp>
-      <p:sp>
-        <p:nvSpPr>
-          <p:cNvPr id="43" name="TextBox 42"/>
-          <p:cNvSpPr txBox="1"/>
-          <p:nvPr/>
-        </p:nvSpPr>
-        <p:spPr>
-          <a:xfrm>
-            <a:off x="4136608" y="7690104"/>
-            <a:ext cx="2765008" cy="548640"/>
-          </a:xfrm>
-          <a:prstGeom prst="rect">
-            <a:avLst/>
-          </a:prstGeom>
-          <a:noFill/>
-        </p:spPr>
-        <p:txBody>
-          <a:bodyPr wrap="square" lIns="73152" tIns="0" rIns="73152" bIns="0" anchor="t">
-            <a:spAutoFit/>
-          </a:bodyPr>
-          <a:lstStyle/>
-          <a:p>
-            <a:pPr algn="l">
-              <a:spcAft>
-                <a:spcPts val="100"/>
-              </a:spcAft>
-            </a:pPr>
-            <a:r>
-              <a:rPr sz="900" b="1" i="0">
-                <a:solidFill>
-                  <a:srgbClr val="E4002B"/>
-                </a:solidFill>
-                <a:latin typeface="Calibri"/>
-                <a:ea typeface="Malgun Gothic"/>
-                <a:cs typeface="Calibri"/>
-              </a:rPr>
-              <a:t>● </a:t>
-            </a:r>
-            <a:r>
-              <a:rPr sz="1150" b="1" i="0">
-                <a:solidFill>
-                  <a:srgbClr val="181F2B"/>
-                </a:solidFill>
-                <a:latin typeface="Malgun Gothic"/>
-                <a:ea typeface="Malgun Gothic"/>
-                <a:cs typeface="Malgun Gothic"/>
-              </a:rPr>
-              <a:t>임베딩</a:t>
-            </a:r>
-          </a:p>
-          <a:p>
-            <a:pPr algn="l">
-              <a:lnSpc>
-                <a:spcPct val="100000"/>
-              </a:lnSpc>
-              <a:spcAft>
-                <a:spcPts val="0"/>
-              </a:spcAft>
-            </a:pPr>
-            <a:r>
-              <a:rPr sz="1050" b="0" i="0">
-                <a:solidFill>
-                  <a:srgbClr val="66717E"/>
-                </a:solidFill>
-                <a:latin typeface="Malgun Gothic"/>
-                <a:ea typeface="Malgun Gothic"/>
-                <a:cs typeface="Malgun Gothic"/>
-              </a:rPr>
-              <a:t>   4096차원 (Qwen3-8B)</a:t>
-            </a:r>
-          </a:p>
-        </p:txBody>
-      </p:sp>
-      <p:sp>
-        <p:nvSpPr>
-          <p:cNvPr id="44" name="TextBox 43"/>
-          <p:cNvSpPr txBox="1"/>
-          <p:nvPr/>
-        </p:nvSpPr>
-        <p:spPr>
-          <a:xfrm>
-            <a:off x="4136608" y="8293608"/>
-            <a:ext cx="2765008" cy="548640"/>
-          </a:xfrm>
-          <a:prstGeom prst="rect">
-            <a:avLst/>
-          </a:prstGeom>
-          <a:noFill/>
-        </p:spPr>
-        <p:txBody>
-          <a:bodyPr wrap="square" lIns="73152" tIns="0" rIns="73152" bIns="0" anchor="t">
-            <a:spAutoFit/>
-          </a:bodyPr>
-          <a:lstStyle/>
-          <a:p>
-            <a:pPr algn="l">
-              <a:spcAft>
-                <a:spcPts val="100"/>
-              </a:spcAft>
-            </a:pPr>
-            <a:r>
-              <a:rPr sz="900" b="1" i="0">
-                <a:solidFill>
-                  <a:srgbClr val="E4002B"/>
-                </a:solidFill>
-                <a:latin typeface="Calibri"/>
-                <a:ea typeface="Malgun Gothic"/>
-                <a:cs typeface="Calibri"/>
-              </a:rPr>
-              <a:t>● </a:t>
-            </a:r>
-            <a:r>
-              <a:rPr sz="1150" b="1" i="0">
-                <a:solidFill>
-                  <a:srgbClr val="181F2B"/>
-                </a:solidFill>
-                <a:latin typeface="Malgun Gothic"/>
-                <a:ea typeface="Malgun Gothic"/>
-                <a:cs typeface="Malgun Gothic"/>
-              </a:rPr>
-              <a:t>검색</a:t>
-            </a:r>
-          </a:p>
-          <a:p>
-            <a:pPr algn="l">
-              <a:lnSpc>
-                <a:spcPct val="100000"/>
-              </a:lnSpc>
-              <a:spcAft>
-                <a:spcPts val="0"/>
-              </a:spcAft>
-            </a:pPr>
-            <a:r>
-              <a:rPr sz="1050" b="0" i="0">
-                <a:solidFill>
-                  <a:srgbClr val="66717E"/>
-                </a:solidFill>
-                <a:latin typeface="Calibri"/>
-                <a:ea typeface="Malgun Gothic"/>
-                <a:cs typeface="Calibri"/>
-              </a:rPr>
-              <a:t>   Top-20 → Reranker → Top-3</a:t>
-            </a:r>
-          </a:p>
-        </p:txBody>
-      </p:sp>
-      <p:sp>
-        <p:nvSpPr>
-          <p:cNvPr id="45" name="TextBox 44"/>
-          <p:cNvSpPr txBox="1"/>
-          <p:nvPr/>
-        </p:nvSpPr>
-        <p:spPr>
-          <a:xfrm>
-            <a:off x="457200" y="10271363"/>
-            <a:ext cx="6096944" cy="274320"/>
-          </a:xfrm>
-          <a:prstGeom prst="rect">
-            <a:avLst/>
-          </a:prstGeom>
-          <a:noFill/>
-        </p:spPr>
-        <p:txBody>
-          <a:bodyPr wrap="square" lIns="73152" tIns="0" rIns="73152" bIns="0" anchor="ctr">
-            <a:spAutoFit/>
-          </a:bodyPr>
-          <a:lstStyle/>
-          <a:p>
-            <a:pPr algn="l">
-              <a:spcAft>
-                <a:spcPts val="0"/>
-              </a:spcAft>
-            </a:pPr>
-            <a:r>
-              <a:rPr sz="850" b="1" i="0">
-                <a:solidFill>
-                  <a:srgbClr val="181F2B"/>
-                </a:solidFill>
-                <a:latin typeface="Cambria"/>
-                <a:ea typeface="Malgun Gothic"/>
-                <a:cs typeface="Cambria"/>
-              </a:rPr>
-              <a:t>Copilot Meta-Prompting</a:t>
-            </a:r>
-            <a:r>
-              <a:rPr sz="850" b="0" i="0">
-                <a:solidFill>
-                  <a:srgbClr val="9AA4AE"/>
-                </a:solidFill>
-                <a:latin typeface="Malgun Gothic"/>
-                <a:ea typeface="Malgun Gothic"/>
-                <a:cs typeface="Malgun Gothic"/>
-              </a:rPr>
-              <a:t>    ·    SW Bootcamp 13기 C반 4팀    ·    github.com/swbteng/copilot-meta-prompting</a:t>
-            </a:r>
-          </a:p>
-        </p:txBody>
-      </p:sp>
-      <p:sp>
-        <p:nvSpPr>
-          <p:cNvPr id="46" name="TextBox 45"/>
-          <p:cNvSpPr txBox="1"/>
-          <p:nvPr/>
-        </p:nvSpPr>
-        <p:spPr>
-          <a:xfrm>
-            <a:off x="6371264" y="10271363"/>
-            <a:ext cx="731520" cy="274320"/>
-          </a:xfrm>
-          <a:prstGeom prst="rect">
-            <a:avLst/>
-          </a:prstGeom>
-          <a:noFill/>
-        </p:spPr>
-        <p:txBody>
-          <a:bodyPr wrap="square" lIns="73152" tIns="0" rIns="0" bIns="0" anchor="ctr">
-            <a:spAutoFit/>
-          </a:bodyPr>
-          <a:lstStyle/>
-          <a:p>
-            <a:pPr algn="r">
-              <a:spcAft>
-                <a:spcPts val="0"/>
-              </a:spcAft>
-            </a:pPr>
-            <a:r>
-              <a:rPr sz="850" b="1" i="0">
-                <a:solidFill>
-                  <a:srgbClr val="9AA4AE"/>
-                </a:solidFill>
-                <a:latin typeface="Cambria"/>
-                <a:ea typeface="Malgun Gothic"/>
-                <a:cs typeface="Cambria"/>
-              </a:rPr>
-              <a:t>2 / 4</a:t>
-            </a:r>
-          </a:p>
-        </p:txBody>
-      </p:sp>
-    </p:spTree>
-  </p:cSld>
-  <p:clrMapOvr>
-    <a:masterClrMapping/>
-  </p:clrMapOvr>
-</p:sld>
-</file>
-
-<file path=ppt/slides/slide3.xml><?xml version="1.0" encoding="utf-8"?>
-<p:sld xmlns:a="http://schemas.openxmlformats.org/drawingml/2006/main" xmlns:r="http://schemas.openxmlformats.org/officeDocument/2006/relationships" xmlns:p="http://schemas.openxmlformats.org/presentationml/2006/main">
-  <p:cSld>
-    <p:bg>
-      <p:bgPr>
-        <a:solidFill>
-          <a:srgbClr val="FFFFFF"/>
-        </a:solidFill>
-        <a:effectLst/>
-      </p:bgPr>
-    </p:bg>
-    <p:spTree>
-      <p:nvGrpSpPr>
-        <p:cNvPr id="1" name=""/>
-        <p:cNvGrpSpPr/>
-        <p:nvPr/>
-      </p:nvGrpSpPr>
-      <p:grpSpPr>
-        <a:xfrm>
-          <a:off x="0" y="0"/>
-          <a:ext cx="0" cy="0"/>
-          <a:chOff x="0" y="0"/>
-          <a:chExt cx="0" cy="0"/>
-        </a:xfrm>
-      </p:grpSpPr>
-      <p:sp>
-        <p:nvSpPr>
-          <p:cNvPr id="2" name="Oval 1"/>
+            <a:endParaRPr dirty="0"/>
+          </a:p>
+        </p:txBody>
+      </p:sp>
+      <p:sp>
+        <p:nvSpPr>
+          <p:cNvPr id="27" name="Oval 26"/>
           <p:cNvSpPr/>
           <p:nvPr/>
         </p:nvSpPr>
         <p:spPr>
           <a:xfrm>
-            <a:off x="457200" y="566928"/>
-            <a:ext cx="420624" cy="420624"/>
+            <a:off x="640080" y="5285232"/>
+            <a:ext cx="365760" cy="365760"/>
           </a:xfrm>
           <a:prstGeom prst="ellipse">
             <a:avLst/>
@@ -6918,7 +7276,7 @@
           <a:p>
             <a:pPr algn="ctr"/>
             <a:r>
-              <a:rPr sz="1600" b="1" i="0">
+              <a:rPr sz="1500" b="1" i="0">
                 <a:solidFill>
                   <a:srgbClr val="FFFFFF"/>
                 </a:solidFill>
@@ -6926,21 +7284,21 @@
                 <a:ea typeface="Malgun Gothic"/>
                 <a:cs typeface="Cambria"/>
               </a:rPr>
-              <a:t>03</a:t>
-            </a:r>
-          </a:p>
-        </p:txBody>
-      </p:sp>
-      <p:sp>
-        <p:nvSpPr>
-          <p:cNvPr id="3" name="TextBox 2"/>
+              <a:t>2</a:t>
+            </a:r>
+          </a:p>
+        </p:txBody>
+      </p:sp>
+      <p:sp>
+        <p:nvSpPr>
+          <p:cNvPr id="28" name="TextBox 27"/>
           <p:cNvSpPr txBox="1"/>
           <p:nvPr/>
         </p:nvSpPr>
         <p:spPr>
           <a:xfrm>
-            <a:off x="1005840" y="530352"/>
-            <a:ext cx="6042080" cy="256032"/>
+            <a:off x="1143000" y="5184648"/>
+            <a:ext cx="2103120" cy="292608"/>
           </a:xfrm>
           <a:prstGeom prst="rect">
             <a:avLst/>
@@ -6959,29 +7317,76 @@
               </a:spcAft>
             </a:pPr>
             <a:r>
-              <a:rPr sz="1100" b="1" i="0" spc="60">
-                <a:solidFill>
-                  <a:srgbClr val="E4002B"/>
-                </a:solidFill>
-                <a:latin typeface="Malgun Gothic"/>
-                <a:ea typeface="Malgun Gothic"/>
-                <a:cs typeface="Malgun Gothic"/>
-              </a:rPr>
-              <a:t>파이프라인</a:t>
-            </a:r>
-          </a:p>
-        </p:txBody>
-      </p:sp>
-      <p:sp>
-        <p:nvSpPr>
-          <p:cNvPr id="4" name="TextBox 3"/>
+              <a:rPr sz="1300" b="1" i="0">
+                <a:solidFill>
+                  <a:srgbClr val="181F2B"/>
+                </a:solidFill>
+                <a:latin typeface="Malgun Gothic"/>
+                <a:ea typeface="Malgun Gothic"/>
+                <a:cs typeface="Malgun Gothic"/>
+              </a:rPr>
+              <a:t>벡터 검색</a:t>
+            </a:r>
+          </a:p>
+        </p:txBody>
+      </p:sp>
+      <p:sp>
+        <p:nvSpPr>
+          <p:cNvPr id="29" name="Rounded Rectangle 28"/>
+          <p:cNvSpPr/>
+          <p:nvPr/>
+        </p:nvSpPr>
+        <p:spPr>
+          <a:xfrm>
+            <a:off x="1143000" y="5504688"/>
+            <a:ext cx="914400" cy="246888"/>
+          </a:xfrm>
+          <a:prstGeom prst="roundRect">
+            <a:avLst>
+              <a:gd name="adj" fmla="val 35000"/>
+            </a:avLst>
+          </a:prstGeom>
+          <a:solidFill>
+            <a:srgbClr val="0F1626"/>
+          </a:solidFill>
+          <a:ln>
+            <a:noFill/>
+          </a:ln>
+          <a:effectLst/>
+        </p:spPr>
+        <p:style>
+          <a:lnRef idx="1">
+            <a:schemeClr val="accent1"/>
+          </a:lnRef>
+          <a:fillRef idx="3">
+            <a:schemeClr val="accent1"/>
+          </a:fillRef>
+          <a:effectRef idx="2">
+            <a:schemeClr val="accent1"/>
+          </a:effectRef>
+          <a:fontRef idx="minor">
+            <a:schemeClr val="lt1"/>
+          </a:fontRef>
+        </p:style>
+        <p:txBody>
+          <a:bodyPr rtlCol="0" anchor="ctr"/>
+          <a:lstStyle/>
+          <a:p>
+            <a:pPr algn="ctr"/>
+            <a:endParaRPr/>
+          </a:p>
+        </p:txBody>
+      </p:sp>
+      <p:sp>
+        <p:nvSpPr>
+          <p:cNvPr id="30" name="TextBox 29"/>
           <p:cNvSpPr txBox="1"/>
           <p:nvPr/>
         </p:nvSpPr>
         <p:spPr>
           <a:xfrm>
-            <a:off x="1005840" y="713232"/>
-            <a:ext cx="6042080" cy="365760"/>
+            <a:off x="1143000" y="5504688"/>
+            <a:ext cx="914400" cy="246888"/>
           </a:xfrm>
           <a:prstGeom prst="rect">
             <a:avLst/>
@@ -6989,40 +7394,257 @@
           <a:noFill/>
         </p:spPr>
         <p:txBody>
-          <a:bodyPr wrap="square" lIns="73152" tIns="0" rIns="73152" bIns="0" anchor="t">
+          <a:bodyPr wrap="square" lIns="0" tIns="0" rIns="0" bIns="0" anchor="ctr">
             <a:spAutoFit/>
           </a:bodyPr>
           <a:lstStyle/>
           <a:p>
-            <a:pPr algn="l">
+            <a:pPr algn="ctr">
               <a:spcAft>
                 <a:spcPts val="0"/>
               </a:spcAft>
             </a:pPr>
             <a:r>
-              <a:rPr sz="2100" b="1" i="0">
-                <a:solidFill>
-                  <a:srgbClr val="181F2B"/>
-                </a:solidFill>
-                <a:latin typeface="Malgun Gothic"/>
-                <a:ea typeface="Malgun Gothic"/>
-                <a:cs typeface="Malgun Gothic"/>
-              </a:rPr>
-              <a:t>정제는 어떻게 일어나는가 — 4단계</a:t>
-            </a:r>
-          </a:p>
-        </p:txBody>
-      </p:sp>
-      <p:sp>
-        <p:nvSpPr>
-          <p:cNvPr id="5" name="Rounded Rectangle 4"/>
+              <a:rPr sz="950" b="1" i="0">
+                <a:solidFill>
+                  <a:srgbClr val="CADCFC"/>
+                </a:solidFill>
+                <a:latin typeface="Calibri"/>
+                <a:ea typeface="Malgun Gothic"/>
+                <a:cs typeface="Calibri"/>
+              </a:rPr>
+              <a:t>/search</a:t>
+            </a:r>
+          </a:p>
+        </p:txBody>
+      </p:sp>
+      <p:sp>
+        <p:nvSpPr>
+          <p:cNvPr id="31" name="TextBox 30"/>
+          <p:cNvSpPr txBox="1"/>
+          <p:nvPr/>
+        </p:nvSpPr>
+        <p:spPr>
+          <a:xfrm>
+            <a:off x="2971800" y="5289409"/>
+            <a:ext cx="3993824" cy="357406"/>
+          </a:xfrm>
+          <a:prstGeom prst="rect">
+            <a:avLst/>
+          </a:prstGeom>
+          <a:noFill/>
+        </p:spPr>
+        <p:txBody>
+          <a:bodyPr wrap="square" lIns="73152" tIns="0" rIns="73152" bIns="0" anchor="ctr">
+            <a:spAutoFit/>
+          </a:bodyPr>
+          <a:lstStyle/>
+          <a:p>
+            <a:pPr algn="l">
+              <a:lnSpc>
+                <a:spcPct val="105000"/>
+              </a:lnSpc>
+              <a:spcAft>
+                <a:spcPts val="0"/>
+              </a:spcAft>
+            </a:pPr>
+            <a:r>
+              <a:rPr lang="ko-KR" altLang="en-US" sz="1150" dirty="0">
+                <a:solidFill>
+                  <a:srgbClr val="66717E"/>
+                </a:solidFill>
+                <a:latin typeface="Malgun Gothic"/>
+                <a:ea typeface="Malgun Gothic"/>
+                <a:cs typeface="Malgun Gothic"/>
+              </a:rPr>
+              <a:t>검증된 프롬프트 템플릿을 </a:t>
+            </a:r>
+            <a:r>
+              <a:rPr lang="ko-KR" altLang="en-US" sz="1150" dirty="0" err="1">
+                <a:solidFill>
+                  <a:srgbClr val="66717E"/>
+                </a:solidFill>
+                <a:latin typeface="Malgun Gothic"/>
+                <a:ea typeface="Malgun Gothic"/>
+                <a:cs typeface="Malgun Gothic"/>
+              </a:rPr>
+              <a:t>임베딩화하여</a:t>
+            </a:r>
+            <a:r>
+              <a:rPr lang="ko-KR" altLang="en-US" sz="1150" dirty="0">
+                <a:solidFill>
+                  <a:srgbClr val="66717E"/>
+                </a:solidFill>
+                <a:latin typeface="Malgun Gothic"/>
+                <a:ea typeface="Malgun Gothic"/>
+                <a:cs typeface="Malgun Gothic"/>
+              </a:rPr>
+              <a:t> 벡터</a:t>
+            </a:r>
+            <a:r>
+              <a:rPr lang="en-US" altLang="ko-KR" sz="1150" dirty="0">
+                <a:solidFill>
+                  <a:srgbClr val="66717E"/>
+                </a:solidFill>
+                <a:latin typeface="Malgun Gothic"/>
+                <a:ea typeface="Malgun Gothic"/>
+                <a:cs typeface="Malgun Gothic"/>
+              </a:rPr>
+              <a:t>DB </a:t>
+            </a:r>
+            <a:r>
+              <a:rPr lang="ko-KR" altLang="en-US" sz="1150" dirty="0">
+                <a:solidFill>
+                  <a:srgbClr val="66717E"/>
+                </a:solidFill>
+                <a:latin typeface="Malgun Gothic"/>
+                <a:ea typeface="Malgun Gothic"/>
+                <a:cs typeface="Malgun Gothic"/>
+              </a:rPr>
+              <a:t>구성</a:t>
+            </a:r>
+            <a:r>
+              <a:rPr lang="en-US" altLang="ko-KR" sz="1150" dirty="0">
+                <a:solidFill>
+                  <a:srgbClr val="66717E"/>
+                </a:solidFill>
+                <a:latin typeface="Malgun Gothic"/>
+                <a:ea typeface="Malgun Gothic"/>
+                <a:cs typeface="Malgun Gothic"/>
+              </a:rPr>
+              <a:t> -&gt; </a:t>
+            </a:r>
+            <a:r>
+              <a:rPr lang="ko-KR" altLang="en-US" sz="1150" dirty="0">
+                <a:solidFill>
+                  <a:srgbClr val="66717E"/>
+                </a:solidFill>
+                <a:latin typeface="Malgun Gothic"/>
+                <a:ea typeface="Malgun Gothic"/>
+                <a:cs typeface="Malgun Gothic"/>
+              </a:rPr>
+              <a:t>유저 입력</a:t>
+            </a:r>
+            <a:r>
+              <a:rPr sz="1150" b="0" i="0" dirty="0">
+                <a:solidFill>
+                  <a:srgbClr val="66717E"/>
+                </a:solidFill>
+                <a:latin typeface="Malgun Gothic"/>
+                <a:ea typeface="Malgun Gothic"/>
+                <a:cs typeface="Malgun Gothic"/>
+              </a:rPr>
+              <a:t>을 </a:t>
+            </a:r>
+            <a:r>
+              <a:rPr sz="1150" b="0" i="0" dirty="0" err="1">
+                <a:solidFill>
+                  <a:srgbClr val="66717E"/>
+                </a:solidFill>
+                <a:latin typeface="Malgun Gothic"/>
+                <a:ea typeface="Malgun Gothic"/>
+                <a:cs typeface="Malgun Gothic"/>
+              </a:rPr>
+              <a:t>임베딩해</a:t>
+            </a:r>
+            <a:r>
+              <a:rPr sz="1150" b="0" i="0" dirty="0">
+                <a:solidFill>
+                  <a:srgbClr val="66717E"/>
+                </a:solidFill>
+                <a:latin typeface="Malgun Gothic"/>
+                <a:ea typeface="Malgun Gothic"/>
+                <a:cs typeface="Malgun Gothic"/>
+              </a:rPr>
+              <a:t> </a:t>
+            </a:r>
+            <a:r>
+              <a:rPr sz="1150" b="0" i="0" dirty="0" err="1">
+                <a:solidFill>
+                  <a:srgbClr val="66717E"/>
+                </a:solidFill>
+                <a:latin typeface="Malgun Gothic"/>
+                <a:ea typeface="Malgun Gothic"/>
+                <a:cs typeface="Malgun Gothic"/>
+              </a:rPr>
+              <a:t>코사인</a:t>
+            </a:r>
+            <a:r>
+              <a:rPr sz="1150" b="0" i="0" dirty="0">
+                <a:solidFill>
+                  <a:srgbClr val="66717E"/>
+                </a:solidFill>
+                <a:latin typeface="Malgun Gothic"/>
+                <a:ea typeface="Malgun Gothic"/>
+                <a:cs typeface="Malgun Gothic"/>
+              </a:rPr>
+              <a:t> </a:t>
+            </a:r>
+            <a:r>
+              <a:rPr sz="1150" b="0" i="0" dirty="0" err="1">
+                <a:solidFill>
+                  <a:srgbClr val="66717E"/>
+                </a:solidFill>
+                <a:latin typeface="Malgun Gothic"/>
+                <a:ea typeface="Malgun Gothic"/>
+                <a:cs typeface="Malgun Gothic"/>
+              </a:rPr>
+              <a:t>유사도</a:t>
+            </a:r>
+            <a:r>
+              <a:rPr sz="1150" b="0" i="0" dirty="0">
+                <a:solidFill>
+                  <a:srgbClr val="66717E"/>
+                </a:solidFill>
+                <a:latin typeface="Malgun Gothic"/>
+                <a:ea typeface="Malgun Gothic"/>
+                <a:cs typeface="Malgun Gothic"/>
+              </a:rPr>
+              <a:t> Top-20 </a:t>
+            </a:r>
+            <a:r>
+              <a:rPr sz="1150" b="0" i="0" dirty="0" err="1">
+                <a:solidFill>
+                  <a:srgbClr val="66717E"/>
+                </a:solidFill>
+                <a:latin typeface="Malgun Gothic"/>
+                <a:ea typeface="Malgun Gothic"/>
+                <a:cs typeface="Malgun Gothic"/>
+              </a:rPr>
+              <a:t>검색</a:t>
+            </a:r>
+            <a:r>
+              <a:rPr lang="en-US" sz="1150" b="0" i="0" dirty="0">
+                <a:solidFill>
+                  <a:srgbClr val="66717E"/>
+                </a:solidFill>
+                <a:latin typeface="Malgun Gothic"/>
+                <a:ea typeface="Malgun Gothic"/>
+                <a:cs typeface="Malgun Gothic"/>
+              </a:rPr>
+              <a:t>.</a:t>
+            </a:r>
+            <a:endParaRPr sz="1150" b="0" i="0" dirty="0">
+              <a:solidFill>
+                <a:srgbClr val="66717E"/>
+              </a:solidFill>
+              <a:latin typeface="Malgun Gothic"/>
+              <a:ea typeface="Malgun Gothic"/>
+              <a:cs typeface="Malgun Gothic"/>
+            </a:endParaRPr>
+          </a:p>
+        </p:txBody>
+      </p:sp>
+      <p:sp>
+        <p:nvSpPr>
+          <p:cNvPr id="32" name="Rounded Rectangle 31"/>
           <p:cNvSpPr/>
           <p:nvPr/>
         </p:nvSpPr>
         <p:spPr>
           <a:xfrm>
-            <a:off x="457200" y="1371600"/>
-            <a:ext cx="6645584" cy="768096"/>
+            <a:off x="457200" y="5861304"/>
+            <a:ext cx="6645584" cy="713232"/>
           </a:xfrm>
           <a:prstGeom prst="roundRect">
             <a:avLst>
@@ -7064,13 +7686,13 @@
       </p:sp>
       <p:sp>
         <p:nvSpPr>
-          <p:cNvPr id="6" name="Oval 5"/>
+          <p:cNvPr id="33" name="Oval 32"/>
           <p:cNvSpPr/>
           <p:nvPr/>
         </p:nvSpPr>
         <p:spPr>
           <a:xfrm>
-            <a:off x="640080" y="1572768"/>
+            <a:off x="640080" y="6035040"/>
             <a:ext cx="365760" cy="365760"/>
           </a:xfrm>
           <a:prstGeom prst="ellipse">
@@ -7112,20 +7734,20 @@
                 <a:ea typeface="Malgun Gothic"/>
                 <a:cs typeface="Cambria"/>
               </a:rPr>
-              <a:t>1</a:t>
-            </a:r>
-          </a:p>
-        </p:txBody>
-      </p:sp>
-      <p:sp>
-        <p:nvSpPr>
-          <p:cNvPr id="7" name="TextBox 6"/>
+              <a:t>3</a:t>
+            </a:r>
+          </a:p>
+        </p:txBody>
+      </p:sp>
+      <p:sp>
+        <p:nvSpPr>
+          <p:cNvPr id="34" name="TextBox 33"/>
           <p:cNvSpPr txBox="1"/>
           <p:nvPr/>
         </p:nvSpPr>
         <p:spPr>
           <a:xfrm>
-            <a:off x="1143000" y="1481328"/>
+            <a:off x="1143000" y="5934456"/>
             <a:ext cx="2103120" cy="292608"/>
           </a:xfrm>
           <a:prstGeom prst="rect">
@@ -7153,20 +7775,20 @@
                 <a:ea typeface="Malgun Gothic"/>
                 <a:cs typeface="Malgun Gothic"/>
               </a:rPr>
-              <a:t>LLM 정제</a:t>
-            </a:r>
-          </a:p>
-        </p:txBody>
-      </p:sp>
-      <p:sp>
-        <p:nvSpPr>
-          <p:cNvPr id="8" name="Rounded Rectangle 7"/>
+              <a:t>리랭킹</a:t>
+            </a:r>
+          </a:p>
+        </p:txBody>
+      </p:sp>
+      <p:sp>
+        <p:nvSpPr>
+          <p:cNvPr id="35" name="Rounded Rectangle 34"/>
           <p:cNvSpPr/>
           <p:nvPr/>
         </p:nvSpPr>
         <p:spPr>
           <a:xfrm>
-            <a:off x="1143000" y="1792224"/>
+            <a:off x="1143000" y="6254496"/>
             <a:ext cx="914400" cy="246888"/>
           </a:xfrm>
           <a:prstGeom prst="roundRect">
@@ -7207,13 +7829,13 @@
       </p:sp>
       <p:sp>
         <p:nvSpPr>
-          <p:cNvPr id="9" name="TextBox 8"/>
+          <p:cNvPr id="36" name="TextBox 35"/>
           <p:cNvSpPr txBox="1"/>
           <p:nvPr/>
         </p:nvSpPr>
         <p:spPr>
           <a:xfrm>
-            <a:off x="1143000" y="1792224"/>
+            <a:off x="1143000" y="6254496"/>
             <a:ext cx="914400" cy="246888"/>
           </a:xfrm>
           <a:prstGeom prst="rect">
@@ -7241,21 +7863,21 @@
                 <a:ea typeface="Malgun Gothic"/>
                 <a:cs typeface="Calibri"/>
               </a:rPr>
-              <a:t>/rewrite</a:t>
-            </a:r>
-          </a:p>
-        </p:txBody>
-      </p:sp>
-      <p:sp>
-        <p:nvSpPr>
-          <p:cNvPr id="10" name="TextBox 9"/>
+              <a:t>/rerank</a:t>
+            </a:r>
+          </a:p>
+        </p:txBody>
+      </p:sp>
+      <p:sp>
+        <p:nvSpPr>
+          <p:cNvPr id="37" name="TextBox 36"/>
           <p:cNvSpPr txBox="1"/>
           <p:nvPr/>
         </p:nvSpPr>
         <p:spPr>
           <a:xfrm>
-            <a:off x="2971800" y="1371600"/>
-            <a:ext cx="3993824" cy="768096"/>
+            <a:off x="2971800" y="5861304"/>
+            <a:ext cx="3993824" cy="713232"/>
           </a:xfrm>
           <a:prstGeom prst="rect">
             <a:avLst/>
@@ -7285,21 +7907,21 @@
                 <a:ea typeface="Malgun Gothic"/>
                 <a:cs typeface="Malgun Gothic"/>
               </a:rPr>
-              <a:t>모호한 입력을 명료한 영어 프롬프트로 재작성. 의도 보존.</a:t>
-            </a:r>
-          </a:p>
-        </p:txBody>
-      </p:sp>
-      <p:sp>
-        <p:nvSpPr>
-          <p:cNvPr id="11" name="Rounded Rectangle 10"/>
+              <a:t>Reranker로 의미 적합성 재점수화 → 최종 Top-3 선별.</a:t>
+            </a:r>
+          </a:p>
+        </p:txBody>
+      </p:sp>
+      <p:sp>
+        <p:nvSpPr>
+          <p:cNvPr id="38" name="Rounded Rectangle 37"/>
           <p:cNvSpPr/>
           <p:nvPr/>
         </p:nvSpPr>
         <p:spPr>
           <a:xfrm>
-            <a:off x="457200" y="2249424"/>
-            <a:ext cx="6645584" cy="768096"/>
+            <a:off x="457200" y="6611112"/>
+            <a:ext cx="6645584" cy="713232"/>
           </a:xfrm>
           <a:prstGeom prst="roundRect">
             <a:avLst>
@@ -7341,13 +7963,13 @@
       </p:sp>
       <p:sp>
         <p:nvSpPr>
-          <p:cNvPr id="12" name="Oval 11"/>
+          <p:cNvPr id="39" name="Oval 38"/>
           <p:cNvSpPr/>
           <p:nvPr/>
         </p:nvSpPr>
         <p:spPr>
           <a:xfrm>
-            <a:off x="640080" y="2450592"/>
+            <a:off x="640080" y="6784848"/>
             <a:ext cx="365760" cy="365760"/>
           </a:xfrm>
           <a:prstGeom prst="ellipse">
@@ -7389,20 +8011,20 @@
                 <a:ea typeface="Malgun Gothic"/>
                 <a:cs typeface="Cambria"/>
               </a:rPr>
-              <a:t>2</a:t>
-            </a:r>
-          </a:p>
-        </p:txBody>
-      </p:sp>
-      <p:sp>
-        <p:nvSpPr>
-          <p:cNvPr id="13" name="TextBox 12"/>
+              <a:t>4</a:t>
+            </a:r>
+          </a:p>
+        </p:txBody>
+      </p:sp>
+      <p:sp>
+        <p:nvSpPr>
+          <p:cNvPr id="40" name="TextBox 39"/>
           <p:cNvSpPr txBox="1"/>
           <p:nvPr/>
         </p:nvSpPr>
         <p:spPr>
           <a:xfrm>
-            <a:off x="1143000" y="2359152"/>
+            <a:off x="1143000" y="6684264"/>
             <a:ext cx="2103120" cy="292608"/>
           </a:xfrm>
           <a:prstGeom prst="rect">
@@ -7430,20 +8052,20 @@
                 <a:ea typeface="Malgun Gothic"/>
                 <a:cs typeface="Malgun Gothic"/>
               </a:rPr>
-              <a:t>벡터 검색</a:t>
-            </a:r>
-          </a:p>
-        </p:txBody>
-      </p:sp>
-      <p:sp>
-        <p:nvSpPr>
-          <p:cNvPr id="14" name="Rounded Rectangle 13"/>
+              <a:t>LLM 최종 생성</a:t>
+            </a:r>
+          </a:p>
+        </p:txBody>
+      </p:sp>
+      <p:sp>
+        <p:nvSpPr>
+          <p:cNvPr id="41" name="Rounded Rectangle 40"/>
           <p:cNvSpPr/>
           <p:nvPr/>
         </p:nvSpPr>
         <p:spPr>
           <a:xfrm>
-            <a:off x="1143000" y="2670048"/>
+            <a:off x="1143000" y="7004304"/>
             <a:ext cx="914400" cy="246888"/>
           </a:xfrm>
           <a:prstGeom prst="roundRect">
@@ -7484,13 +8106,13 @@
       </p:sp>
       <p:sp>
         <p:nvSpPr>
-          <p:cNvPr id="15" name="TextBox 14"/>
+          <p:cNvPr id="42" name="TextBox 41"/>
           <p:cNvSpPr txBox="1"/>
           <p:nvPr/>
         </p:nvSpPr>
         <p:spPr>
           <a:xfrm>
-            <a:off x="1143000" y="2670048"/>
+            <a:off x="1143000" y="7004304"/>
             <a:ext cx="914400" cy="246888"/>
           </a:xfrm>
           <a:prstGeom prst="rect">
@@ -7518,21 +8140,21 @@
                 <a:ea typeface="Malgun Gothic"/>
                 <a:cs typeface="Calibri"/>
               </a:rPr>
-              <a:t>/search</a:t>
-            </a:r>
-          </a:p>
-        </p:txBody>
-      </p:sp>
-      <p:sp>
-        <p:nvSpPr>
-          <p:cNvPr id="16" name="TextBox 15"/>
+              <a:t>/generate</a:t>
+            </a:r>
+          </a:p>
+        </p:txBody>
+      </p:sp>
+      <p:sp>
+        <p:nvSpPr>
+          <p:cNvPr id="43" name="TextBox 42"/>
           <p:cNvSpPr txBox="1"/>
           <p:nvPr/>
         </p:nvSpPr>
         <p:spPr>
           <a:xfrm>
-            <a:off x="2971800" y="2249424"/>
-            <a:ext cx="3993824" cy="768096"/>
+            <a:off x="2971800" y="6881935"/>
+            <a:ext cx="3993824" cy="171585"/>
           </a:xfrm>
           <a:prstGeom prst="rect">
             <a:avLst/>
@@ -7554,7 +8176,7 @@
               </a:spcAft>
             </a:pPr>
             <a:r>
-              <a:rPr sz="1150" b="0" i="0">
+              <a:rPr sz="1150" b="0" i="0" dirty="0">
                 <a:solidFill>
                   <a:srgbClr val="66717E"/>
                 </a:solidFill>
@@ -7562,125 +8184,153 @@
                 <a:ea typeface="Malgun Gothic"/>
                 <a:cs typeface="Malgun Gothic"/>
               </a:rPr>
-              <a:t>재작성본을 임베딩해 Chroma 코사인 유사도 Top-20 검색.</a:t>
-            </a:r>
-          </a:p>
-        </p:txBody>
-      </p:sp>
-      <p:sp>
-        <p:nvSpPr>
-          <p:cNvPr id="17" name="Rounded Rectangle 16"/>
-          <p:cNvSpPr/>
-          <p:nvPr/>
-        </p:nvSpPr>
-        <p:spPr>
-          <a:xfrm>
-            <a:off x="457200" y="3127248"/>
-            <a:ext cx="6645584" cy="768096"/>
-          </a:xfrm>
-          <a:prstGeom prst="roundRect">
-            <a:avLst>
-              <a:gd name="adj" fmla="val 5000"/>
-            </a:avLst>
-          </a:prstGeom>
-          <a:solidFill>
-            <a:srgbClr val="F3F5F8"/>
-          </a:solidFill>
-          <a:ln w="12700">
-            <a:solidFill>
-              <a:srgbClr val="E7ECF2"/>
-            </a:solidFill>
-          </a:ln>
-          <a:effectLst/>
-        </p:spPr>
-        <p:style>
-          <a:lnRef idx="1">
-            <a:schemeClr val="accent1"/>
-          </a:lnRef>
-          <a:fillRef idx="3">
-            <a:schemeClr val="accent1"/>
-          </a:fillRef>
-          <a:effectRef idx="2">
-            <a:schemeClr val="accent1"/>
-          </a:effectRef>
-          <a:fontRef idx="minor">
-            <a:schemeClr val="lt1"/>
-          </a:fontRef>
-        </p:style>
-        <p:txBody>
-          <a:bodyPr rtlCol="0" anchor="ctr"/>
-          <a:lstStyle/>
-          <a:p>
-            <a:pPr algn="ctr"/>
-            <a:endParaRPr/>
-          </a:p>
-        </p:txBody>
-      </p:sp>
-      <p:sp>
-        <p:nvSpPr>
-          <p:cNvPr id="18" name="Oval 17"/>
-          <p:cNvSpPr/>
-          <p:nvPr/>
-        </p:nvSpPr>
-        <p:spPr>
-          <a:xfrm>
-            <a:off x="640080" y="3328416"/>
-            <a:ext cx="365760" cy="365760"/>
-          </a:xfrm>
-          <a:prstGeom prst="ellipse">
-            <a:avLst/>
-          </a:prstGeom>
-          <a:solidFill>
-            <a:srgbClr val="E4002B"/>
-          </a:solidFill>
-          <a:ln>
-            <a:noFill/>
-          </a:ln>
-          <a:effectLst/>
-        </p:spPr>
-        <p:style>
-          <a:lnRef idx="1">
-            <a:schemeClr val="accent1"/>
-          </a:lnRef>
-          <a:fillRef idx="3">
-            <a:schemeClr val="accent1"/>
-          </a:fillRef>
-          <a:effectRef idx="2">
-            <a:schemeClr val="accent1"/>
-          </a:effectRef>
-          <a:fontRef idx="minor">
-            <a:schemeClr val="lt1"/>
-          </a:fontRef>
-        </p:style>
-        <p:txBody>
-          <a:bodyPr wrap="none" lIns="0" tIns="0" rIns="0" bIns="0" rtlCol="0" anchor="ctr"/>
-          <a:lstStyle/>
-          <a:p>
-            <a:pPr algn="ctr"/>
-            <a:r>
-              <a:rPr sz="1500" b="1" i="0">
-                <a:solidFill>
-                  <a:srgbClr val="FFFFFF"/>
-                </a:solidFill>
-                <a:latin typeface="Cambria"/>
-                <a:ea typeface="Malgun Gothic"/>
-                <a:cs typeface="Cambria"/>
-              </a:rPr>
-              <a:t>3</a:t>
-            </a:r>
-          </a:p>
-        </p:txBody>
-      </p:sp>
-      <p:sp>
-        <p:nvSpPr>
-          <p:cNvPr id="19" name="TextBox 18"/>
+              <a:t>Top-3 </a:t>
+            </a:r>
+            <a:r>
+              <a:rPr lang="ko-KR" altLang="en-US" sz="1150" dirty="0">
+                <a:solidFill>
+                  <a:srgbClr val="66717E"/>
+                </a:solidFill>
+                <a:latin typeface="Malgun Gothic"/>
+                <a:ea typeface="Malgun Gothic"/>
+                <a:cs typeface="Malgun Gothic"/>
+              </a:rPr>
+              <a:t>참고 및</a:t>
+            </a:r>
+            <a:r>
+              <a:rPr sz="1150" b="0" i="0" dirty="0">
+                <a:solidFill>
+                  <a:srgbClr val="66717E"/>
+                </a:solidFill>
+                <a:latin typeface="Malgun Gothic"/>
+                <a:ea typeface="Malgun Gothic"/>
+                <a:cs typeface="Malgun Gothic"/>
+              </a:rPr>
+              <a:t> </a:t>
+            </a:r>
+            <a:r>
+              <a:rPr sz="1150" b="0" i="0" dirty="0" err="1">
+                <a:solidFill>
+                  <a:srgbClr val="66717E"/>
+                </a:solidFill>
+                <a:latin typeface="Malgun Gothic"/>
+                <a:ea typeface="Malgun Gothic"/>
+                <a:cs typeface="Malgun Gothic"/>
+              </a:rPr>
+              <a:t>원본</a:t>
+            </a:r>
+            <a:r>
+              <a:rPr sz="1150" b="0" i="0" dirty="0">
+                <a:solidFill>
+                  <a:srgbClr val="66717E"/>
+                </a:solidFill>
+                <a:latin typeface="Malgun Gothic"/>
+                <a:ea typeface="Malgun Gothic"/>
+                <a:cs typeface="Malgun Gothic"/>
+              </a:rPr>
+              <a:t> </a:t>
+            </a:r>
+            <a:r>
+              <a:rPr sz="1150" b="0" i="0" dirty="0" err="1">
+                <a:solidFill>
+                  <a:srgbClr val="66717E"/>
+                </a:solidFill>
+                <a:latin typeface="Malgun Gothic"/>
+                <a:ea typeface="Malgun Gothic"/>
+                <a:cs typeface="Malgun Gothic"/>
+              </a:rPr>
+              <a:t>의도로</a:t>
+            </a:r>
+            <a:r>
+              <a:rPr sz="1150" b="0" i="0" dirty="0">
+                <a:solidFill>
+                  <a:srgbClr val="66717E"/>
+                </a:solidFill>
+                <a:latin typeface="Malgun Gothic"/>
+                <a:ea typeface="Malgun Gothic"/>
+                <a:cs typeface="Malgun Gothic"/>
+              </a:rPr>
+              <a:t> </a:t>
+            </a:r>
+            <a:r>
+              <a:rPr sz="1150" b="0" i="0" dirty="0" err="1">
+                <a:solidFill>
+                  <a:srgbClr val="66717E"/>
+                </a:solidFill>
+                <a:latin typeface="Malgun Gothic"/>
+                <a:ea typeface="Malgun Gothic"/>
+                <a:cs typeface="Malgun Gothic"/>
+              </a:rPr>
+              <a:t>최종</a:t>
+            </a:r>
+            <a:r>
+              <a:rPr sz="1150" b="0" i="0" dirty="0">
+                <a:solidFill>
+                  <a:srgbClr val="66717E"/>
+                </a:solidFill>
+                <a:latin typeface="Malgun Gothic"/>
+                <a:ea typeface="Malgun Gothic"/>
+                <a:cs typeface="Malgun Gothic"/>
+              </a:rPr>
+              <a:t> </a:t>
+            </a:r>
+            <a:r>
+              <a:rPr sz="1150" b="0" i="0" dirty="0" err="1">
+                <a:solidFill>
+                  <a:srgbClr val="66717E"/>
+                </a:solidFill>
+                <a:latin typeface="Malgun Gothic"/>
+                <a:ea typeface="Malgun Gothic"/>
+                <a:cs typeface="Malgun Gothic"/>
+              </a:rPr>
+              <a:t>프롬프트</a:t>
+            </a:r>
+            <a:r>
+              <a:rPr sz="1150" b="0" i="0" dirty="0">
+                <a:solidFill>
+                  <a:srgbClr val="66717E"/>
+                </a:solidFill>
+                <a:latin typeface="Malgun Gothic"/>
+                <a:ea typeface="Malgun Gothic"/>
+                <a:cs typeface="Malgun Gothic"/>
+              </a:rPr>
+              <a:t> </a:t>
+            </a:r>
+            <a:r>
+              <a:rPr lang="ko-KR" altLang="en-US" sz="1150" dirty="0">
+                <a:solidFill>
+                  <a:srgbClr val="66717E"/>
+                </a:solidFill>
+                <a:latin typeface="Malgun Gothic"/>
+                <a:ea typeface="Malgun Gothic"/>
+                <a:cs typeface="Malgun Gothic"/>
+              </a:rPr>
+              <a:t>작성</a:t>
+            </a:r>
+            <a:r>
+              <a:rPr sz="1150" b="0" i="0" dirty="0">
+                <a:solidFill>
+                  <a:srgbClr val="66717E"/>
+                </a:solidFill>
+                <a:latin typeface="Malgun Gothic"/>
+                <a:ea typeface="Malgun Gothic"/>
+                <a:cs typeface="Malgun Gothic"/>
+              </a:rPr>
+              <a:t>.</a:t>
+            </a:r>
+          </a:p>
+        </p:txBody>
+      </p:sp>
+      <p:sp>
+        <p:nvSpPr>
+          <p:cNvPr id="44" name="TextBox 43"/>
           <p:cNvSpPr txBox="1"/>
           <p:nvPr/>
         </p:nvSpPr>
         <p:spPr>
           <a:xfrm>
-            <a:off x="1143000" y="3236976"/>
-            <a:ext cx="2103120" cy="292608"/>
+            <a:off x="457200" y="7470648"/>
+            <a:ext cx="6645584" cy="292608"/>
           </a:xfrm>
           <a:prstGeom prst="rect">
             <a:avLst/>
@@ -7699,490 +8349,40 @@
               </a:spcAft>
             </a:pPr>
             <a:r>
-              <a:rPr sz="1300" b="1" i="0">
+              <a:rPr sz="1350" b="1" i="0">
                 <a:solidFill>
                   <a:srgbClr val="181F2B"/>
                 </a:solidFill>
-                <a:latin typeface="Malgun Gothic"/>
-                <a:ea typeface="Malgun Gothic"/>
-                <a:cs typeface="Malgun Gothic"/>
-              </a:rPr>
-              <a:t>리랭킹</a:t>
-            </a:r>
-          </a:p>
-        </p:txBody>
-      </p:sp>
-      <p:sp>
-        <p:nvSpPr>
-          <p:cNvPr id="20" name="Rounded Rectangle 19"/>
+                <a:latin typeface="Cambria"/>
+                <a:ea typeface="Malgun Gothic"/>
+                <a:cs typeface="Cambria"/>
+              </a:rPr>
+              <a:t>@refine UX</a:t>
+            </a:r>
+            <a:r>
+              <a:rPr sz="1250" b="1" i="0">
+                <a:solidFill>
+                  <a:srgbClr val="66717E"/>
+                </a:solidFill>
+                <a:latin typeface="Malgun Gothic"/>
+                <a:ea typeface="Malgun Gothic"/>
+                <a:cs typeface="Malgun Gothic"/>
+              </a:rPr>
+              <a:t>  —  5가지 승인 선택지</a:t>
+            </a:r>
+          </a:p>
+        </p:txBody>
+      </p:sp>
+      <p:sp>
+        <p:nvSpPr>
+          <p:cNvPr id="45" name="Rounded Rectangle 44"/>
           <p:cNvSpPr/>
           <p:nvPr/>
         </p:nvSpPr>
         <p:spPr>
           <a:xfrm>
-            <a:off x="1143000" y="3547872"/>
-            <a:ext cx="914400" cy="246888"/>
-          </a:xfrm>
-          <a:prstGeom prst="roundRect">
-            <a:avLst>
-              <a:gd name="adj" fmla="val 35000"/>
-            </a:avLst>
-          </a:prstGeom>
-          <a:solidFill>
-            <a:srgbClr val="0F1626"/>
-          </a:solidFill>
-          <a:ln>
-            <a:noFill/>
-          </a:ln>
-          <a:effectLst/>
-        </p:spPr>
-        <p:style>
-          <a:lnRef idx="1">
-            <a:schemeClr val="accent1"/>
-          </a:lnRef>
-          <a:fillRef idx="3">
-            <a:schemeClr val="accent1"/>
-          </a:fillRef>
-          <a:effectRef idx="2">
-            <a:schemeClr val="accent1"/>
-          </a:effectRef>
-          <a:fontRef idx="minor">
-            <a:schemeClr val="lt1"/>
-          </a:fontRef>
-        </p:style>
-        <p:txBody>
-          <a:bodyPr rtlCol="0" anchor="ctr"/>
-          <a:lstStyle/>
-          <a:p>
-            <a:pPr algn="ctr"/>
-            <a:endParaRPr/>
-          </a:p>
-        </p:txBody>
-      </p:sp>
-      <p:sp>
-        <p:nvSpPr>
-          <p:cNvPr id="21" name="TextBox 20"/>
-          <p:cNvSpPr txBox="1"/>
-          <p:nvPr/>
-        </p:nvSpPr>
-        <p:spPr>
-          <a:xfrm>
-            <a:off x="1143000" y="3547872"/>
-            <a:ext cx="914400" cy="246888"/>
-          </a:xfrm>
-          <a:prstGeom prst="rect">
-            <a:avLst/>
-          </a:prstGeom>
-          <a:noFill/>
-        </p:spPr>
-        <p:txBody>
-          <a:bodyPr wrap="square" lIns="0" tIns="0" rIns="0" bIns="0" anchor="ctr">
-            <a:spAutoFit/>
-          </a:bodyPr>
-          <a:lstStyle/>
-          <a:p>
-            <a:pPr algn="ctr">
-              <a:spcAft>
-                <a:spcPts val="0"/>
-              </a:spcAft>
-            </a:pPr>
-            <a:r>
-              <a:rPr sz="950" b="1" i="0">
-                <a:solidFill>
-                  <a:srgbClr val="CADCFC"/>
-                </a:solidFill>
-                <a:latin typeface="Calibri"/>
-                <a:ea typeface="Malgun Gothic"/>
-                <a:cs typeface="Calibri"/>
-              </a:rPr>
-              <a:t>/rerank</a:t>
-            </a:r>
-          </a:p>
-        </p:txBody>
-      </p:sp>
-      <p:sp>
-        <p:nvSpPr>
-          <p:cNvPr id="22" name="TextBox 21"/>
-          <p:cNvSpPr txBox="1"/>
-          <p:nvPr/>
-        </p:nvSpPr>
-        <p:spPr>
-          <a:xfrm>
-            <a:off x="2971800" y="3127248"/>
-            <a:ext cx="3993824" cy="768096"/>
-          </a:xfrm>
-          <a:prstGeom prst="rect">
-            <a:avLst/>
-          </a:prstGeom>
-          <a:noFill/>
-        </p:spPr>
-        <p:txBody>
-          <a:bodyPr wrap="square" lIns="73152" tIns="0" rIns="73152" bIns="0" anchor="ctr">
-            <a:spAutoFit/>
-          </a:bodyPr>
-          <a:lstStyle/>
-          <a:p>
-            <a:pPr algn="l">
-              <a:lnSpc>
-                <a:spcPct val="105000"/>
-              </a:lnSpc>
-              <a:spcAft>
-                <a:spcPts val="0"/>
-              </a:spcAft>
-            </a:pPr>
-            <a:r>
-              <a:rPr sz="1150" b="0" i="0">
-                <a:solidFill>
-                  <a:srgbClr val="66717E"/>
-                </a:solidFill>
-                <a:latin typeface="Malgun Gothic"/>
-                <a:ea typeface="Malgun Gothic"/>
-                <a:cs typeface="Malgun Gothic"/>
-              </a:rPr>
-              <a:t>Reranker로 의미 적합성 재점수화 → 최종 Top-3 선별.</a:t>
-            </a:r>
-          </a:p>
-        </p:txBody>
-      </p:sp>
-      <p:sp>
-        <p:nvSpPr>
-          <p:cNvPr id="23" name="Rounded Rectangle 22"/>
-          <p:cNvSpPr/>
-          <p:nvPr/>
-        </p:nvSpPr>
-        <p:spPr>
-          <a:xfrm>
-            <a:off x="457200" y="4005072"/>
-            <a:ext cx="6645584" cy="768096"/>
-          </a:xfrm>
-          <a:prstGeom prst="roundRect">
-            <a:avLst>
-              <a:gd name="adj" fmla="val 5000"/>
-            </a:avLst>
-          </a:prstGeom>
-          <a:solidFill>
-            <a:srgbClr val="F3F5F8"/>
-          </a:solidFill>
-          <a:ln w="12700">
-            <a:solidFill>
-              <a:srgbClr val="E7ECF2"/>
-            </a:solidFill>
-          </a:ln>
-          <a:effectLst/>
-        </p:spPr>
-        <p:style>
-          <a:lnRef idx="1">
-            <a:schemeClr val="accent1"/>
-          </a:lnRef>
-          <a:fillRef idx="3">
-            <a:schemeClr val="accent1"/>
-          </a:fillRef>
-          <a:effectRef idx="2">
-            <a:schemeClr val="accent1"/>
-          </a:effectRef>
-          <a:fontRef idx="minor">
-            <a:schemeClr val="lt1"/>
-          </a:fontRef>
-        </p:style>
-        <p:txBody>
-          <a:bodyPr rtlCol="0" anchor="ctr"/>
-          <a:lstStyle/>
-          <a:p>
-            <a:pPr algn="ctr"/>
-            <a:endParaRPr/>
-          </a:p>
-        </p:txBody>
-      </p:sp>
-      <p:sp>
-        <p:nvSpPr>
-          <p:cNvPr id="24" name="Oval 23"/>
-          <p:cNvSpPr/>
-          <p:nvPr/>
-        </p:nvSpPr>
-        <p:spPr>
-          <a:xfrm>
-            <a:off x="640080" y="4206240"/>
-            <a:ext cx="365760" cy="365760"/>
-          </a:xfrm>
-          <a:prstGeom prst="ellipse">
-            <a:avLst/>
-          </a:prstGeom>
-          <a:solidFill>
-            <a:srgbClr val="E4002B"/>
-          </a:solidFill>
-          <a:ln>
-            <a:noFill/>
-          </a:ln>
-          <a:effectLst/>
-        </p:spPr>
-        <p:style>
-          <a:lnRef idx="1">
-            <a:schemeClr val="accent1"/>
-          </a:lnRef>
-          <a:fillRef idx="3">
-            <a:schemeClr val="accent1"/>
-          </a:fillRef>
-          <a:effectRef idx="2">
-            <a:schemeClr val="accent1"/>
-          </a:effectRef>
-          <a:fontRef idx="minor">
-            <a:schemeClr val="lt1"/>
-          </a:fontRef>
-        </p:style>
-        <p:txBody>
-          <a:bodyPr wrap="none" lIns="0" tIns="0" rIns="0" bIns="0" rtlCol="0" anchor="ctr"/>
-          <a:lstStyle/>
-          <a:p>
-            <a:pPr algn="ctr"/>
-            <a:r>
-              <a:rPr sz="1500" b="1" i="0">
-                <a:solidFill>
-                  <a:srgbClr val="FFFFFF"/>
-                </a:solidFill>
-                <a:latin typeface="Cambria"/>
-                <a:ea typeface="Malgun Gothic"/>
-                <a:cs typeface="Cambria"/>
-              </a:rPr>
-              <a:t>4</a:t>
-            </a:r>
-          </a:p>
-        </p:txBody>
-      </p:sp>
-      <p:sp>
-        <p:nvSpPr>
-          <p:cNvPr id="25" name="TextBox 24"/>
-          <p:cNvSpPr txBox="1"/>
-          <p:nvPr/>
-        </p:nvSpPr>
-        <p:spPr>
-          <a:xfrm>
-            <a:off x="1143000" y="4114800"/>
-            <a:ext cx="2103120" cy="292608"/>
-          </a:xfrm>
-          <a:prstGeom prst="rect">
-            <a:avLst/>
-          </a:prstGeom>
-          <a:noFill/>
-        </p:spPr>
-        <p:txBody>
-          <a:bodyPr wrap="square" lIns="73152" tIns="0" rIns="73152" bIns="0" anchor="t">
-            <a:spAutoFit/>
-          </a:bodyPr>
-          <a:lstStyle/>
-          <a:p>
-            <a:pPr algn="l">
-              <a:spcAft>
-                <a:spcPts val="0"/>
-              </a:spcAft>
-            </a:pPr>
-            <a:r>
-              <a:rPr sz="1300" b="1" i="0">
-                <a:solidFill>
-                  <a:srgbClr val="181F2B"/>
-                </a:solidFill>
-                <a:latin typeface="Malgun Gothic"/>
-                <a:ea typeface="Malgun Gothic"/>
-                <a:cs typeface="Malgun Gothic"/>
-              </a:rPr>
-              <a:t>LLM 최종 생성</a:t>
-            </a:r>
-          </a:p>
-        </p:txBody>
-      </p:sp>
-      <p:sp>
-        <p:nvSpPr>
-          <p:cNvPr id="26" name="Rounded Rectangle 25"/>
-          <p:cNvSpPr/>
-          <p:nvPr/>
-        </p:nvSpPr>
-        <p:spPr>
-          <a:xfrm>
-            <a:off x="1143000" y="4425696"/>
-            <a:ext cx="914400" cy="246888"/>
-          </a:xfrm>
-          <a:prstGeom prst="roundRect">
-            <a:avLst>
-              <a:gd name="adj" fmla="val 35000"/>
-            </a:avLst>
-          </a:prstGeom>
-          <a:solidFill>
-            <a:srgbClr val="0F1626"/>
-          </a:solidFill>
-          <a:ln>
-            <a:noFill/>
-          </a:ln>
-          <a:effectLst/>
-        </p:spPr>
-        <p:style>
-          <a:lnRef idx="1">
-            <a:schemeClr val="accent1"/>
-          </a:lnRef>
-          <a:fillRef idx="3">
-            <a:schemeClr val="accent1"/>
-          </a:fillRef>
-          <a:effectRef idx="2">
-            <a:schemeClr val="accent1"/>
-          </a:effectRef>
-          <a:fontRef idx="minor">
-            <a:schemeClr val="lt1"/>
-          </a:fontRef>
-        </p:style>
-        <p:txBody>
-          <a:bodyPr rtlCol="0" anchor="ctr"/>
-          <a:lstStyle/>
-          <a:p>
-            <a:pPr algn="ctr"/>
-            <a:endParaRPr/>
-          </a:p>
-        </p:txBody>
-      </p:sp>
-      <p:sp>
-        <p:nvSpPr>
-          <p:cNvPr id="27" name="TextBox 26"/>
-          <p:cNvSpPr txBox="1"/>
-          <p:nvPr/>
-        </p:nvSpPr>
-        <p:spPr>
-          <a:xfrm>
-            <a:off x="1143000" y="4425696"/>
-            <a:ext cx="914400" cy="246888"/>
-          </a:xfrm>
-          <a:prstGeom prst="rect">
-            <a:avLst/>
-          </a:prstGeom>
-          <a:noFill/>
-        </p:spPr>
-        <p:txBody>
-          <a:bodyPr wrap="square" lIns="0" tIns="0" rIns="0" bIns="0" anchor="ctr">
-            <a:spAutoFit/>
-          </a:bodyPr>
-          <a:lstStyle/>
-          <a:p>
-            <a:pPr algn="ctr">
-              <a:spcAft>
-                <a:spcPts val="0"/>
-              </a:spcAft>
-            </a:pPr>
-            <a:r>
-              <a:rPr sz="950" b="1" i="0">
-                <a:solidFill>
-                  <a:srgbClr val="CADCFC"/>
-                </a:solidFill>
-                <a:latin typeface="Calibri"/>
-                <a:ea typeface="Malgun Gothic"/>
-                <a:cs typeface="Calibri"/>
-              </a:rPr>
-              <a:t>/generate</a:t>
-            </a:r>
-          </a:p>
-        </p:txBody>
-      </p:sp>
-      <p:sp>
-        <p:nvSpPr>
-          <p:cNvPr id="28" name="TextBox 27"/>
-          <p:cNvSpPr txBox="1"/>
-          <p:nvPr/>
-        </p:nvSpPr>
-        <p:spPr>
-          <a:xfrm>
-            <a:off x="2971800" y="4005072"/>
-            <a:ext cx="3993824" cy="768096"/>
-          </a:xfrm>
-          <a:prstGeom prst="rect">
-            <a:avLst/>
-          </a:prstGeom>
-          <a:noFill/>
-        </p:spPr>
-        <p:txBody>
-          <a:bodyPr wrap="square" lIns="73152" tIns="0" rIns="73152" bIns="0" anchor="ctr">
-            <a:spAutoFit/>
-          </a:bodyPr>
-          <a:lstStyle/>
-          <a:p>
-            <a:pPr algn="l">
-              <a:lnSpc>
-                <a:spcPct val="105000"/>
-              </a:lnSpc>
-              <a:spcAft>
-                <a:spcPts val="0"/>
-              </a:spcAft>
-            </a:pPr>
-            <a:r>
-              <a:rPr sz="1150" b="0" i="0">
-                <a:solidFill>
-                  <a:srgbClr val="66717E"/>
-                </a:solidFill>
-                <a:latin typeface="Malgun Gothic"/>
-                <a:ea typeface="Malgun Gothic"/>
-                <a:cs typeface="Malgun Gothic"/>
-              </a:rPr>
-              <a:t>Top-3 중 최적 선택 + 원본 의도로 최종 프롬프트 합성.</a:t>
-            </a:r>
-          </a:p>
-        </p:txBody>
-      </p:sp>
-      <p:sp>
-        <p:nvSpPr>
-          <p:cNvPr id="29" name="TextBox 28"/>
-          <p:cNvSpPr txBox="1"/>
-          <p:nvPr/>
-        </p:nvSpPr>
-        <p:spPr>
-          <a:xfrm>
-            <a:off x="457200" y="5047488"/>
-            <a:ext cx="6645584" cy="292608"/>
-          </a:xfrm>
-          <a:prstGeom prst="rect">
-            <a:avLst/>
-          </a:prstGeom>
-          <a:noFill/>
-        </p:spPr>
-        <p:txBody>
-          <a:bodyPr wrap="square" lIns="73152" tIns="0" rIns="73152" bIns="0" anchor="t">
-            <a:spAutoFit/>
-          </a:bodyPr>
-          <a:lstStyle/>
-          <a:p>
-            <a:pPr algn="l">
-              <a:spcAft>
-                <a:spcPts val="0"/>
-              </a:spcAft>
-            </a:pPr>
-            <a:r>
-              <a:rPr sz="1350" b="1" i="0">
-                <a:solidFill>
-                  <a:srgbClr val="181F2B"/>
-                </a:solidFill>
-                <a:latin typeface="Cambria"/>
-                <a:ea typeface="Malgun Gothic"/>
-                <a:cs typeface="Cambria"/>
-              </a:rPr>
-              <a:t>@refine UX</a:t>
-            </a:r>
-            <a:r>
-              <a:rPr sz="1250" b="1" i="0">
-                <a:solidFill>
-                  <a:srgbClr val="66717E"/>
-                </a:solidFill>
-                <a:latin typeface="Malgun Gothic"/>
-                <a:ea typeface="Malgun Gothic"/>
-                <a:cs typeface="Malgun Gothic"/>
-              </a:rPr>
-              <a:t>  —  5가지 승인 선택지</a:t>
-            </a:r>
-          </a:p>
-        </p:txBody>
-      </p:sp>
-      <p:sp>
-        <p:nvSpPr>
-          <p:cNvPr id="30" name="Rounded Rectangle 29"/>
-          <p:cNvSpPr/>
-          <p:nvPr/>
-        </p:nvSpPr>
-        <p:spPr>
-          <a:xfrm>
-            <a:off x="457200" y="5431536"/>
-            <a:ext cx="6645584" cy="384048"/>
+            <a:off x="457200" y="7836408"/>
+            <a:ext cx="6645584" cy="402336"/>
           </a:xfrm>
           <a:prstGeom prst="roundRect">
             <a:avLst>
@@ -8224,14 +8424,14 @@
       </p:sp>
       <p:sp>
         <p:nvSpPr>
-          <p:cNvPr id="31" name="TextBox 30"/>
+          <p:cNvPr id="46" name="TextBox 45"/>
           <p:cNvSpPr txBox="1"/>
           <p:nvPr/>
         </p:nvSpPr>
         <p:spPr>
           <a:xfrm>
-            <a:off x="640080" y="5431536"/>
-            <a:ext cx="2011680" cy="384048"/>
+            <a:off x="640080" y="7836408"/>
+            <a:ext cx="2011680" cy="402336"/>
           </a:xfrm>
           <a:prstGeom prst="rect">
             <a:avLst/>
@@ -8265,14 +8465,14 @@
       </p:sp>
       <p:sp>
         <p:nvSpPr>
-          <p:cNvPr id="32" name="TextBox 31"/>
+          <p:cNvPr id="47" name="TextBox 46"/>
           <p:cNvSpPr txBox="1"/>
           <p:nvPr/>
         </p:nvSpPr>
         <p:spPr>
           <a:xfrm>
-            <a:off x="2697480" y="5431536"/>
-            <a:ext cx="4222424" cy="384048"/>
+            <a:off x="2697480" y="7836408"/>
+            <a:ext cx="4222424" cy="402336"/>
           </a:xfrm>
           <a:prstGeom prst="rect">
             <a:avLst/>
@@ -8306,14 +8506,14 @@
       </p:sp>
       <p:sp>
         <p:nvSpPr>
-          <p:cNvPr id="33" name="Rounded Rectangle 32"/>
+          <p:cNvPr id="48" name="Rounded Rectangle 47"/>
           <p:cNvSpPr/>
           <p:nvPr/>
         </p:nvSpPr>
         <p:spPr>
           <a:xfrm>
-            <a:off x="457200" y="5888736"/>
-            <a:ext cx="6645584" cy="384048"/>
+            <a:off x="457200" y="8257032"/>
+            <a:ext cx="6645584" cy="402336"/>
           </a:xfrm>
           <a:prstGeom prst="roundRect">
             <a:avLst>
@@ -8355,14 +8555,14 @@
       </p:sp>
       <p:sp>
         <p:nvSpPr>
-          <p:cNvPr id="34" name="TextBox 33"/>
+          <p:cNvPr id="49" name="TextBox 48"/>
           <p:cNvSpPr txBox="1"/>
           <p:nvPr/>
         </p:nvSpPr>
         <p:spPr>
           <a:xfrm>
-            <a:off x="640080" y="5888736"/>
-            <a:ext cx="2011680" cy="384048"/>
+            <a:off x="640080" y="8257032"/>
+            <a:ext cx="2011680" cy="402336"/>
           </a:xfrm>
           <a:prstGeom prst="rect">
             <a:avLst/>
@@ -8396,14 +8596,14 @@
       </p:sp>
       <p:sp>
         <p:nvSpPr>
-          <p:cNvPr id="35" name="TextBox 34"/>
+          <p:cNvPr id="50" name="TextBox 49"/>
           <p:cNvSpPr txBox="1"/>
           <p:nvPr/>
         </p:nvSpPr>
         <p:spPr>
           <a:xfrm>
-            <a:off x="2697480" y="5888736"/>
-            <a:ext cx="4222424" cy="384048"/>
+            <a:off x="2697480" y="8257032"/>
+            <a:ext cx="4222424" cy="402336"/>
           </a:xfrm>
           <a:prstGeom prst="rect">
             <a:avLst/>
@@ -8437,14 +8637,14 @@
       </p:sp>
       <p:sp>
         <p:nvSpPr>
-          <p:cNvPr id="36" name="Rounded Rectangle 35"/>
+          <p:cNvPr id="51" name="Rounded Rectangle 50"/>
           <p:cNvSpPr/>
           <p:nvPr/>
         </p:nvSpPr>
         <p:spPr>
           <a:xfrm>
-            <a:off x="457200" y="6345936"/>
-            <a:ext cx="6645584" cy="384048"/>
+            <a:off x="457200" y="8677656"/>
+            <a:ext cx="6645584" cy="402336"/>
           </a:xfrm>
           <a:prstGeom prst="roundRect">
             <a:avLst>
@@ -8486,14 +8686,14 @@
       </p:sp>
       <p:sp>
         <p:nvSpPr>
-          <p:cNvPr id="37" name="TextBox 36"/>
+          <p:cNvPr id="52" name="TextBox 51"/>
           <p:cNvSpPr txBox="1"/>
           <p:nvPr/>
         </p:nvSpPr>
         <p:spPr>
           <a:xfrm>
-            <a:off x="640080" y="6345936"/>
-            <a:ext cx="2011680" cy="384048"/>
+            <a:off x="640080" y="8677656"/>
+            <a:ext cx="2011680" cy="402336"/>
           </a:xfrm>
           <a:prstGeom prst="rect">
             <a:avLst/>
@@ -8527,14 +8727,14 @@
       </p:sp>
       <p:sp>
         <p:nvSpPr>
-          <p:cNvPr id="38" name="TextBox 37"/>
+          <p:cNvPr id="53" name="TextBox 52"/>
           <p:cNvSpPr txBox="1"/>
           <p:nvPr/>
         </p:nvSpPr>
         <p:spPr>
           <a:xfrm>
-            <a:off x="2697480" y="6345936"/>
-            <a:ext cx="4222424" cy="384048"/>
+            <a:off x="2697480" y="8677656"/>
+            <a:ext cx="4222424" cy="402336"/>
           </a:xfrm>
           <a:prstGeom prst="rect">
             <a:avLst/>
@@ -8568,14 +8768,14 @@
       </p:sp>
       <p:sp>
         <p:nvSpPr>
-          <p:cNvPr id="39" name="Rounded Rectangle 38"/>
+          <p:cNvPr id="54" name="Rounded Rectangle 53"/>
           <p:cNvSpPr/>
           <p:nvPr/>
         </p:nvSpPr>
         <p:spPr>
           <a:xfrm>
-            <a:off x="457200" y="6803136"/>
-            <a:ext cx="6645584" cy="384048"/>
+            <a:off x="457200" y="9098280"/>
+            <a:ext cx="6645584" cy="402336"/>
           </a:xfrm>
           <a:prstGeom prst="roundRect">
             <a:avLst>
@@ -8617,14 +8817,14 @@
       </p:sp>
       <p:sp>
         <p:nvSpPr>
-          <p:cNvPr id="40" name="TextBox 39"/>
+          <p:cNvPr id="55" name="TextBox 54"/>
           <p:cNvSpPr txBox="1"/>
           <p:nvPr/>
         </p:nvSpPr>
         <p:spPr>
           <a:xfrm>
-            <a:off x="640080" y="6803136"/>
-            <a:ext cx="2011680" cy="384048"/>
+            <a:off x="640080" y="9098280"/>
+            <a:ext cx="2011680" cy="402336"/>
           </a:xfrm>
           <a:prstGeom prst="rect">
             <a:avLst/>
@@ -8658,14 +8858,14 @@
       </p:sp>
       <p:sp>
         <p:nvSpPr>
-          <p:cNvPr id="41" name="TextBox 40"/>
+          <p:cNvPr id="56" name="TextBox 55"/>
           <p:cNvSpPr txBox="1"/>
           <p:nvPr/>
         </p:nvSpPr>
         <p:spPr>
           <a:xfrm>
-            <a:off x="2697480" y="6803136"/>
-            <a:ext cx="4222424" cy="384048"/>
+            <a:off x="2697480" y="9098280"/>
+            <a:ext cx="4222424" cy="402336"/>
           </a:xfrm>
           <a:prstGeom prst="rect">
             <a:avLst/>
@@ -8684,7 +8884,7 @@
               </a:spcAft>
             </a:pPr>
             <a:r>
-              <a:rPr sz="1100" b="0" i="0">
+              <a:rPr sz="1100" b="0" i="0" dirty="0" err="1">
                 <a:solidFill>
                   <a:srgbClr val="181F2B"/>
                 </a:solidFill>
@@ -8692,21 +8892,117 @@
                 <a:ea typeface="Malgun Gothic"/>
                 <a:cs typeface="Malgun Gothic"/>
               </a:rPr>
-              <a:t>정제 없이 원본 그대로 전송</a:t>
-            </a:r>
-          </a:p>
-        </p:txBody>
-      </p:sp>
-      <p:sp>
-        <p:nvSpPr>
-          <p:cNvPr id="42" name="Rounded Rectangle 41"/>
+              <a:t>정제</a:t>
+            </a:r>
+            <a:r>
+              <a:rPr sz="1100" b="0" i="0" dirty="0">
+                <a:solidFill>
+                  <a:srgbClr val="181F2B"/>
+                </a:solidFill>
+                <a:latin typeface="Malgun Gothic"/>
+                <a:ea typeface="Malgun Gothic"/>
+                <a:cs typeface="Malgun Gothic"/>
+              </a:rPr>
+              <a:t> </a:t>
+            </a:r>
+            <a:r>
+              <a:rPr sz="1100" b="0" i="0" dirty="0" err="1">
+                <a:solidFill>
+                  <a:srgbClr val="181F2B"/>
+                </a:solidFill>
+                <a:latin typeface="Malgun Gothic"/>
+                <a:ea typeface="Malgun Gothic"/>
+                <a:cs typeface="Malgun Gothic"/>
+              </a:rPr>
+              <a:t>없이</a:t>
+            </a:r>
+            <a:r>
+              <a:rPr sz="1100" b="0" i="0" dirty="0">
+                <a:solidFill>
+                  <a:srgbClr val="181F2B"/>
+                </a:solidFill>
+                <a:latin typeface="Malgun Gothic"/>
+                <a:ea typeface="Malgun Gothic"/>
+                <a:cs typeface="Malgun Gothic"/>
+              </a:rPr>
+              <a:t> </a:t>
+            </a:r>
+            <a:r>
+              <a:rPr sz="1100" b="0" i="0" dirty="0" err="1">
+                <a:solidFill>
+                  <a:srgbClr val="181F2B"/>
+                </a:solidFill>
+                <a:latin typeface="Malgun Gothic"/>
+                <a:ea typeface="Malgun Gothic"/>
+                <a:cs typeface="Malgun Gothic"/>
+              </a:rPr>
+              <a:t>원본</a:t>
+            </a:r>
+            <a:r>
+              <a:rPr sz="1100" b="0" i="0" dirty="0">
+                <a:solidFill>
+                  <a:srgbClr val="181F2B"/>
+                </a:solidFill>
+                <a:latin typeface="Malgun Gothic"/>
+                <a:ea typeface="Malgun Gothic"/>
+                <a:cs typeface="Malgun Gothic"/>
+              </a:rPr>
+              <a:t> </a:t>
+            </a:r>
+            <a:r>
+              <a:rPr sz="1100" b="0" i="0" dirty="0" err="1">
+                <a:solidFill>
+                  <a:srgbClr val="181F2B"/>
+                </a:solidFill>
+                <a:latin typeface="Malgun Gothic"/>
+                <a:ea typeface="Malgun Gothic"/>
+                <a:cs typeface="Malgun Gothic"/>
+              </a:rPr>
+              <a:t>그대로</a:t>
+            </a:r>
+            <a:r>
+              <a:rPr sz="1100" b="0" i="0" dirty="0">
+                <a:solidFill>
+                  <a:srgbClr val="181F2B"/>
+                </a:solidFill>
+                <a:latin typeface="Malgun Gothic"/>
+                <a:ea typeface="Malgun Gothic"/>
+                <a:cs typeface="Malgun Gothic"/>
+              </a:rPr>
+              <a:t> </a:t>
+            </a:r>
+            <a:r>
+              <a:rPr sz="1100" b="0" i="0" dirty="0" err="1">
+                <a:solidFill>
+                  <a:srgbClr val="181F2B"/>
+                </a:solidFill>
+                <a:latin typeface="Malgun Gothic"/>
+                <a:ea typeface="Malgun Gothic"/>
+                <a:cs typeface="Malgun Gothic"/>
+              </a:rPr>
+              <a:t>전송</a:t>
+            </a:r>
+            <a:endParaRPr sz="1100" b="0" i="0" dirty="0">
+              <a:solidFill>
+                <a:srgbClr val="181F2B"/>
+              </a:solidFill>
+              <a:latin typeface="Malgun Gothic"/>
+              <a:ea typeface="Malgun Gothic"/>
+              <a:cs typeface="Malgun Gothic"/>
+            </a:endParaRPr>
+          </a:p>
+        </p:txBody>
+      </p:sp>
+      <p:sp>
+        <p:nvSpPr>
+          <p:cNvPr id="57" name="Rounded Rectangle 56"/>
           <p:cNvSpPr/>
           <p:nvPr/>
         </p:nvSpPr>
         <p:spPr>
           <a:xfrm>
-            <a:off x="457200" y="7260336"/>
-            <a:ext cx="6645584" cy="384048"/>
+            <a:off x="457200" y="9518904"/>
+            <a:ext cx="6645584" cy="402336"/>
           </a:xfrm>
           <a:prstGeom prst="roundRect">
             <a:avLst>
@@ -8748,14 +9044,14 @@
       </p:sp>
       <p:sp>
         <p:nvSpPr>
-          <p:cNvPr id="43" name="TextBox 42"/>
+          <p:cNvPr id="58" name="TextBox 57"/>
           <p:cNvSpPr txBox="1"/>
           <p:nvPr/>
         </p:nvSpPr>
         <p:spPr>
           <a:xfrm>
-            <a:off x="640080" y="7260336"/>
-            <a:ext cx="2011680" cy="384048"/>
+            <a:off x="640080" y="9518904"/>
+            <a:ext cx="2011680" cy="402336"/>
           </a:xfrm>
           <a:prstGeom prst="rect">
             <a:avLst/>
@@ -8789,14 +9085,14 @@
       </p:sp>
       <p:sp>
         <p:nvSpPr>
-          <p:cNvPr id="44" name="TextBox 43"/>
+          <p:cNvPr id="59" name="TextBox 58"/>
           <p:cNvSpPr txBox="1"/>
           <p:nvPr/>
         </p:nvSpPr>
         <p:spPr>
           <a:xfrm>
-            <a:off x="2697480" y="7260336"/>
-            <a:ext cx="4222424" cy="384048"/>
+            <a:off x="2697480" y="9518904"/>
+            <a:ext cx="4222424" cy="402336"/>
           </a:xfrm>
           <a:prstGeom prst="rect">
             <a:avLst/>
@@ -8830,14 +9126,14 @@
       </p:sp>
       <p:sp>
         <p:nvSpPr>
-          <p:cNvPr id="45" name="TextBox 44"/>
+          <p:cNvPr id="60" name="TextBox 59"/>
           <p:cNvSpPr txBox="1"/>
           <p:nvPr/>
         </p:nvSpPr>
         <p:spPr>
           <a:xfrm>
-            <a:off x="457200" y="7827263"/>
-            <a:ext cx="6645584" cy="274320"/>
+            <a:off x="457200" y="10271363"/>
+            <a:ext cx="6096944" cy="274320"/>
           </a:xfrm>
           <a:prstGeom prst="rect">
             <a:avLst/>
@@ -8845,7 +9141,7 @@
           <a:noFill/>
         </p:spPr>
         <p:txBody>
-          <a:bodyPr wrap="square" lIns="73152" tIns="0" rIns="73152" bIns="0" anchor="t">
+          <a:bodyPr wrap="square" lIns="73152" tIns="0" rIns="73152" bIns="0" anchor="ctr">
             <a:spAutoFit/>
           </a:bodyPr>
           <a:lstStyle/>
@@ -8856,579 +9152,10 @@
               </a:spcAft>
             </a:pPr>
             <a:r>
-              <a:rPr sz="1250" b="1" i="0">
+              <a:rPr sz="850" b="1" i="0">
                 <a:solidFill>
                   <a:srgbClr val="181F2B"/>
                 </a:solidFill>
-                <a:latin typeface="Malgun Gothic"/>
-                <a:ea typeface="Malgun Gothic"/>
-                <a:cs typeface="Malgun Gothic"/>
-              </a:rPr>
-              <a:t>설계 불변식</a:t>
-            </a:r>
-          </a:p>
-        </p:txBody>
-      </p:sp>
-      <p:sp>
-        <p:nvSpPr>
-          <p:cNvPr id="46" name="Rounded Rectangle 45"/>
-          <p:cNvSpPr/>
-          <p:nvPr/>
-        </p:nvSpPr>
-        <p:spPr>
-          <a:xfrm>
-            <a:off x="457200" y="8193023"/>
-            <a:ext cx="2093274" cy="384048"/>
-          </a:xfrm>
-          <a:prstGeom prst="roundRect">
-            <a:avLst>
-              <a:gd name="adj" fmla="val 50000"/>
-            </a:avLst>
-          </a:prstGeom>
-          <a:solidFill>
-            <a:srgbClr val="0F1626"/>
-          </a:solidFill>
-          <a:ln>
-            <a:noFill/>
-          </a:ln>
-          <a:effectLst/>
-        </p:spPr>
-        <p:style>
-          <a:lnRef idx="1">
-            <a:schemeClr val="accent1"/>
-          </a:lnRef>
-          <a:fillRef idx="3">
-            <a:schemeClr val="accent1"/>
-          </a:fillRef>
-          <a:effectRef idx="2">
-            <a:schemeClr val="accent1"/>
-          </a:effectRef>
-          <a:fontRef idx="minor">
-            <a:schemeClr val="lt1"/>
-          </a:fontRef>
-        </p:style>
-        <p:txBody>
-          <a:bodyPr rtlCol="0" anchor="ctr"/>
-          <a:lstStyle/>
-          <a:p>
-            <a:pPr algn="ctr"/>
-            <a:endParaRPr/>
-          </a:p>
-        </p:txBody>
-      </p:sp>
-      <p:sp>
-        <p:nvSpPr>
-          <p:cNvPr id="47" name="TextBox 46"/>
-          <p:cNvSpPr txBox="1"/>
-          <p:nvPr/>
-        </p:nvSpPr>
-        <p:spPr>
-          <a:xfrm>
-            <a:off x="457200" y="8193023"/>
-            <a:ext cx="2093274" cy="384048"/>
-          </a:xfrm>
-          <a:prstGeom prst="rect">
-            <a:avLst/>
-          </a:prstGeom>
-          <a:noFill/>
-        </p:spPr>
-        <p:txBody>
-          <a:bodyPr wrap="square" lIns="0" tIns="0" rIns="0" bIns="0" anchor="ctr">
-            <a:spAutoFit/>
-          </a:bodyPr>
-          <a:lstStyle/>
-          <a:p>
-            <a:pPr algn="ctr">
-              <a:spcAft>
-                <a:spcPts val="0"/>
-              </a:spcAft>
-            </a:pPr>
-            <a:r>
-              <a:rPr sz="1100" b="1" i="0">
-                <a:solidFill>
-                  <a:srgbClr val="FFFFFF"/>
-                </a:solidFill>
-                <a:latin typeface="Calibri"/>
-                <a:ea typeface="Malgun Gothic"/>
-                <a:cs typeface="Calibri"/>
-              </a:rPr>
-              <a:t>fail-open</a:t>
-            </a:r>
-          </a:p>
-        </p:txBody>
-      </p:sp>
-      <p:sp>
-        <p:nvSpPr>
-          <p:cNvPr id="48" name="Rounded Rectangle 47"/>
-          <p:cNvSpPr/>
-          <p:nvPr/>
-        </p:nvSpPr>
-        <p:spPr>
-          <a:xfrm>
-            <a:off x="2733354" y="8193023"/>
-            <a:ext cx="2093274" cy="384048"/>
-          </a:xfrm>
-          <a:prstGeom prst="roundRect">
-            <a:avLst>
-              <a:gd name="adj" fmla="val 50000"/>
-            </a:avLst>
-          </a:prstGeom>
-          <a:solidFill>
-            <a:srgbClr val="0F1626"/>
-          </a:solidFill>
-          <a:ln>
-            <a:noFill/>
-          </a:ln>
-          <a:effectLst/>
-        </p:spPr>
-        <p:style>
-          <a:lnRef idx="1">
-            <a:schemeClr val="accent1"/>
-          </a:lnRef>
-          <a:fillRef idx="3">
-            <a:schemeClr val="accent1"/>
-          </a:fillRef>
-          <a:effectRef idx="2">
-            <a:schemeClr val="accent1"/>
-          </a:effectRef>
-          <a:fontRef idx="minor">
-            <a:schemeClr val="lt1"/>
-          </a:fontRef>
-        </p:style>
-        <p:txBody>
-          <a:bodyPr rtlCol="0" anchor="ctr"/>
-          <a:lstStyle/>
-          <a:p>
-            <a:pPr algn="ctr"/>
-            <a:endParaRPr/>
-          </a:p>
-        </p:txBody>
-      </p:sp>
-      <p:sp>
-        <p:nvSpPr>
-          <p:cNvPr id="49" name="TextBox 48"/>
-          <p:cNvSpPr txBox="1"/>
-          <p:nvPr/>
-        </p:nvSpPr>
-        <p:spPr>
-          <a:xfrm>
-            <a:off x="2733354" y="8193023"/>
-            <a:ext cx="2093274" cy="384048"/>
-          </a:xfrm>
-          <a:prstGeom prst="rect">
-            <a:avLst/>
-          </a:prstGeom>
-          <a:noFill/>
-        </p:spPr>
-        <p:txBody>
-          <a:bodyPr wrap="square" lIns="0" tIns="0" rIns="0" bIns="0" anchor="ctr">
-            <a:spAutoFit/>
-          </a:bodyPr>
-          <a:lstStyle/>
-          <a:p>
-            <a:pPr algn="ctr">
-              <a:spcAft>
-                <a:spcPts val="0"/>
-              </a:spcAft>
-            </a:pPr>
-            <a:r>
-              <a:rPr sz="1100" b="1" i="0">
-                <a:solidFill>
-                  <a:srgbClr val="FFFFFF"/>
-                </a:solidFill>
-                <a:latin typeface="Malgun Gothic"/>
-                <a:ea typeface="Malgun Gothic"/>
-                <a:cs typeface="Malgun Gothic"/>
-              </a:rPr>
-              <a:t>명시 호출만</a:t>
-            </a:r>
-          </a:p>
-        </p:txBody>
-      </p:sp>
-      <p:sp>
-        <p:nvSpPr>
-          <p:cNvPr id="50" name="Rounded Rectangle 49"/>
-          <p:cNvSpPr/>
-          <p:nvPr/>
-        </p:nvSpPr>
-        <p:spPr>
-          <a:xfrm>
-            <a:off x="5009509" y="8193023"/>
-            <a:ext cx="2093274" cy="384048"/>
-          </a:xfrm>
-          <a:prstGeom prst="roundRect">
-            <a:avLst>
-              <a:gd name="adj" fmla="val 50000"/>
-            </a:avLst>
-          </a:prstGeom>
-          <a:solidFill>
-            <a:srgbClr val="0F1626"/>
-          </a:solidFill>
-          <a:ln>
-            <a:noFill/>
-          </a:ln>
-          <a:effectLst/>
-        </p:spPr>
-        <p:style>
-          <a:lnRef idx="1">
-            <a:schemeClr val="accent1"/>
-          </a:lnRef>
-          <a:fillRef idx="3">
-            <a:schemeClr val="accent1"/>
-          </a:fillRef>
-          <a:effectRef idx="2">
-            <a:schemeClr val="accent1"/>
-          </a:effectRef>
-          <a:fontRef idx="minor">
-            <a:schemeClr val="lt1"/>
-          </a:fontRef>
-        </p:style>
-        <p:txBody>
-          <a:bodyPr rtlCol="0" anchor="ctr"/>
-          <a:lstStyle/>
-          <a:p>
-            <a:pPr algn="ctr"/>
-            <a:endParaRPr/>
-          </a:p>
-        </p:txBody>
-      </p:sp>
-      <p:sp>
-        <p:nvSpPr>
-          <p:cNvPr id="51" name="TextBox 50"/>
-          <p:cNvSpPr txBox="1"/>
-          <p:nvPr/>
-        </p:nvSpPr>
-        <p:spPr>
-          <a:xfrm>
-            <a:off x="5009509" y="8193023"/>
-            <a:ext cx="2093274" cy="384048"/>
-          </a:xfrm>
-          <a:prstGeom prst="rect">
-            <a:avLst/>
-          </a:prstGeom>
-          <a:noFill/>
-        </p:spPr>
-        <p:txBody>
-          <a:bodyPr wrap="square" lIns="0" tIns="0" rIns="0" bIns="0" anchor="ctr">
-            <a:spAutoFit/>
-          </a:bodyPr>
-          <a:lstStyle/>
-          <a:p>
-            <a:pPr algn="ctr">
-              <a:spcAft>
-                <a:spcPts val="0"/>
-              </a:spcAft>
-            </a:pPr>
-            <a:r>
-              <a:rPr sz="1100" b="1" i="0">
-                <a:solidFill>
-                  <a:srgbClr val="FFFFFF"/>
-                </a:solidFill>
-                <a:latin typeface="Malgun Gothic"/>
-                <a:ea typeface="Malgun Gothic"/>
-                <a:cs typeface="Malgun Gothic"/>
-              </a:rPr>
-              <a:t>승인 게이트</a:t>
-            </a:r>
-          </a:p>
-        </p:txBody>
-      </p:sp>
-      <p:sp>
-        <p:nvSpPr>
-          <p:cNvPr id="52" name="Rounded Rectangle 51"/>
-          <p:cNvSpPr/>
-          <p:nvPr/>
-        </p:nvSpPr>
-        <p:spPr>
-          <a:xfrm>
-            <a:off x="457200" y="8668511"/>
-            <a:ext cx="2093274" cy="384048"/>
-          </a:xfrm>
-          <a:prstGeom prst="roundRect">
-            <a:avLst>
-              <a:gd name="adj" fmla="val 50000"/>
-            </a:avLst>
-          </a:prstGeom>
-          <a:solidFill>
-            <a:srgbClr val="0F1626"/>
-          </a:solidFill>
-          <a:ln>
-            <a:noFill/>
-          </a:ln>
-          <a:effectLst/>
-        </p:spPr>
-        <p:style>
-          <a:lnRef idx="1">
-            <a:schemeClr val="accent1"/>
-          </a:lnRef>
-          <a:fillRef idx="3">
-            <a:schemeClr val="accent1"/>
-          </a:fillRef>
-          <a:effectRef idx="2">
-            <a:schemeClr val="accent1"/>
-          </a:effectRef>
-          <a:fontRef idx="minor">
-            <a:schemeClr val="lt1"/>
-          </a:fontRef>
-        </p:style>
-        <p:txBody>
-          <a:bodyPr rtlCol="0" anchor="ctr"/>
-          <a:lstStyle/>
-          <a:p>
-            <a:pPr algn="ctr"/>
-            <a:endParaRPr/>
-          </a:p>
-        </p:txBody>
-      </p:sp>
-      <p:sp>
-        <p:nvSpPr>
-          <p:cNvPr id="53" name="TextBox 52"/>
-          <p:cNvSpPr txBox="1"/>
-          <p:nvPr/>
-        </p:nvSpPr>
-        <p:spPr>
-          <a:xfrm>
-            <a:off x="457200" y="8668511"/>
-            <a:ext cx="2093274" cy="384048"/>
-          </a:xfrm>
-          <a:prstGeom prst="rect">
-            <a:avLst/>
-          </a:prstGeom>
-          <a:noFill/>
-        </p:spPr>
-        <p:txBody>
-          <a:bodyPr wrap="square" lIns="0" tIns="0" rIns="0" bIns="0" anchor="ctr">
-            <a:spAutoFit/>
-          </a:bodyPr>
-          <a:lstStyle/>
-          <a:p>
-            <a:pPr algn="ctr">
-              <a:spcAft>
-                <a:spcPts val="0"/>
-              </a:spcAft>
-            </a:pPr>
-            <a:r>
-              <a:rPr sz="1100" b="1" i="0">
-                <a:solidFill>
-                  <a:srgbClr val="FFFFFF"/>
-                </a:solidFill>
-                <a:latin typeface="Malgun Gothic"/>
-                <a:ea typeface="Malgun Gothic"/>
-                <a:cs typeface="Malgun Gothic"/>
-              </a:rPr>
-              <a:t>의존성 0 (FE)</a:t>
-            </a:r>
-          </a:p>
-        </p:txBody>
-      </p:sp>
-      <p:sp>
-        <p:nvSpPr>
-          <p:cNvPr id="54" name="Rounded Rectangle 53"/>
-          <p:cNvSpPr/>
-          <p:nvPr/>
-        </p:nvSpPr>
-        <p:spPr>
-          <a:xfrm>
-            <a:off x="2733354" y="8668511"/>
-            <a:ext cx="2093274" cy="384048"/>
-          </a:xfrm>
-          <a:prstGeom prst="roundRect">
-            <a:avLst>
-              <a:gd name="adj" fmla="val 50000"/>
-            </a:avLst>
-          </a:prstGeom>
-          <a:solidFill>
-            <a:srgbClr val="0F1626"/>
-          </a:solidFill>
-          <a:ln>
-            <a:noFill/>
-          </a:ln>
-          <a:effectLst/>
-        </p:spPr>
-        <p:style>
-          <a:lnRef idx="1">
-            <a:schemeClr val="accent1"/>
-          </a:lnRef>
-          <a:fillRef idx="3">
-            <a:schemeClr val="accent1"/>
-          </a:fillRef>
-          <a:effectRef idx="2">
-            <a:schemeClr val="accent1"/>
-          </a:effectRef>
-          <a:fontRef idx="minor">
-            <a:schemeClr val="lt1"/>
-          </a:fontRef>
-        </p:style>
-        <p:txBody>
-          <a:bodyPr rtlCol="0" anchor="ctr"/>
-          <a:lstStyle/>
-          <a:p>
-            <a:pPr algn="ctr"/>
-            <a:endParaRPr/>
-          </a:p>
-        </p:txBody>
-      </p:sp>
-      <p:sp>
-        <p:nvSpPr>
-          <p:cNvPr id="55" name="TextBox 54"/>
-          <p:cNvSpPr txBox="1"/>
-          <p:nvPr/>
-        </p:nvSpPr>
-        <p:spPr>
-          <a:xfrm>
-            <a:off x="2733354" y="8668511"/>
-            <a:ext cx="2093274" cy="384048"/>
-          </a:xfrm>
-          <a:prstGeom prst="rect">
-            <a:avLst/>
-          </a:prstGeom>
-          <a:noFill/>
-        </p:spPr>
-        <p:txBody>
-          <a:bodyPr wrap="square" lIns="0" tIns="0" rIns="0" bIns="0" anchor="ctr">
-            <a:spAutoFit/>
-          </a:bodyPr>
-          <a:lstStyle/>
-          <a:p>
-            <a:pPr algn="ctr">
-              <a:spcAft>
-                <a:spcPts val="0"/>
-              </a:spcAft>
-            </a:pPr>
-            <a:r>
-              <a:rPr sz="1100" b="1" i="0">
-                <a:solidFill>
-                  <a:srgbClr val="FFFFFF"/>
-                </a:solidFill>
-                <a:latin typeface="Malgun Gothic"/>
-                <a:ea typeface="Malgun Gothic"/>
-                <a:cs typeface="Malgun Gothic"/>
-              </a:rPr>
-              <a:t>JSONL 동결</a:t>
-            </a:r>
-          </a:p>
-        </p:txBody>
-      </p:sp>
-      <p:sp>
-        <p:nvSpPr>
-          <p:cNvPr id="56" name="Rounded Rectangle 55"/>
-          <p:cNvSpPr/>
-          <p:nvPr/>
-        </p:nvSpPr>
-        <p:spPr>
-          <a:xfrm>
-            <a:off x="5009509" y="8668511"/>
-            <a:ext cx="2093274" cy="384048"/>
-          </a:xfrm>
-          <a:prstGeom prst="roundRect">
-            <a:avLst>
-              <a:gd name="adj" fmla="val 50000"/>
-            </a:avLst>
-          </a:prstGeom>
-          <a:solidFill>
-            <a:srgbClr val="0F1626"/>
-          </a:solidFill>
-          <a:ln>
-            <a:noFill/>
-          </a:ln>
-          <a:effectLst/>
-        </p:spPr>
-        <p:style>
-          <a:lnRef idx="1">
-            <a:schemeClr val="accent1"/>
-          </a:lnRef>
-          <a:fillRef idx="3">
-            <a:schemeClr val="accent1"/>
-          </a:fillRef>
-          <a:effectRef idx="2">
-            <a:schemeClr val="accent1"/>
-          </a:effectRef>
-          <a:fontRef idx="minor">
-            <a:schemeClr val="lt1"/>
-          </a:fontRef>
-        </p:style>
-        <p:txBody>
-          <a:bodyPr rtlCol="0" anchor="ctr"/>
-          <a:lstStyle/>
-          <a:p>
-            <a:pPr algn="ctr"/>
-            <a:endParaRPr/>
-          </a:p>
-        </p:txBody>
-      </p:sp>
-      <p:sp>
-        <p:nvSpPr>
-          <p:cNvPr id="57" name="TextBox 56"/>
-          <p:cNvSpPr txBox="1"/>
-          <p:nvPr/>
-        </p:nvSpPr>
-        <p:spPr>
-          <a:xfrm>
-            <a:off x="5009509" y="8668511"/>
-            <a:ext cx="2093274" cy="384048"/>
-          </a:xfrm>
-          <a:prstGeom prst="rect">
-            <a:avLst/>
-          </a:prstGeom>
-          <a:noFill/>
-        </p:spPr>
-        <p:txBody>
-          <a:bodyPr wrap="square" lIns="0" tIns="0" rIns="0" bIns="0" anchor="ctr">
-            <a:spAutoFit/>
-          </a:bodyPr>
-          <a:lstStyle/>
-          <a:p>
-            <a:pPr algn="ctr">
-              <a:spcAft>
-                <a:spcPts val="0"/>
-              </a:spcAft>
-            </a:pPr>
-            <a:r>
-              <a:rPr sz="1100" b="1" i="0">
-                <a:solidFill>
-                  <a:srgbClr val="FFFFFF"/>
-                </a:solidFill>
-                <a:latin typeface="Malgun Gothic"/>
-                <a:ea typeface="Malgun Gothic"/>
-                <a:cs typeface="Malgun Gothic"/>
-              </a:rPr>
-              <a:t>데이터 보존</a:t>
-            </a:r>
-          </a:p>
-        </p:txBody>
-      </p:sp>
-      <p:sp>
-        <p:nvSpPr>
-          <p:cNvPr id="58" name="TextBox 57"/>
-          <p:cNvSpPr txBox="1"/>
-          <p:nvPr/>
-        </p:nvSpPr>
-        <p:spPr>
-          <a:xfrm>
-            <a:off x="457200" y="10271363"/>
-            <a:ext cx="6096944" cy="274320"/>
-          </a:xfrm>
-          <a:prstGeom prst="rect">
-            <a:avLst/>
-          </a:prstGeom>
-          <a:noFill/>
-        </p:spPr>
-        <p:txBody>
-          <a:bodyPr wrap="square" lIns="73152" tIns="0" rIns="73152" bIns="0" anchor="ctr">
-            <a:spAutoFit/>
-          </a:bodyPr>
-          <a:lstStyle/>
-          <a:p>
-            <a:pPr algn="l">
-              <a:spcAft>
-                <a:spcPts val="0"/>
-              </a:spcAft>
-            </a:pPr>
-            <a:r>
-              <a:rPr sz="850" b="1" i="0">
-                <a:solidFill>
-                  <a:srgbClr val="181F2B"/>
-                </a:solidFill>
                 <a:latin typeface="Cambria"/>
                 <a:ea typeface="Malgun Gothic"/>
                 <a:cs typeface="Cambria"/>
@@ -9451,7 +9178,7 @@
       </p:sp>
       <p:sp>
         <p:nvSpPr>
-          <p:cNvPr id="59" name="TextBox 58"/>
+          <p:cNvPr id="61" name="TextBox 60"/>
           <p:cNvSpPr txBox="1"/>
           <p:nvPr/>
         </p:nvSpPr>
@@ -9485,2222 +9212,7 @@
                 <a:ea typeface="Malgun Gothic"/>
                 <a:cs typeface="Cambria"/>
               </a:rPr>
-              <a:t>3 / 4</a:t>
-            </a:r>
-          </a:p>
-        </p:txBody>
-      </p:sp>
-    </p:spTree>
-  </p:cSld>
-  <p:clrMapOvr>
-    <a:masterClrMapping/>
-  </p:clrMapOvr>
-</p:sld>
-</file>
-
-<file path=ppt/slides/slide4.xml><?xml version="1.0" encoding="utf-8"?>
-<p:sld xmlns:a="http://schemas.openxmlformats.org/drawingml/2006/main" xmlns:r="http://schemas.openxmlformats.org/officeDocument/2006/relationships" xmlns:p="http://schemas.openxmlformats.org/presentationml/2006/main">
-  <p:cSld>
-    <p:bg>
-      <p:bgPr>
-        <a:solidFill>
-          <a:srgbClr val="FFFFFF"/>
-        </a:solidFill>
-        <a:effectLst/>
-      </p:bgPr>
-    </p:bg>
-    <p:spTree>
-      <p:nvGrpSpPr>
-        <p:cNvPr id="1" name=""/>
-        <p:cNvGrpSpPr/>
-        <p:nvPr/>
-      </p:nvGrpSpPr>
-      <p:grpSpPr>
-        <a:xfrm>
-          <a:off x="0" y="0"/>
-          <a:ext cx="0" cy="0"/>
-          <a:chOff x="0" y="0"/>
-          <a:chExt cx="0" cy="0"/>
-        </a:xfrm>
-      </p:grpSpPr>
-      <p:sp>
-        <p:nvSpPr>
-          <p:cNvPr id="2" name="Oval 1"/>
-          <p:cNvSpPr/>
-          <p:nvPr/>
-        </p:nvSpPr>
-        <p:spPr>
-          <a:xfrm>
-            <a:off x="457200" y="566928"/>
-            <a:ext cx="420624" cy="420624"/>
-          </a:xfrm>
-          <a:prstGeom prst="ellipse">
-            <a:avLst/>
-          </a:prstGeom>
-          <a:solidFill>
-            <a:srgbClr val="E4002B"/>
-          </a:solidFill>
-          <a:ln>
-            <a:noFill/>
-          </a:ln>
-          <a:effectLst/>
-        </p:spPr>
-        <p:style>
-          <a:lnRef idx="1">
-            <a:schemeClr val="accent1"/>
-          </a:lnRef>
-          <a:fillRef idx="3">
-            <a:schemeClr val="accent1"/>
-          </a:fillRef>
-          <a:effectRef idx="2">
-            <a:schemeClr val="accent1"/>
-          </a:effectRef>
-          <a:fontRef idx="minor">
-            <a:schemeClr val="lt1"/>
-          </a:fontRef>
-        </p:style>
-        <p:txBody>
-          <a:bodyPr wrap="none" lIns="0" tIns="0" rIns="0" bIns="0" rtlCol="0" anchor="ctr"/>
-          <a:lstStyle/>
-          <a:p>
-            <a:pPr algn="ctr"/>
-            <a:r>
-              <a:rPr sz="1600" b="1" i="0">
-                <a:solidFill>
-                  <a:srgbClr val="FFFFFF"/>
-                </a:solidFill>
-                <a:latin typeface="Cambria"/>
-                <a:ea typeface="Malgun Gothic"/>
-                <a:cs typeface="Cambria"/>
-              </a:rPr>
-              <a:t>04</a:t>
-            </a:r>
-          </a:p>
-        </p:txBody>
-      </p:sp>
-      <p:sp>
-        <p:nvSpPr>
-          <p:cNvPr id="3" name="TextBox 2"/>
-          <p:cNvSpPr txBox="1"/>
-          <p:nvPr/>
-        </p:nvSpPr>
-        <p:spPr>
-          <a:xfrm>
-            <a:off x="1005840" y="530352"/>
-            <a:ext cx="6042080" cy="256032"/>
-          </a:xfrm>
-          <a:prstGeom prst="rect">
-            <a:avLst/>
-          </a:prstGeom>
-          <a:noFill/>
-        </p:spPr>
-        <p:txBody>
-          <a:bodyPr wrap="square" lIns="73152" tIns="0" rIns="73152" bIns="0" anchor="t">
-            <a:spAutoFit/>
-          </a:bodyPr>
-          <a:lstStyle/>
-          <a:p>
-            <a:pPr algn="l">
-              <a:spcAft>
-                <a:spcPts val="0"/>
-              </a:spcAft>
-            </a:pPr>
-            <a:r>
-              <a:rPr sz="1100" b="1" i="0" spc="60">
-                <a:solidFill>
-                  <a:srgbClr val="E4002B"/>
-                </a:solidFill>
-                <a:latin typeface="Malgun Gothic"/>
-                <a:ea typeface="Malgun Gothic"/>
-                <a:cs typeface="Malgun Gothic"/>
-              </a:rPr>
-              <a:t>기술 스택 &amp; 결과</a:t>
-            </a:r>
-          </a:p>
-        </p:txBody>
-      </p:sp>
-      <p:sp>
-        <p:nvSpPr>
-          <p:cNvPr id="4" name="TextBox 3"/>
-          <p:cNvSpPr txBox="1"/>
-          <p:nvPr/>
-        </p:nvSpPr>
-        <p:spPr>
-          <a:xfrm>
-            <a:off x="1005840" y="713232"/>
-            <a:ext cx="6042080" cy="365760"/>
-          </a:xfrm>
-          <a:prstGeom prst="rect">
-            <a:avLst/>
-          </a:prstGeom>
-          <a:noFill/>
-        </p:spPr>
-        <p:txBody>
-          <a:bodyPr wrap="square" lIns="73152" tIns="0" rIns="73152" bIns="0" anchor="t">
-            <a:spAutoFit/>
-          </a:bodyPr>
-          <a:lstStyle/>
-          <a:p>
-            <a:pPr algn="l">
-              <a:spcAft>
-                <a:spcPts val="0"/>
-              </a:spcAft>
-            </a:pPr>
-            <a:r>
-              <a:rPr sz="2100" b="1" i="0">
-                <a:solidFill>
-                  <a:srgbClr val="181F2B"/>
-                </a:solidFill>
-                <a:latin typeface="Malgun Gothic"/>
-                <a:ea typeface="Malgun Gothic"/>
-                <a:cs typeface="Malgun Gothic"/>
-              </a:rPr>
-              <a:t>무엇으로 만들었고, 무엇을 이뤘는가</a:t>
-            </a:r>
-          </a:p>
-        </p:txBody>
-      </p:sp>
-      <p:sp>
-        <p:nvSpPr>
-          <p:cNvPr id="5" name="Rounded Rectangle 4"/>
-          <p:cNvSpPr/>
-          <p:nvPr/>
-        </p:nvSpPr>
-        <p:spPr>
-          <a:xfrm>
-            <a:off x="457200" y="1417320"/>
-            <a:ext cx="2044506" cy="4160520"/>
-          </a:xfrm>
-          <a:prstGeom prst="roundRect">
-            <a:avLst>
-              <a:gd name="adj" fmla="val 4500"/>
-            </a:avLst>
-          </a:prstGeom>
-          <a:solidFill>
-            <a:srgbClr val="F3F5F8"/>
-          </a:solidFill>
-          <a:ln w="12700">
-            <a:solidFill>
-              <a:srgbClr val="E7ECF2"/>
-            </a:solidFill>
-          </a:ln>
-          <a:effectLst/>
-        </p:spPr>
-        <p:style>
-          <a:lnRef idx="1">
-            <a:schemeClr val="accent1"/>
-          </a:lnRef>
-          <a:fillRef idx="3">
-            <a:schemeClr val="accent1"/>
-          </a:fillRef>
-          <a:effectRef idx="2">
-            <a:schemeClr val="accent1"/>
-          </a:effectRef>
-          <a:fontRef idx="minor">
-            <a:schemeClr val="lt1"/>
-          </a:fontRef>
-        </p:style>
-        <p:txBody>
-          <a:bodyPr rtlCol="0" anchor="ctr"/>
-          <a:lstStyle/>
-          <a:p>
-            <a:pPr algn="ctr"/>
-            <a:endParaRPr/>
-          </a:p>
-        </p:txBody>
-      </p:sp>
-      <p:sp>
-        <p:nvSpPr>
-          <p:cNvPr id="6" name="Rounded Rectangle 5"/>
-          <p:cNvSpPr/>
-          <p:nvPr/>
-        </p:nvSpPr>
-        <p:spPr>
-          <a:xfrm>
-            <a:off x="621792" y="1600200"/>
-            <a:ext cx="1715322" cy="365760"/>
-          </a:xfrm>
-          <a:prstGeom prst="roundRect">
-            <a:avLst>
-              <a:gd name="adj" fmla="val 30000"/>
-            </a:avLst>
-          </a:prstGeom>
-          <a:solidFill>
-            <a:srgbClr val="E4002B"/>
-          </a:solidFill>
-          <a:ln>
-            <a:noFill/>
-          </a:ln>
-          <a:effectLst/>
-        </p:spPr>
-        <p:style>
-          <a:lnRef idx="1">
-            <a:schemeClr val="accent1"/>
-          </a:lnRef>
-          <a:fillRef idx="3">
-            <a:schemeClr val="accent1"/>
-          </a:fillRef>
-          <a:effectRef idx="2">
-            <a:schemeClr val="accent1"/>
-          </a:effectRef>
-          <a:fontRef idx="minor">
-            <a:schemeClr val="lt1"/>
-          </a:fontRef>
-        </p:style>
-        <p:txBody>
-          <a:bodyPr rtlCol="0" anchor="ctr"/>
-          <a:lstStyle/>
-          <a:p>
-            <a:pPr algn="ctr"/>
-            <a:endParaRPr/>
-          </a:p>
-        </p:txBody>
-      </p:sp>
-      <p:sp>
-        <p:nvSpPr>
-          <p:cNvPr id="7" name="TextBox 6"/>
-          <p:cNvSpPr txBox="1"/>
-          <p:nvPr/>
-        </p:nvSpPr>
-        <p:spPr>
-          <a:xfrm>
-            <a:off x="621792" y="1600200"/>
-            <a:ext cx="1715322" cy="365760"/>
-          </a:xfrm>
-          <a:prstGeom prst="rect">
-            <a:avLst/>
-          </a:prstGeom>
-          <a:noFill/>
-        </p:spPr>
-        <p:txBody>
-          <a:bodyPr wrap="square" lIns="0" tIns="0" rIns="0" bIns="0" anchor="ctr">
-            <a:spAutoFit/>
-          </a:bodyPr>
-          <a:lstStyle/>
-          <a:p>
-            <a:pPr algn="ctr">
-              <a:spcAft>
-                <a:spcPts val="0"/>
-              </a:spcAft>
-            </a:pPr>
-            <a:r>
-              <a:rPr sz="1100" b="1" i="0" spc="40">
-                <a:solidFill>
-                  <a:srgbClr val="FFFFFF"/>
-                </a:solidFill>
-                <a:latin typeface="Calibri"/>
-                <a:ea typeface="Malgun Gothic"/>
-                <a:cs typeface="Calibri"/>
-              </a:rPr>
-              <a:t>FRONTEND</a:t>
-            </a:r>
-          </a:p>
-        </p:txBody>
-      </p:sp>
-      <p:sp>
-        <p:nvSpPr>
-          <p:cNvPr id="8" name="TextBox 7"/>
-          <p:cNvSpPr txBox="1"/>
-          <p:nvPr/>
-        </p:nvSpPr>
-        <p:spPr>
-          <a:xfrm>
-            <a:off x="640080" y="2130552"/>
-            <a:ext cx="1715322" cy="548640"/>
-          </a:xfrm>
-          <a:prstGeom prst="rect">
-            <a:avLst/>
-          </a:prstGeom>
-          <a:noFill/>
-        </p:spPr>
-        <p:txBody>
-          <a:bodyPr wrap="square" lIns="73152" tIns="0" rIns="73152" bIns="0" anchor="t">
-            <a:spAutoFit/>
-          </a:bodyPr>
-          <a:lstStyle/>
-          <a:p>
-            <a:pPr algn="l">
-              <a:lnSpc>
-                <a:spcPct val="100000"/>
-              </a:lnSpc>
-              <a:spcAft>
-                <a:spcPts val="0"/>
-              </a:spcAft>
-            </a:pPr>
-            <a:r>
-              <a:rPr sz="900" b="1" i="0">
-                <a:solidFill>
-                  <a:srgbClr val="E4002B"/>
-                </a:solidFill>
-                <a:latin typeface="Calibri"/>
-                <a:ea typeface="Malgun Gothic"/>
-                <a:cs typeface="Calibri"/>
-              </a:rPr>
-              <a:t>● </a:t>
-            </a:r>
-            <a:r>
-              <a:rPr sz="1100" b="0" i="0">
-                <a:solidFill>
-                  <a:srgbClr val="181F2B"/>
-                </a:solidFill>
-                <a:latin typeface="Calibri"/>
-                <a:ea typeface="Malgun Gothic"/>
-                <a:cs typeface="Calibri"/>
-              </a:rPr>
-              <a:t>VS Code Extension API</a:t>
-            </a:r>
-          </a:p>
-        </p:txBody>
-      </p:sp>
-      <p:sp>
-        <p:nvSpPr>
-          <p:cNvPr id="9" name="TextBox 8"/>
-          <p:cNvSpPr txBox="1"/>
-          <p:nvPr/>
-        </p:nvSpPr>
-        <p:spPr>
-          <a:xfrm>
-            <a:off x="640080" y="2679192"/>
-            <a:ext cx="1715322" cy="548640"/>
-          </a:xfrm>
-          <a:prstGeom prst="rect">
-            <a:avLst/>
-          </a:prstGeom>
-          <a:noFill/>
-        </p:spPr>
-        <p:txBody>
-          <a:bodyPr wrap="square" lIns="73152" tIns="0" rIns="73152" bIns="0" anchor="t">
-            <a:spAutoFit/>
-          </a:bodyPr>
-          <a:lstStyle/>
-          <a:p>
-            <a:pPr algn="l">
-              <a:lnSpc>
-                <a:spcPct val="100000"/>
-              </a:lnSpc>
-              <a:spcAft>
-                <a:spcPts val="0"/>
-              </a:spcAft>
-            </a:pPr>
-            <a:r>
-              <a:rPr sz="900" b="1" i="0">
-                <a:solidFill>
-                  <a:srgbClr val="E4002B"/>
-                </a:solidFill>
-                <a:latin typeface="Calibri"/>
-                <a:ea typeface="Malgun Gothic"/>
-                <a:cs typeface="Calibri"/>
-              </a:rPr>
-              <a:t>● </a:t>
-            </a:r>
-            <a:r>
-              <a:rPr sz="1100" b="0" i="0">
-                <a:solidFill>
-                  <a:srgbClr val="181F2B"/>
-                </a:solidFill>
-                <a:latin typeface="Calibri"/>
-                <a:ea typeface="Malgun Gothic"/>
-                <a:cs typeface="Calibri"/>
-              </a:rPr>
-              <a:t>Chat Participant API</a:t>
-            </a:r>
-          </a:p>
-        </p:txBody>
-      </p:sp>
-      <p:sp>
-        <p:nvSpPr>
-          <p:cNvPr id="10" name="TextBox 9"/>
-          <p:cNvSpPr txBox="1"/>
-          <p:nvPr/>
-        </p:nvSpPr>
-        <p:spPr>
-          <a:xfrm>
-            <a:off x="640080" y="3227832"/>
-            <a:ext cx="1715322" cy="548640"/>
-          </a:xfrm>
-          <a:prstGeom prst="rect">
-            <a:avLst/>
-          </a:prstGeom>
-          <a:noFill/>
-        </p:spPr>
-        <p:txBody>
-          <a:bodyPr wrap="square" lIns="73152" tIns="0" rIns="73152" bIns="0" anchor="t">
-            <a:spAutoFit/>
-          </a:bodyPr>
-          <a:lstStyle/>
-          <a:p>
-            <a:pPr algn="l">
-              <a:lnSpc>
-                <a:spcPct val="100000"/>
-              </a:lnSpc>
-              <a:spcAft>
-                <a:spcPts val="0"/>
-              </a:spcAft>
-            </a:pPr>
-            <a:r>
-              <a:rPr sz="900" b="1" i="0">
-                <a:solidFill>
-                  <a:srgbClr val="E4002B"/>
-                </a:solidFill>
-                <a:latin typeface="Calibri"/>
-                <a:ea typeface="Malgun Gothic"/>
-                <a:cs typeface="Calibri"/>
-              </a:rPr>
-              <a:t>● </a:t>
-            </a:r>
-            <a:r>
-              <a:rPr sz="1100" b="0" i="0">
-                <a:solidFill>
-                  <a:srgbClr val="181F2B"/>
-                </a:solidFill>
-                <a:latin typeface="Calibri"/>
-                <a:ea typeface="Malgun Gothic"/>
-                <a:cs typeface="Calibri"/>
-              </a:rPr>
-              <a:t>WebviewView + CSP</a:t>
-            </a:r>
-          </a:p>
-        </p:txBody>
-      </p:sp>
-      <p:sp>
-        <p:nvSpPr>
-          <p:cNvPr id="11" name="TextBox 10"/>
-          <p:cNvSpPr txBox="1"/>
-          <p:nvPr/>
-        </p:nvSpPr>
-        <p:spPr>
-          <a:xfrm>
-            <a:off x="640080" y="3776472"/>
-            <a:ext cx="1715322" cy="548640"/>
-          </a:xfrm>
-          <a:prstGeom prst="rect">
-            <a:avLst/>
-          </a:prstGeom>
-          <a:noFill/>
-        </p:spPr>
-        <p:txBody>
-          <a:bodyPr wrap="square" lIns="73152" tIns="0" rIns="73152" bIns="0" anchor="t">
-            <a:spAutoFit/>
-          </a:bodyPr>
-          <a:lstStyle/>
-          <a:p>
-            <a:pPr algn="l">
-              <a:lnSpc>
-                <a:spcPct val="100000"/>
-              </a:lnSpc>
-              <a:spcAft>
-                <a:spcPts val="0"/>
-              </a:spcAft>
-            </a:pPr>
-            <a:r>
-              <a:rPr sz="900" b="1" i="0">
-                <a:solidFill>
-                  <a:srgbClr val="E4002B"/>
-                </a:solidFill>
-                <a:latin typeface="Calibri"/>
-                <a:ea typeface="Malgun Gothic"/>
-                <a:cs typeface="Calibri"/>
-              </a:rPr>
-              <a:t>● </a:t>
-            </a:r>
-            <a:r>
-              <a:rPr sz="1100" b="0" i="0">
-                <a:solidFill>
-                  <a:srgbClr val="181F2B"/>
-                </a:solidFill>
-                <a:latin typeface="Calibri"/>
-                <a:ea typeface="Malgun Gothic"/>
-                <a:cs typeface="Calibri"/>
-              </a:rPr>
-              <a:t>Node http / https / fs</a:t>
-            </a:r>
-          </a:p>
-        </p:txBody>
-      </p:sp>
-      <p:sp>
-        <p:nvSpPr>
-          <p:cNvPr id="12" name="TextBox 11"/>
-          <p:cNvSpPr txBox="1"/>
-          <p:nvPr/>
-        </p:nvSpPr>
-        <p:spPr>
-          <a:xfrm>
-            <a:off x="640080" y="4325112"/>
-            <a:ext cx="1715322" cy="548640"/>
-          </a:xfrm>
-          <a:prstGeom prst="rect">
-            <a:avLst/>
-          </a:prstGeom>
-          <a:noFill/>
-        </p:spPr>
-        <p:txBody>
-          <a:bodyPr wrap="square" lIns="73152" tIns="0" rIns="73152" bIns="0" anchor="t">
-            <a:spAutoFit/>
-          </a:bodyPr>
-          <a:lstStyle/>
-          <a:p>
-            <a:pPr algn="l">
-              <a:lnSpc>
-                <a:spcPct val="100000"/>
-              </a:lnSpc>
-              <a:spcAft>
-                <a:spcPts val="0"/>
-              </a:spcAft>
-            </a:pPr>
-            <a:r>
-              <a:rPr sz="900" b="1" i="0">
-                <a:solidFill>
-                  <a:srgbClr val="E4002B"/>
-                </a:solidFill>
-                <a:latin typeface="Calibri"/>
-                <a:ea typeface="Malgun Gothic"/>
-                <a:cs typeface="Calibri"/>
-              </a:rPr>
-              <a:t>● </a:t>
-            </a:r>
-            <a:r>
-              <a:rPr sz="1100" b="0" i="0">
-                <a:solidFill>
-                  <a:srgbClr val="181F2B"/>
-                </a:solidFill>
-                <a:latin typeface="Calibri"/>
-                <a:ea typeface="Malgun Gothic"/>
-                <a:cs typeface="Calibri"/>
-              </a:rPr>
-              <a:t>JSONL · @vscode/vsce</a:t>
-            </a:r>
-          </a:p>
-        </p:txBody>
-      </p:sp>
-      <p:sp>
-        <p:nvSpPr>
-          <p:cNvPr id="13" name="TextBox 12"/>
-          <p:cNvSpPr txBox="1"/>
-          <p:nvPr/>
-        </p:nvSpPr>
-        <p:spPr>
-          <a:xfrm>
-            <a:off x="640080" y="4873751"/>
-            <a:ext cx="1715322" cy="548640"/>
-          </a:xfrm>
-          <a:prstGeom prst="rect">
-            <a:avLst/>
-          </a:prstGeom>
-          <a:noFill/>
-        </p:spPr>
-        <p:txBody>
-          <a:bodyPr wrap="square" lIns="73152" tIns="0" rIns="73152" bIns="0" anchor="t">
-            <a:spAutoFit/>
-          </a:bodyPr>
-          <a:lstStyle/>
-          <a:p>
-            <a:pPr algn="l">
-              <a:lnSpc>
-                <a:spcPct val="100000"/>
-              </a:lnSpc>
-              <a:spcAft>
-                <a:spcPts val="0"/>
-              </a:spcAft>
-            </a:pPr>
-            <a:r>
-              <a:rPr sz="900" b="1" i="0">
-                <a:solidFill>
-                  <a:srgbClr val="E4002B"/>
-                </a:solidFill>
-                <a:latin typeface="Calibri"/>
-                <a:ea typeface="Malgun Gothic"/>
-                <a:cs typeface="Calibri"/>
-              </a:rPr>
-              <a:t>● </a:t>
-            </a:r>
-            <a:r>
-              <a:rPr sz="1100" b="0" i="0">
-                <a:solidFill>
-                  <a:srgbClr val="181F2B"/>
-                </a:solidFill>
-                <a:latin typeface="Malgun Gothic"/>
-                <a:ea typeface="Malgun Gothic"/>
-                <a:cs typeface="Malgun Gothic"/>
-              </a:rPr>
-              <a:t>런타임 의존성 0</a:t>
-            </a:r>
-          </a:p>
-        </p:txBody>
-      </p:sp>
-      <p:sp>
-        <p:nvSpPr>
-          <p:cNvPr id="14" name="Rounded Rectangle 13"/>
-          <p:cNvSpPr/>
-          <p:nvPr/>
-        </p:nvSpPr>
-        <p:spPr>
-          <a:xfrm>
-            <a:off x="2757738" y="1417320"/>
-            <a:ext cx="2044506" cy="4160520"/>
-          </a:xfrm>
-          <a:prstGeom prst="roundRect">
-            <a:avLst>
-              <a:gd name="adj" fmla="val 4500"/>
-            </a:avLst>
-          </a:prstGeom>
-          <a:solidFill>
-            <a:srgbClr val="F3F5F8"/>
-          </a:solidFill>
-          <a:ln w="12700">
-            <a:solidFill>
-              <a:srgbClr val="E7ECF2"/>
-            </a:solidFill>
-          </a:ln>
-          <a:effectLst/>
-        </p:spPr>
-        <p:style>
-          <a:lnRef idx="1">
-            <a:schemeClr val="accent1"/>
-          </a:lnRef>
-          <a:fillRef idx="3">
-            <a:schemeClr val="accent1"/>
-          </a:fillRef>
-          <a:effectRef idx="2">
-            <a:schemeClr val="accent1"/>
-          </a:effectRef>
-          <a:fontRef idx="minor">
-            <a:schemeClr val="lt1"/>
-          </a:fontRef>
-        </p:style>
-        <p:txBody>
-          <a:bodyPr rtlCol="0" anchor="ctr"/>
-          <a:lstStyle/>
-          <a:p>
-            <a:pPr algn="ctr"/>
-            <a:endParaRPr/>
-          </a:p>
-        </p:txBody>
-      </p:sp>
-      <p:sp>
-        <p:nvSpPr>
-          <p:cNvPr id="15" name="Rounded Rectangle 14"/>
-          <p:cNvSpPr/>
-          <p:nvPr/>
-        </p:nvSpPr>
-        <p:spPr>
-          <a:xfrm>
-            <a:off x="2922330" y="1600200"/>
-            <a:ext cx="1715322" cy="365760"/>
-          </a:xfrm>
-          <a:prstGeom prst="roundRect">
-            <a:avLst>
-              <a:gd name="adj" fmla="val 30000"/>
-            </a:avLst>
-          </a:prstGeom>
-          <a:solidFill>
-            <a:srgbClr val="E4002B"/>
-          </a:solidFill>
-          <a:ln>
-            <a:noFill/>
-          </a:ln>
-          <a:effectLst/>
-        </p:spPr>
-        <p:style>
-          <a:lnRef idx="1">
-            <a:schemeClr val="accent1"/>
-          </a:lnRef>
-          <a:fillRef idx="3">
-            <a:schemeClr val="accent1"/>
-          </a:fillRef>
-          <a:effectRef idx="2">
-            <a:schemeClr val="accent1"/>
-          </a:effectRef>
-          <a:fontRef idx="minor">
-            <a:schemeClr val="lt1"/>
-          </a:fontRef>
-        </p:style>
-        <p:txBody>
-          <a:bodyPr rtlCol="0" anchor="ctr"/>
-          <a:lstStyle/>
-          <a:p>
-            <a:pPr algn="ctr"/>
-            <a:endParaRPr/>
-          </a:p>
-        </p:txBody>
-      </p:sp>
-      <p:sp>
-        <p:nvSpPr>
-          <p:cNvPr id="16" name="TextBox 15"/>
-          <p:cNvSpPr txBox="1"/>
-          <p:nvPr/>
-        </p:nvSpPr>
-        <p:spPr>
-          <a:xfrm>
-            <a:off x="2922330" y="1600200"/>
-            <a:ext cx="1715322" cy="365760"/>
-          </a:xfrm>
-          <a:prstGeom prst="rect">
-            <a:avLst/>
-          </a:prstGeom>
-          <a:noFill/>
-        </p:spPr>
-        <p:txBody>
-          <a:bodyPr wrap="square" lIns="0" tIns="0" rIns="0" bIns="0" anchor="ctr">
-            <a:spAutoFit/>
-          </a:bodyPr>
-          <a:lstStyle/>
-          <a:p>
-            <a:pPr algn="ctr">
-              <a:spcAft>
-                <a:spcPts val="0"/>
-              </a:spcAft>
-            </a:pPr>
-            <a:r>
-              <a:rPr sz="1100" b="1" i="0" spc="40">
-                <a:solidFill>
-                  <a:srgbClr val="FFFFFF"/>
-                </a:solidFill>
-                <a:latin typeface="Calibri"/>
-                <a:ea typeface="Malgun Gothic"/>
-                <a:cs typeface="Calibri"/>
-              </a:rPr>
-              <a:t>BACKEND</a:t>
-            </a:r>
-          </a:p>
-        </p:txBody>
-      </p:sp>
-      <p:sp>
-        <p:nvSpPr>
-          <p:cNvPr id="17" name="TextBox 16"/>
-          <p:cNvSpPr txBox="1"/>
-          <p:nvPr/>
-        </p:nvSpPr>
-        <p:spPr>
-          <a:xfrm>
-            <a:off x="2940618" y="2130552"/>
-            <a:ext cx="1715322" cy="548640"/>
-          </a:xfrm>
-          <a:prstGeom prst="rect">
-            <a:avLst/>
-          </a:prstGeom>
-          <a:noFill/>
-        </p:spPr>
-        <p:txBody>
-          <a:bodyPr wrap="square" lIns="73152" tIns="0" rIns="73152" bIns="0" anchor="t">
-            <a:spAutoFit/>
-          </a:bodyPr>
-          <a:lstStyle/>
-          <a:p>
-            <a:pPr algn="l">
-              <a:lnSpc>
-                <a:spcPct val="100000"/>
-              </a:lnSpc>
-              <a:spcAft>
-                <a:spcPts val="0"/>
-              </a:spcAft>
-            </a:pPr>
-            <a:r>
-              <a:rPr sz="900" b="1" i="0">
-                <a:solidFill>
-                  <a:srgbClr val="E4002B"/>
-                </a:solidFill>
-                <a:latin typeface="Calibri"/>
-                <a:ea typeface="Malgun Gothic"/>
-                <a:cs typeface="Calibri"/>
-              </a:rPr>
-              <a:t>● </a:t>
-            </a:r>
-            <a:r>
-              <a:rPr sz="1100" b="0" i="0">
-                <a:solidFill>
-                  <a:srgbClr val="181F2B"/>
-                </a:solidFill>
-                <a:latin typeface="Calibri"/>
-                <a:ea typeface="Malgun Gothic"/>
-                <a:cs typeface="Calibri"/>
-              </a:rPr>
-              <a:t>FastAPI · uvicorn</a:t>
-            </a:r>
-          </a:p>
-        </p:txBody>
-      </p:sp>
-      <p:sp>
-        <p:nvSpPr>
-          <p:cNvPr id="18" name="TextBox 17"/>
-          <p:cNvSpPr txBox="1"/>
-          <p:nvPr/>
-        </p:nvSpPr>
-        <p:spPr>
-          <a:xfrm>
-            <a:off x="2940618" y="2679192"/>
-            <a:ext cx="1715322" cy="548640"/>
-          </a:xfrm>
-          <a:prstGeom prst="rect">
-            <a:avLst/>
-          </a:prstGeom>
-          <a:noFill/>
-        </p:spPr>
-        <p:txBody>
-          <a:bodyPr wrap="square" lIns="73152" tIns="0" rIns="73152" bIns="0" anchor="t">
-            <a:spAutoFit/>
-          </a:bodyPr>
-          <a:lstStyle/>
-          <a:p>
-            <a:pPr algn="l">
-              <a:lnSpc>
-                <a:spcPct val="100000"/>
-              </a:lnSpc>
-              <a:spcAft>
-                <a:spcPts val="0"/>
-              </a:spcAft>
-            </a:pPr>
-            <a:r>
-              <a:rPr sz="900" b="1" i="0">
-                <a:solidFill>
-                  <a:srgbClr val="E4002B"/>
-                </a:solidFill>
-                <a:latin typeface="Calibri"/>
-                <a:ea typeface="Malgun Gothic"/>
-                <a:cs typeface="Calibri"/>
-              </a:rPr>
-              <a:t>● </a:t>
-            </a:r>
-            <a:r>
-              <a:rPr sz="1100" b="0" i="0">
-                <a:solidFill>
-                  <a:srgbClr val="181F2B"/>
-                </a:solidFill>
-                <a:latin typeface="Calibri"/>
-                <a:ea typeface="Malgun Gothic"/>
-                <a:cs typeface="Calibri"/>
-              </a:rPr>
-              <a:t>requests</a:t>
-            </a:r>
-          </a:p>
-        </p:txBody>
-      </p:sp>
-      <p:sp>
-        <p:nvSpPr>
-          <p:cNvPr id="19" name="TextBox 18"/>
-          <p:cNvSpPr txBox="1"/>
-          <p:nvPr/>
-        </p:nvSpPr>
-        <p:spPr>
-          <a:xfrm>
-            <a:off x="2940618" y="3227832"/>
-            <a:ext cx="1715322" cy="548640"/>
-          </a:xfrm>
-          <a:prstGeom prst="rect">
-            <a:avLst/>
-          </a:prstGeom>
-          <a:noFill/>
-        </p:spPr>
-        <p:txBody>
-          <a:bodyPr wrap="square" lIns="73152" tIns="0" rIns="73152" bIns="0" anchor="t">
-            <a:spAutoFit/>
-          </a:bodyPr>
-          <a:lstStyle/>
-          <a:p>
-            <a:pPr algn="l">
-              <a:lnSpc>
-                <a:spcPct val="100000"/>
-              </a:lnSpc>
-              <a:spcAft>
-                <a:spcPts val="0"/>
-              </a:spcAft>
-            </a:pPr>
-            <a:r>
-              <a:rPr sz="900" b="1" i="0">
-                <a:solidFill>
-                  <a:srgbClr val="E4002B"/>
-                </a:solidFill>
-                <a:latin typeface="Calibri"/>
-                <a:ea typeface="Malgun Gothic"/>
-                <a:cs typeface="Calibri"/>
-              </a:rPr>
-              <a:t>● </a:t>
-            </a:r>
-            <a:r>
-              <a:rPr sz="1100" b="0" i="0">
-                <a:solidFill>
-                  <a:srgbClr val="181F2B"/>
-                </a:solidFill>
-                <a:latin typeface="Calibri"/>
-                <a:ea typeface="Malgun Gothic"/>
-                <a:cs typeface="Calibri"/>
-              </a:rPr>
-              <a:t>ChromaDB 1.5</a:t>
-            </a:r>
-          </a:p>
-        </p:txBody>
-      </p:sp>
-      <p:sp>
-        <p:nvSpPr>
-          <p:cNvPr id="20" name="TextBox 19"/>
-          <p:cNvSpPr txBox="1"/>
-          <p:nvPr/>
-        </p:nvSpPr>
-        <p:spPr>
-          <a:xfrm>
-            <a:off x="2940618" y="3776472"/>
-            <a:ext cx="1715322" cy="548640"/>
-          </a:xfrm>
-          <a:prstGeom prst="rect">
-            <a:avLst/>
-          </a:prstGeom>
-          <a:noFill/>
-        </p:spPr>
-        <p:txBody>
-          <a:bodyPr wrap="square" lIns="73152" tIns="0" rIns="73152" bIns="0" anchor="t">
-            <a:spAutoFit/>
-          </a:bodyPr>
-          <a:lstStyle/>
-          <a:p>
-            <a:pPr algn="l">
-              <a:lnSpc>
-                <a:spcPct val="100000"/>
-              </a:lnSpc>
-              <a:spcAft>
-                <a:spcPts val="0"/>
-              </a:spcAft>
-            </a:pPr>
-            <a:r>
-              <a:rPr sz="900" b="1" i="0">
-                <a:solidFill>
-                  <a:srgbClr val="E4002B"/>
-                </a:solidFill>
-                <a:latin typeface="Calibri"/>
-                <a:ea typeface="Malgun Gothic"/>
-                <a:cs typeface="Calibri"/>
-              </a:rPr>
-              <a:t>● </a:t>
-            </a:r>
-            <a:r>
-              <a:rPr sz="1100" b="0" i="0">
-                <a:solidFill>
-                  <a:srgbClr val="181F2B"/>
-                </a:solidFill>
-                <a:latin typeface="Calibri"/>
-                <a:ea typeface="Malgun Gothic"/>
-                <a:cs typeface="Calibri"/>
-              </a:rPr>
-              <a:t>OpenAI SDK 2.44</a:t>
-            </a:r>
-          </a:p>
-        </p:txBody>
-      </p:sp>
-      <p:sp>
-        <p:nvSpPr>
-          <p:cNvPr id="21" name="TextBox 20"/>
-          <p:cNvSpPr txBox="1"/>
-          <p:nvPr/>
-        </p:nvSpPr>
-        <p:spPr>
-          <a:xfrm>
-            <a:off x="2940618" y="4325112"/>
-            <a:ext cx="1715322" cy="548640"/>
-          </a:xfrm>
-          <a:prstGeom prst="rect">
-            <a:avLst/>
-          </a:prstGeom>
-          <a:noFill/>
-        </p:spPr>
-        <p:txBody>
-          <a:bodyPr wrap="square" lIns="73152" tIns="0" rIns="73152" bIns="0" anchor="t">
-            <a:spAutoFit/>
-          </a:bodyPr>
-          <a:lstStyle/>
-          <a:p>
-            <a:pPr algn="l">
-              <a:lnSpc>
-                <a:spcPct val="100000"/>
-              </a:lnSpc>
-              <a:spcAft>
-                <a:spcPts val="0"/>
-              </a:spcAft>
-            </a:pPr>
-            <a:r>
-              <a:rPr sz="900" b="1" i="0">
-                <a:solidFill>
-                  <a:srgbClr val="E4002B"/>
-                </a:solidFill>
-                <a:latin typeface="Calibri"/>
-                <a:ea typeface="Malgun Gothic"/>
-                <a:cs typeface="Calibri"/>
-              </a:rPr>
-              <a:t>● </a:t>
-            </a:r>
-            <a:r>
-              <a:rPr sz="1100" b="0" i="0">
-                <a:solidFill>
-                  <a:srgbClr val="181F2B"/>
-                </a:solidFill>
-                <a:latin typeface="Calibri"/>
-                <a:ea typeface="Malgun Gothic"/>
-                <a:cs typeface="Calibri"/>
-              </a:rPr>
-              <a:t>scikit-learn (viz)</a:t>
-            </a:r>
-          </a:p>
-        </p:txBody>
-      </p:sp>
-      <p:sp>
-        <p:nvSpPr>
-          <p:cNvPr id="22" name="TextBox 21"/>
-          <p:cNvSpPr txBox="1"/>
-          <p:nvPr/>
-        </p:nvSpPr>
-        <p:spPr>
-          <a:xfrm>
-            <a:off x="2940618" y="4873751"/>
-            <a:ext cx="1715322" cy="548640"/>
-          </a:xfrm>
-          <a:prstGeom prst="rect">
-            <a:avLst/>
-          </a:prstGeom>
-          <a:noFill/>
-        </p:spPr>
-        <p:txBody>
-          <a:bodyPr wrap="square" lIns="73152" tIns="0" rIns="73152" bIns="0" anchor="t">
-            <a:spAutoFit/>
-          </a:bodyPr>
-          <a:lstStyle/>
-          <a:p>
-            <a:pPr algn="l">
-              <a:lnSpc>
-                <a:spcPct val="100000"/>
-              </a:lnSpc>
-              <a:spcAft>
-                <a:spcPts val="0"/>
-              </a:spcAft>
-            </a:pPr>
-            <a:r>
-              <a:rPr sz="900" b="1" i="0">
-                <a:solidFill>
-                  <a:srgbClr val="E4002B"/>
-                </a:solidFill>
-                <a:latin typeface="Calibri"/>
-                <a:ea typeface="Malgun Gothic"/>
-                <a:cs typeface="Calibri"/>
-              </a:rPr>
-              <a:t>● </a:t>
-            </a:r>
-            <a:r>
-              <a:rPr sz="1100" b="0" i="0">
-                <a:solidFill>
-                  <a:srgbClr val="181F2B"/>
-                </a:solidFill>
-                <a:latin typeface="Malgun Gothic"/>
-                <a:ea typeface="Malgun Gothic"/>
-                <a:cs typeface="Malgun Gothic"/>
-              </a:rPr>
-              <a:t>버전 핀 고정</a:t>
-            </a:r>
-          </a:p>
-        </p:txBody>
-      </p:sp>
-      <p:sp>
-        <p:nvSpPr>
-          <p:cNvPr id="23" name="Rounded Rectangle 22"/>
-          <p:cNvSpPr/>
-          <p:nvPr/>
-        </p:nvSpPr>
-        <p:spPr>
-          <a:xfrm>
-            <a:off x="5058277" y="1417320"/>
-            <a:ext cx="2044506" cy="4160520"/>
-          </a:xfrm>
-          <a:prstGeom prst="roundRect">
-            <a:avLst>
-              <a:gd name="adj" fmla="val 4500"/>
-            </a:avLst>
-          </a:prstGeom>
-          <a:solidFill>
-            <a:srgbClr val="F3F5F8"/>
-          </a:solidFill>
-          <a:ln w="12700">
-            <a:solidFill>
-              <a:srgbClr val="E7ECF2"/>
-            </a:solidFill>
-          </a:ln>
-          <a:effectLst/>
-        </p:spPr>
-        <p:style>
-          <a:lnRef idx="1">
-            <a:schemeClr val="accent1"/>
-          </a:lnRef>
-          <a:fillRef idx="3">
-            <a:schemeClr val="accent1"/>
-          </a:fillRef>
-          <a:effectRef idx="2">
-            <a:schemeClr val="accent1"/>
-          </a:effectRef>
-          <a:fontRef idx="minor">
-            <a:schemeClr val="lt1"/>
-          </a:fontRef>
-        </p:style>
-        <p:txBody>
-          <a:bodyPr rtlCol="0" anchor="ctr"/>
-          <a:lstStyle/>
-          <a:p>
-            <a:pPr algn="ctr"/>
-            <a:endParaRPr/>
-          </a:p>
-        </p:txBody>
-      </p:sp>
-      <p:sp>
-        <p:nvSpPr>
-          <p:cNvPr id="24" name="Rounded Rectangle 23"/>
-          <p:cNvSpPr/>
-          <p:nvPr/>
-        </p:nvSpPr>
-        <p:spPr>
-          <a:xfrm>
-            <a:off x="5222869" y="1600200"/>
-            <a:ext cx="1715322" cy="365760"/>
-          </a:xfrm>
-          <a:prstGeom prst="roundRect">
-            <a:avLst>
-              <a:gd name="adj" fmla="val 30000"/>
-            </a:avLst>
-          </a:prstGeom>
-          <a:solidFill>
-            <a:srgbClr val="E4002B"/>
-          </a:solidFill>
-          <a:ln>
-            <a:noFill/>
-          </a:ln>
-          <a:effectLst/>
-        </p:spPr>
-        <p:style>
-          <a:lnRef idx="1">
-            <a:schemeClr val="accent1"/>
-          </a:lnRef>
-          <a:fillRef idx="3">
-            <a:schemeClr val="accent1"/>
-          </a:fillRef>
-          <a:effectRef idx="2">
-            <a:schemeClr val="accent1"/>
-          </a:effectRef>
-          <a:fontRef idx="minor">
-            <a:schemeClr val="lt1"/>
-          </a:fontRef>
-        </p:style>
-        <p:txBody>
-          <a:bodyPr rtlCol="0" anchor="ctr"/>
-          <a:lstStyle/>
-          <a:p>
-            <a:pPr algn="ctr"/>
-            <a:endParaRPr/>
-          </a:p>
-        </p:txBody>
-      </p:sp>
-      <p:sp>
-        <p:nvSpPr>
-          <p:cNvPr id="25" name="TextBox 24"/>
-          <p:cNvSpPr txBox="1"/>
-          <p:nvPr/>
-        </p:nvSpPr>
-        <p:spPr>
-          <a:xfrm>
-            <a:off x="5222869" y="1600200"/>
-            <a:ext cx="1715322" cy="365760"/>
-          </a:xfrm>
-          <a:prstGeom prst="rect">
-            <a:avLst/>
-          </a:prstGeom>
-          <a:noFill/>
-        </p:spPr>
-        <p:txBody>
-          <a:bodyPr wrap="square" lIns="0" tIns="0" rIns="0" bIns="0" anchor="ctr">
-            <a:spAutoFit/>
-          </a:bodyPr>
-          <a:lstStyle/>
-          <a:p>
-            <a:pPr algn="ctr">
-              <a:spcAft>
-                <a:spcPts val="0"/>
-              </a:spcAft>
-            </a:pPr>
-            <a:r>
-              <a:rPr sz="1100" b="1" i="0" spc="40">
-                <a:solidFill>
-                  <a:srgbClr val="FFFFFF"/>
-                </a:solidFill>
-                <a:latin typeface="Calibri"/>
-                <a:ea typeface="Malgun Gothic"/>
-                <a:cs typeface="Calibri"/>
-              </a:rPr>
-              <a:t>AI / INFRA</a:t>
-            </a:r>
-          </a:p>
-        </p:txBody>
-      </p:sp>
-      <p:sp>
-        <p:nvSpPr>
-          <p:cNvPr id="26" name="TextBox 25"/>
-          <p:cNvSpPr txBox="1"/>
-          <p:nvPr/>
-        </p:nvSpPr>
-        <p:spPr>
-          <a:xfrm>
-            <a:off x="5241157" y="2130552"/>
-            <a:ext cx="1715322" cy="548640"/>
-          </a:xfrm>
-          <a:prstGeom prst="rect">
-            <a:avLst/>
-          </a:prstGeom>
-          <a:noFill/>
-        </p:spPr>
-        <p:txBody>
-          <a:bodyPr wrap="square" lIns="73152" tIns="0" rIns="73152" bIns="0" anchor="t">
-            <a:spAutoFit/>
-          </a:bodyPr>
-          <a:lstStyle/>
-          <a:p>
-            <a:pPr algn="l">
-              <a:lnSpc>
-                <a:spcPct val="100000"/>
-              </a:lnSpc>
-              <a:spcAft>
-                <a:spcPts val="0"/>
-              </a:spcAft>
-            </a:pPr>
-            <a:r>
-              <a:rPr sz="900" b="1" i="0">
-                <a:solidFill>
-                  <a:srgbClr val="E4002B"/>
-                </a:solidFill>
-                <a:latin typeface="Calibri"/>
-                <a:ea typeface="Malgun Gothic"/>
-                <a:cs typeface="Calibri"/>
-              </a:rPr>
-              <a:t>● </a:t>
-            </a:r>
-            <a:r>
-              <a:rPr sz="1100" b="0" i="0">
-                <a:solidFill>
-                  <a:srgbClr val="181F2B"/>
-                </a:solidFill>
-                <a:latin typeface="Calibri"/>
-                <a:ea typeface="Malgun Gothic"/>
-                <a:cs typeface="Calibri"/>
-              </a:rPr>
-              <a:t>vLLM 0.19.1</a:t>
-            </a:r>
-          </a:p>
-        </p:txBody>
-      </p:sp>
-      <p:sp>
-        <p:nvSpPr>
-          <p:cNvPr id="27" name="TextBox 26"/>
-          <p:cNvSpPr txBox="1"/>
-          <p:nvPr/>
-        </p:nvSpPr>
-        <p:spPr>
-          <a:xfrm>
-            <a:off x="5241157" y="2679192"/>
-            <a:ext cx="1715322" cy="548640"/>
-          </a:xfrm>
-          <a:prstGeom prst="rect">
-            <a:avLst/>
-          </a:prstGeom>
-          <a:noFill/>
-        </p:spPr>
-        <p:txBody>
-          <a:bodyPr wrap="square" lIns="73152" tIns="0" rIns="73152" bIns="0" anchor="t">
-            <a:spAutoFit/>
-          </a:bodyPr>
-          <a:lstStyle/>
-          <a:p>
-            <a:pPr algn="l">
-              <a:lnSpc>
-                <a:spcPct val="100000"/>
-              </a:lnSpc>
-              <a:spcAft>
-                <a:spcPts val="0"/>
-              </a:spcAft>
-            </a:pPr>
-            <a:r>
-              <a:rPr sz="900" b="1" i="0">
-                <a:solidFill>
-                  <a:srgbClr val="E4002B"/>
-                </a:solidFill>
-                <a:latin typeface="Calibri"/>
-                <a:ea typeface="Malgun Gothic"/>
-                <a:cs typeface="Calibri"/>
-              </a:rPr>
-              <a:t>● </a:t>
-            </a:r>
-            <a:r>
-              <a:rPr sz="1100" b="0" i="0">
-                <a:solidFill>
-                  <a:srgbClr val="181F2B"/>
-                </a:solidFill>
-                <a:latin typeface="Calibri"/>
-                <a:ea typeface="Malgun Gothic"/>
-                <a:cs typeface="Calibri"/>
-              </a:rPr>
-              <a:t>Qwen3.6-35B (AWQ)</a:t>
-            </a:r>
-          </a:p>
-        </p:txBody>
-      </p:sp>
-      <p:sp>
-        <p:nvSpPr>
-          <p:cNvPr id="28" name="TextBox 27"/>
-          <p:cNvSpPr txBox="1"/>
-          <p:nvPr/>
-        </p:nvSpPr>
-        <p:spPr>
-          <a:xfrm>
-            <a:off x="5241157" y="3227832"/>
-            <a:ext cx="1715322" cy="548640"/>
-          </a:xfrm>
-          <a:prstGeom prst="rect">
-            <a:avLst/>
-          </a:prstGeom>
-          <a:noFill/>
-        </p:spPr>
-        <p:txBody>
-          <a:bodyPr wrap="square" lIns="73152" tIns="0" rIns="73152" bIns="0" anchor="t">
-            <a:spAutoFit/>
-          </a:bodyPr>
-          <a:lstStyle/>
-          <a:p>
-            <a:pPr algn="l">
-              <a:lnSpc>
-                <a:spcPct val="100000"/>
-              </a:lnSpc>
-              <a:spcAft>
-                <a:spcPts val="0"/>
-              </a:spcAft>
-            </a:pPr>
-            <a:r>
-              <a:rPr sz="900" b="1" i="0">
-                <a:solidFill>
-                  <a:srgbClr val="E4002B"/>
-                </a:solidFill>
-                <a:latin typeface="Calibri"/>
-                <a:ea typeface="Malgun Gothic"/>
-                <a:cs typeface="Calibri"/>
-              </a:rPr>
-              <a:t>● </a:t>
-            </a:r>
-            <a:r>
-              <a:rPr sz="1100" b="0" i="0">
-                <a:solidFill>
-                  <a:srgbClr val="181F2B"/>
-                </a:solidFill>
-                <a:latin typeface="Calibri"/>
-                <a:ea typeface="Malgun Gothic"/>
-                <a:cs typeface="Calibri"/>
-              </a:rPr>
-              <a:t>Qwen3-Embedding-8B</a:t>
-            </a:r>
-          </a:p>
-        </p:txBody>
-      </p:sp>
-      <p:sp>
-        <p:nvSpPr>
-          <p:cNvPr id="29" name="TextBox 28"/>
-          <p:cNvSpPr txBox="1"/>
-          <p:nvPr/>
-        </p:nvSpPr>
-        <p:spPr>
-          <a:xfrm>
-            <a:off x="5241157" y="3776472"/>
-            <a:ext cx="1715322" cy="548640"/>
-          </a:xfrm>
-          <a:prstGeom prst="rect">
-            <a:avLst/>
-          </a:prstGeom>
-          <a:noFill/>
-        </p:spPr>
-        <p:txBody>
-          <a:bodyPr wrap="square" lIns="73152" tIns="0" rIns="73152" bIns="0" anchor="t">
-            <a:spAutoFit/>
-          </a:bodyPr>
-          <a:lstStyle/>
-          <a:p>
-            <a:pPr algn="l">
-              <a:lnSpc>
-                <a:spcPct val="100000"/>
-              </a:lnSpc>
-              <a:spcAft>
-                <a:spcPts val="0"/>
-              </a:spcAft>
-            </a:pPr>
-            <a:r>
-              <a:rPr sz="900" b="1" i="0">
-                <a:solidFill>
-                  <a:srgbClr val="E4002B"/>
-                </a:solidFill>
-                <a:latin typeface="Calibri"/>
-                <a:ea typeface="Malgun Gothic"/>
-                <a:cs typeface="Calibri"/>
-              </a:rPr>
-              <a:t>● </a:t>
-            </a:r>
-            <a:r>
-              <a:rPr sz="1100" b="0" i="0">
-                <a:solidFill>
-                  <a:srgbClr val="181F2B"/>
-                </a:solidFill>
-                <a:latin typeface="Calibri"/>
-                <a:ea typeface="Malgun Gothic"/>
-                <a:cs typeface="Calibri"/>
-              </a:rPr>
-              <a:t>Qwen3-Reranker-4B</a:t>
-            </a:r>
-          </a:p>
-        </p:txBody>
-      </p:sp>
-      <p:sp>
-        <p:nvSpPr>
-          <p:cNvPr id="30" name="TextBox 29"/>
-          <p:cNvSpPr txBox="1"/>
-          <p:nvPr/>
-        </p:nvSpPr>
-        <p:spPr>
-          <a:xfrm>
-            <a:off x="5241157" y="4325112"/>
-            <a:ext cx="1715322" cy="548640"/>
-          </a:xfrm>
-          <a:prstGeom prst="rect">
-            <a:avLst/>
-          </a:prstGeom>
-          <a:noFill/>
-        </p:spPr>
-        <p:txBody>
-          <a:bodyPr wrap="square" lIns="73152" tIns="0" rIns="73152" bIns="0" anchor="t">
-            <a:spAutoFit/>
-          </a:bodyPr>
-          <a:lstStyle/>
-          <a:p>
-            <a:pPr algn="l">
-              <a:lnSpc>
-                <a:spcPct val="100000"/>
-              </a:lnSpc>
-              <a:spcAft>
-                <a:spcPts val="0"/>
-              </a:spcAft>
-            </a:pPr>
-            <a:r>
-              <a:rPr sz="900" b="1" i="0">
-                <a:solidFill>
-                  <a:srgbClr val="E4002B"/>
-                </a:solidFill>
-                <a:latin typeface="Calibri"/>
-                <a:ea typeface="Malgun Gothic"/>
-                <a:cs typeface="Calibri"/>
-              </a:rPr>
-              <a:t>● </a:t>
-            </a:r>
-            <a:r>
-              <a:rPr sz="1100" b="0" i="0">
-                <a:solidFill>
-                  <a:srgbClr val="181F2B"/>
-                </a:solidFill>
-                <a:latin typeface="Malgun Gothic"/>
-                <a:ea typeface="Malgun Gothic"/>
-                <a:cs typeface="Malgun Gothic"/>
-              </a:rPr>
-              <a:t>OpenAI 호환 /v1/*</a:t>
-            </a:r>
-          </a:p>
-        </p:txBody>
-      </p:sp>
-      <p:sp>
-        <p:nvSpPr>
-          <p:cNvPr id="31" name="TextBox 30"/>
-          <p:cNvSpPr txBox="1"/>
-          <p:nvPr/>
-        </p:nvSpPr>
-        <p:spPr>
-          <a:xfrm>
-            <a:off x="5241157" y="4873751"/>
-            <a:ext cx="1715322" cy="548640"/>
-          </a:xfrm>
-          <a:prstGeom prst="rect">
-            <a:avLst/>
-          </a:prstGeom>
-          <a:noFill/>
-        </p:spPr>
-        <p:txBody>
-          <a:bodyPr wrap="square" lIns="73152" tIns="0" rIns="73152" bIns="0" anchor="t">
-            <a:spAutoFit/>
-          </a:bodyPr>
-          <a:lstStyle/>
-          <a:p>
-            <a:pPr algn="l">
-              <a:lnSpc>
-                <a:spcPct val="100000"/>
-              </a:lnSpc>
-              <a:spcAft>
-                <a:spcPts val="0"/>
-              </a:spcAft>
-            </a:pPr>
-            <a:r>
-              <a:rPr sz="900" b="1" i="0">
-                <a:solidFill>
-                  <a:srgbClr val="E4002B"/>
-                </a:solidFill>
-                <a:latin typeface="Calibri"/>
-                <a:ea typeface="Malgun Gothic"/>
-                <a:cs typeface="Calibri"/>
-              </a:rPr>
-              <a:t>● </a:t>
-            </a:r>
-            <a:r>
-              <a:rPr sz="1100" b="0" i="0">
-                <a:solidFill>
-                  <a:srgbClr val="181F2B"/>
-                </a:solidFill>
-                <a:latin typeface="Malgun Gothic"/>
-                <a:ea typeface="Malgun Gothic"/>
-                <a:cs typeface="Malgun Gothic"/>
-              </a:rPr>
-              <a:t>로컬 GPU / RunPod</a:t>
-            </a:r>
-          </a:p>
-        </p:txBody>
-      </p:sp>
-      <p:sp>
-        <p:nvSpPr>
-          <p:cNvPr id="32" name="Rectangle 31"/>
-          <p:cNvSpPr/>
-          <p:nvPr/>
-        </p:nvSpPr>
-        <p:spPr>
-          <a:xfrm>
-            <a:off x="0" y="5888736"/>
-            <a:ext cx="7559984" cy="4236323"/>
-          </a:xfrm>
-          <a:prstGeom prst="rect">
-            <a:avLst/>
-          </a:prstGeom>
-          <a:solidFill>
-            <a:srgbClr val="0F1626"/>
-          </a:solidFill>
-          <a:ln>
-            <a:noFill/>
-          </a:ln>
-          <a:effectLst/>
-        </p:spPr>
-        <p:style>
-          <a:lnRef idx="1">
-            <a:schemeClr val="accent1"/>
-          </a:lnRef>
-          <a:fillRef idx="3">
-            <a:schemeClr val="accent1"/>
-          </a:fillRef>
-          <a:effectRef idx="2">
-            <a:schemeClr val="accent1"/>
-          </a:effectRef>
-          <a:fontRef idx="minor">
-            <a:schemeClr val="lt1"/>
-          </a:fontRef>
-        </p:style>
-        <p:txBody>
-          <a:bodyPr rtlCol="0" anchor="ctr"/>
-          <a:lstStyle/>
-          <a:p>
-            <a:pPr algn="ctr"/>
-            <a:endParaRPr/>
-          </a:p>
-        </p:txBody>
-      </p:sp>
-      <p:sp>
-        <p:nvSpPr>
-          <p:cNvPr id="33" name="TextBox 32"/>
-          <p:cNvSpPr txBox="1"/>
-          <p:nvPr/>
-        </p:nvSpPr>
-        <p:spPr>
-          <a:xfrm>
-            <a:off x="457200" y="6126479"/>
-            <a:ext cx="6645584" cy="274320"/>
-          </a:xfrm>
-          <a:prstGeom prst="rect">
-            <a:avLst/>
-          </a:prstGeom>
-          <a:noFill/>
-        </p:spPr>
-        <p:txBody>
-          <a:bodyPr wrap="square" lIns="73152" tIns="0" rIns="73152" bIns="0" anchor="t">
-            <a:spAutoFit/>
-          </a:bodyPr>
-          <a:lstStyle/>
-          <a:p>
-            <a:pPr algn="l">
-              <a:spcAft>
-                <a:spcPts val="0"/>
-              </a:spcAft>
-            </a:pPr>
-            <a:r>
-              <a:rPr sz="1100" b="1" i="0" spc="80">
-                <a:solidFill>
-                  <a:srgbClr val="E4002B"/>
-                </a:solidFill>
-                <a:latin typeface="Malgun Gothic"/>
-                <a:ea typeface="Malgun Gothic"/>
-                <a:cs typeface="Malgun Gothic"/>
-              </a:rPr>
-              <a:t>결과</a:t>
-            </a:r>
-          </a:p>
-        </p:txBody>
-      </p:sp>
-      <p:sp>
-        <p:nvSpPr>
-          <p:cNvPr id="34" name="TextBox 33"/>
-          <p:cNvSpPr txBox="1"/>
-          <p:nvPr/>
-        </p:nvSpPr>
-        <p:spPr>
-          <a:xfrm>
-            <a:off x="457200" y="6364223"/>
-            <a:ext cx="6645584" cy="365760"/>
-          </a:xfrm>
-          <a:prstGeom prst="rect">
-            <a:avLst/>
-          </a:prstGeom>
-          <a:noFill/>
-        </p:spPr>
-        <p:txBody>
-          <a:bodyPr wrap="square" lIns="73152" tIns="0" rIns="73152" bIns="0" anchor="t">
-            <a:spAutoFit/>
-          </a:bodyPr>
-          <a:lstStyle/>
-          <a:p>
-            <a:pPr algn="l">
-              <a:spcAft>
-                <a:spcPts val="0"/>
-              </a:spcAft>
-            </a:pPr>
-            <a:r>
-              <a:rPr sz="1500" b="1" i="0">
-                <a:solidFill>
-                  <a:srgbClr val="FFFFFF"/>
-                </a:solidFill>
-                <a:latin typeface="Malgun Gothic"/>
-                <a:ea typeface="Malgun Gothic"/>
-                <a:cs typeface="Malgun Gothic"/>
-              </a:rPr>
-              <a:t>요구사항 분석 → 설계 → 구현 → 테스트 → 실행까지 전 사이클 완결</a:t>
-            </a:r>
-          </a:p>
-        </p:txBody>
-      </p:sp>
-      <p:sp>
-        <p:nvSpPr>
-          <p:cNvPr id="35" name="Rounded Rectangle 34"/>
-          <p:cNvSpPr/>
-          <p:nvPr/>
-        </p:nvSpPr>
-        <p:spPr>
-          <a:xfrm>
-            <a:off x="457200" y="7389677"/>
-            <a:ext cx="1496804" cy="2148840"/>
-          </a:xfrm>
-          <a:prstGeom prst="roundRect">
-            <a:avLst>
-              <a:gd name="adj" fmla="val 6000"/>
-            </a:avLst>
-          </a:prstGeom>
-          <a:solidFill>
-            <a:srgbClr val="23304F"/>
-          </a:solidFill>
-          <a:ln>
-            <a:noFill/>
-          </a:ln>
-          <a:effectLst/>
-        </p:spPr>
-        <p:style>
-          <a:lnRef idx="1">
-            <a:schemeClr val="accent1"/>
-          </a:lnRef>
-          <a:fillRef idx="3">
-            <a:schemeClr val="accent1"/>
-          </a:fillRef>
-          <a:effectRef idx="2">
-            <a:schemeClr val="accent1"/>
-          </a:effectRef>
-          <a:fontRef idx="minor">
-            <a:schemeClr val="lt1"/>
-          </a:fontRef>
-        </p:style>
-        <p:txBody>
-          <a:bodyPr rtlCol="0" anchor="ctr"/>
-          <a:lstStyle/>
-          <a:p>
-            <a:pPr algn="ctr"/>
-            <a:endParaRPr/>
-          </a:p>
-        </p:txBody>
-      </p:sp>
-      <p:sp>
-        <p:nvSpPr>
-          <p:cNvPr id="36" name="TextBox 35"/>
-          <p:cNvSpPr txBox="1"/>
-          <p:nvPr/>
-        </p:nvSpPr>
-        <p:spPr>
-          <a:xfrm>
-            <a:off x="457200" y="7389677"/>
-            <a:ext cx="1496804" cy="2148840"/>
-          </a:xfrm>
-          <a:prstGeom prst="rect">
-            <a:avLst/>
-          </a:prstGeom>
-          <a:noFill/>
-        </p:spPr>
-        <p:txBody>
-          <a:bodyPr wrap="square" lIns="45720" tIns="0" rIns="45720" bIns="0" anchor="ctr">
-            <a:spAutoFit/>
-          </a:bodyPr>
-          <a:lstStyle/>
-          <a:p>
-            <a:pPr algn="ctr">
-              <a:spcAft>
-                <a:spcPts val="800"/>
-              </a:spcAft>
-            </a:pPr>
-            <a:r>
-              <a:rPr sz="2500" b="1" i="0">
-                <a:solidFill>
-                  <a:srgbClr val="E4002B"/>
-                </a:solidFill>
-                <a:latin typeface="Cambria"/>
-                <a:ea typeface="Malgun Gothic"/>
-                <a:cs typeface="Cambria"/>
-              </a:rPr>
-              <a:t>7 / 30</a:t>
-            </a:r>
-          </a:p>
-          <a:p>
-            <a:pPr algn="ctr">
-              <a:spcAft>
-                <a:spcPts val="0"/>
-              </a:spcAft>
-            </a:pPr>
-            <a:r>
-              <a:rPr sz="950" b="0" i="0">
-                <a:solidFill>
-                  <a:srgbClr val="CADCFC"/>
-                </a:solidFill>
-                <a:latin typeface="Malgun Gothic"/>
-                <a:ea typeface="Malgun Gothic"/>
-                <a:cs typeface="Malgun Gothic"/>
-              </a:rPr>
-              <a:t>모듈 / 요구사항 구현</a:t>
-            </a:r>
-          </a:p>
-        </p:txBody>
-      </p:sp>
-      <p:sp>
-        <p:nvSpPr>
-          <p:cNvPr id="37" name="Rounded Rectangle 36"/>
-          <p:cNvSpPr/>
-          <p:nvPr/>
-        </p:nvSpPr>
-        <p:spPr>
-          <a:xfrm>
-            <a:off x="2173460" y="7389677"/>
-            <a:ext cx="1496804" cy="2148840"/>
-          </a:xfrm>
-          <a:prstGeom prst="roundRect">
-            <a:avLst>
-              <a:gd name="adj" fmla="val 6000"/>
-            </a:avLst>
-          </a:prstGeom>
-          <a:solidFill>
-            <a:srgbClr val="23304F"/>
-          </a:solidFill>
-          <a:ln>
-            <a:noFill/>
-          </a:ln>
-          <a:effectLst/>
-        </p:spPr>
-        <p:style>
-          <a:lnRef idx="1">
-            <a:schemeClr val="accent1"/>
-          </a:lnRef>
-          <a:fillRef idx="3">
-            <a:schemeClr val="accent1"/>
-          </a:fillRef>
-          <a:effectRef idx="2">
-            <a:schemeClr val="accent1"/>
-          </a:effectRef>
-          <a:fontRef idx="minor">
-            <a:schemeClr val="lt1"/>
-          </a:fontRef>
-        </p:style>
-        <p:txBody>
-          <a:bodyPr rtlCol="0" anchor="ctr"/>
-          <a:lstStyle/>
-          <a:p>
-            <a:pPr algn="ctr"/>
-            <a:endParaRPr/>
-          </a:p>
-        </p:txBody>
-      </p:sp>
-      <p:sp>
-        <p:nvSpPr>
-          <p:cNvPr id="38" name="TextBox 37"/>
-          <p:cNvSpPr txBox="1"/>
-          <p:nvPr/>
-        </p:nvSpPr>
-        <p:spPr>
-          <a:xfrm>
-            <a:off x="2173460" y="7389677"/>
-            <a:ext cx="1496804" cy="2148840"/>
-          </a:xfrm>
-          <a:prstGeom prst="rect">
-            <a:avLst/>
-          </a:prstGeom>
-          <a:noFill/>
-        </p:spPr>
-        <p:txBody>
-          <a:bodyPr wrap="square" lIns="45720" tIns="0" rIns="45720" bIns="0" anchor="ctr">
-            <a:spAutoFit/>
-          </a:bodyPr>
-          <a:lstStyle/>
-          <a:p>
-            <a:pPr algn="ctr">
-              <a:spcAft>
-                <a:spcPts val="800"/>
-              </a:spcAft>
-            </a:pPr>
-            <a:r>
-              <a:rPr sz="2500" b="1" i="0">
-                <a:solidFill>
-                  <a:srgbClr val="E4002B"/>
-                </a:solidFill>
-                <a:latin typeface="Cambria"/>
-                <a:ea typeface="Malgun Gothic"/>
-                <a:cs typeface="Cambria"/>
-              </a:rPr>
-              <a:t>25 / 25</a:t>
-            </a:r>
-          </a:p>
-          <a:p>
-            <a:pPr algn="ctr">
-              <a:spcAft>
-                <a:spcPts val="0"/>
-              </a:spcAft>
-            </a:pPr>
-            <a:r>
-              <a:rPr sz="950" b="0" i="0">
-                <a:solidFill>
-                  <a:srgbClr val="CADCFC"/>
-                </a:solidFill>
-                <a:latin typeface="Malgun Gothic"/>
-                <a:ea typeface="Malgun Gothic"/>
-                <a:cs typeface="Malgun Gothic"/>
-              </a:rPr>
-              <a:t>단위 테스트 통과</a:t>
-            </a:r>
-          </a:p>
-        </p:txBody>
-      </p:sp>
-      <p:sp>
-        <p:nvSpPr>
-          <p:cNvPr id="39" name="Rounded Rectangle 38"/>
-          <p:cNvSpPr/>
-          <p:nvPr/>
-        </p:nvSpPr>
-        <p:spPr>
-          <a:xfrm>
-            <a:off x="3889720" y="7389677"/>
-            <a:ext cx="1496804" cy="2148840"/>
-          </a:xfrm>
-          <a:prstGeom prst="roundRect">
-            <a:avLst>
-              <a:gd name="adj" fmla="val 6000"/>
-            </a:avLst>
-          </a:prstGeom>
-          <a:solidFill>
-            <a:srgbClr val="23304F"/>
-          </a:solidFill>
-          <a:ln>
-            <a:noFill/>
-          </a:ln>
-          <a:effectLst/>
-        </p:spPr>
-        <p:style>
-          <a:lnRef idx="1">
-            <a:schemeClr val="accent1"/>
-          </a:lnRef>
-          <a:fillRef idx="3">
-            <a:schemeClr val="accent1"/>
-          </a:fillRef>
-          <a:effectRef idx="2">
-            <a:schemeClr val="accent1"/>
-          </a:effectRef>
-          <a:fontRef idx="minor">
-            <a:schemeClr val="lt1"/>
-          </a:fontRef>
-        </p:style>
-        <p:txBody>
-          <a:bodyPr rtlCol="0" anchor="ctr"/>
-          <a:lstStyle/>
-          <a:p>
-            <a:pPr algn="ctr"/>
-            <a:endParaRPr/>
-          </a:p>
-        </p:txBody>
-      </p:sp>
-      <p:sp>
-        <p:nvSpPr>
-          <p:cNvPr id="40" name="TextBox 39"/>
-          <p:cNvSpPr txBox="1"/>
-          <p:nvPr/>
-        </p:nvSpPr>
-        <p:spPr>
-          <a:xfrm>
-            <a:off x="3889720" y="7389677"/>
-            <a:ext cx="1496804" cy="2148840"/>
-          </a:xfrm>
-          <a:prstGeom prst="rect">
-            <a:avLst/>
-          </a:prstGeom>
-          <a:noFill/>
-        </p:spPr>
-        <p:txBody>
-          <a:bodyPr wrap="square" lIns="45720" tIns="0" rIns="45720" bIns="0" anchor="ctr">
-            <a:spAutoFit/>
-          </a:bodyPr>
-          <a:lstStyle/>
-          <a:p>
-            <a:pPr algn="ctr">
-              <a:spcAft>
-                <a:spcPts val="800"/>
-              </a:spcAft>
-            </a:pPr>
-            <a:r>
-              <a:rPr sz="1900" b="1" i="0">
-                <a:solidFill>
-                  <a:srgbClr val="E4002B"/>
-                </a:solidFill>
-                <a:latin typeface="Cambria"/>
-                <a:ea typeface="Malgun Gothic"/>
-                <a:cs typeface="Cambria"/>
-              </a:rPr>
-              <a:t>651 · 4096</a:t>
-            </a:r>
-          </a:p>
-          <a:p>
-            <a:pPr algn="ctr">
-              <a:spcAft>
-                <a:spcPts val="0"/>
-              </a:spcAft>
-            </a:pPr>
-            <a:r>
-              <a:rPr sz="950" b="0" i="0">
-                <a:solidFill>
-                  <a:srgbClr val="CADCFC"/>
-                </a:solidFill>
-                <a:latin typeface="Malgun Gothic"/>
-                <a:ea typeface="Malgun Gothic"/>
-                <a:cs typeface="Malgun Gothic"/>
-              </a:rPr>
-              <a:t>템플릿 · 임베딩 차원</a:t>
-            </a:r>
-          </a:p>
-        </p:txBody>
-      </p:sp>
-      <p:sp>
-        <p:nvSpPr>
-          <p:cNvPr id="41" name="Rounded Rectangle 40"/>
-          <p:cNvSpPr/>
-          <p:nvPr/>
-        </p:nvSpPr>
-        <p:spPr>
-          <a:xfrm>
-            <a:off x="5605980" y="7389677"/>
-            <a:ext cx="1496804" cy="2148840"/>
-          </a:xfrm>
-          <a:prstGeom prst="roundRect">
-            <a:avLst>
-              <a:gd name="adj" fmla="val 6000"/>
-            </a:avLst>
-          </a:prstGeom>
-          <a:solidFill>
-            <a:srgbClr val="23304F"/>
-          </a:solidFill>
-          <a:ln>
-            <a:noFill/>
-          </a:ln>
-          <a:effectLst/>
-        </p:spPr>
-        <p:style>
-          <a:lnRef idx="1">
-            <a:schemeClr val="accent1"/>
-          </a:lnRef>
-          <a:fillRef idx="3">
-            <a:schemeClr val="accent1"/>
-          </a:fillRef>
-          <a:effectRef idx="2">
-            <a:schemeClr val="accent1"/>
-          </a:effectRef>
-          <a:fontRef idx="minor">
-            <a:schemeClr val="lt1"/>
-          </a:fontRef>
-        </p:style>
-        <p:txBody>
-          <a:bodyPr rtlCol="0" anchor="ctr"/>
-          <a:lstStyle/>
-          <a:p>
-            <a:pPr algn="ctr"/>
-            <a:endParaRPr/>
-          </a:p>
-        </p:txBody>
-      </p:sp>
-      <p:sp>
-        <p:nvSpPr>
-          <p:cNvPr id="42" name="TextBox 41"/>
-          <p:cNvSpPr txBox="1"/>
-          <p:nvPr/>
-        </p:nvSpPr>
-        <p:spPr>
-          <a:xfrm>
-            <a:off x="5605980" y="7389677"/>
-            <a:ext cx="1496804" cy="2148840"/>
-          </a:xfrm>
-          <a:prstGeom prst="rect">
-            <a:avLst/>
-          </a:prstGeom>
-          <a:noFill/>
-        </p:spPr>
-        <p:txBody>
-          <a:bodyPr wrap="square" lIns="45720" tIns="0" rIns="45720" bIns="0" anchor="ctr">
-            <a:spAutoFit/>
-          </a:bodyPr>
-          <a:lstStyle/>
-          <a:p>
-            <a:pPr algn="ctr">
-              <a:spcAft>
-                <a:spcPts val="800"/>
-              </a:spcAft>
-            </a:pPr>
-            <a:r>
-              <a:rPr sz="2500" b="1" i="0">
-                <a:solidFill>
-                  <a:srgbClr val="E4002B"/>
-                </a:solidFill>
-                <a:latin typeface="Cambria"/>
-                <a:ea typeface="Malgun Gothic"/>
-                <a:cs typeface="Cambria"/>
-              </a:rPr>
-              <a:t>0</a:t>
-            </a:r>
-          </a:p>
-          <a:p>
-            <a:pPr algn="ctr">
-              <a:spcAft>
-                <a:spcPts val="0"/>
-              </a:spcAft>
-            </a:pPr>
-            <a:r>
-              <a:rPr sz="950" b="0" i="0">
-                <a:solidFill>
-                  <a:srgbClr val="CADCFC"/>
-                </a:solidFill>
-                <a:latin typeface="Malgun Gothic"/>
-                <a:ea typeface="Malgun Gothic"/>
-                <a:cs typeface="Malgun Gothic"/>
-              </a:rPr>
-              <a:t>FE 런타임 의존성</a:t>
-            </a:r>
-          </a:p>
-        </p:txBody>
-      </p:sp>
-      <p:sp>
-        <p:nvSpPr>
-          <p:cNvPr id="43" name="TextBox 42"/>
-          <p:cNvSpPr txBox="1"/>
-          <p:nvPr/>
-        </p:nvSpPr>
-        <p:spPr>
-          <a:xfrm>
-            <a:off x="457200" y="10271363"/>
-            <a:ext cx="6096944" cy="274320"/>
-          </a:xfrm>
-          <a:prstGeom prst="rect">
-            <a:avLst/>
-          </a:prstGeom>
-          <a:noFill/>
-        </p:spPr>
-        <p:txBody>
-          <a:bodyPr wrap="square" lIns="73152" tIns="0" rIns="73152" bIns="0" anchor="ctr">
-            <a:spAutoFit/>
-          </a:bodyPr>
-          <a:lstStyle/>
-          <a:p>
-            <a:pPr algn="l">
-              <a:spcAft>
-                <a:spcPts val="0"/>
-              </a:spcAft>
-            </a:pPr>
-            <a:r>
-              <a:rPr sz="850" b="1" i="0">
-                <a:solidFill>
-                  <a:srgbClr val="181F2B"/>
-                </a:solidFill>
-                <a:latin typeface="Cambria"/>
-                <a:ea typeface="Malgun Gothic"/>
-                <a:cs typeface="Cambria"/>
-              </a:rPr>
-              <a:t>Copilot Meta-Prompting</a:t>
-            </a:r>
-            <a:r>
-              <a:rPr sz="850" b="0" i="0">
-                <a:solidFill>
-                  <a:srgbClr val="9AA4AE"/>
-                </a:solidFill>
-                <a:latin typeface="Malgun Gothic"/>
-                <a:ea typeface="Malgun Gothic"/>
-                <a:cs typeface="Malgun Gothic"/>
-              </a:rPr>
-              <a:t>    ·    SW Bootcamp 13기 C반 4팀    ·    github.com/swbteng/copilot-meta-prompting</a:t>
-            </a:r>
-          </a:p>
-        </p:txBody>
-      </p:sp>
-      <p:sp>
-        <p:nvSpPr>
-          <p:cNvPr id="44" name="TextBox 43"/>
-          <p:cNvSpPr txBox="1"/>
-          <p:nvPr/>
-        </p:nvSpPr>
-        <p:spPr>
-          <a:xfrm>
-            <a:off x="6371264" y="10271363"/>
-            <a:ext cx="731520" cy="274320"/>
-          </a:xfrm>
-          <a:prstGeom prst="rect">
-            <a:avLst/>
-          </a:prstGeom>
-          <a:noFill/>
-        </p:spPr>
-        <p:txBody>
-          <a:bodyPr wrap="square" lIns="73152" tIns="0" rIns="0" bIns="0" anchor="ctr">
-            <a:spAutoFit/>
-          </a:bodyPr>
-          <a:lstStyle/>
-          <a:p>
-            <a:pPr algn="r">
-              <a:spcAft>
-                <a:spcPts val="0"/>
-              </a:spcAft>
-            </a:pPr>
-            <a:r>
-              <a:rPr sz="850" b="1" i="0">
-                <a:solidFill>
-                  <a:srgbClr val="9AA4AE"/>
-                </a:solidFill>
-                <a:latin typeface="Cambria"/>
-                <a:ea typeface="Malgun Gothic"/>
-                <a:cs typeface="Cambria"/>
-              </a:rPr>
-              <a:t>4 / 4</a:t>
+              <a:t>2 / 2</a:t>
             </a:r>
           </a:p>
         </p:txBody>
